--- a/plugins/v23/skills/om-builder/assets/v23-template.pptx
+++ b/plugins/v23/skills/om-builder/assets/v23-template.pptx
@@ -2,14 +2,17 @@
 <file path=ppt/presentation.xml><?xml version="1.0" encoding="utf-8"?>
 <p:presentation xmlns:a="http://schemas.openxmlformats.org/drawingml/2006/main" xmlns:r="http://schemas.openxmlformats.org/officeDocument/2006/relationships" xmlns:p="http://schemas.openxmlformats.org/presentationml/2006/main" saveSubsetFonts="1">
   <p:sldMasterIdLst>
-    <p:sldMasterId id="2147483696" r:id="rId4"/>
+    <p:sldMasterId id="2147483648" r:id="rId4"/>
   </p:sldMasterIdLst>
   <p:notesMasterIdLst>
-    <p:notesMasterId r:id="rId26"/>
+    <p:notesMasterId r:id="rId44"/>
   </p:notesMasterIdLst>
+  <p:handoutMasterIdLst>
+    <p:handoutMasterId r:id="rId45"/>
+  </p:handoutMasterIdLst>
   <p:sldIdLst/>
   <p:sldSz cx="12192000" cy="6858000"/>
-  <p:notesSz cx="6858000" cy="9144000"/>
+  <p:notesSz cx="6950075" cy="9236075"/>
   <p:defaultTextStyle>
     <a:defPPr>
       <a:defRPr lang="en-US"/>
@@ -107,2120 +110,301 @@
   </p:defaultTextStyle>
   <p:extLst>
     <p:ext uri="{EFAFB233-063F-42B5-8137-9DF3F51BA10A}">
-      <p15:sldGuideLst xmlns:p15="http://schemas.microsoft.com/office/powerpoint/2012/main"/>
+      <p15:sldGuideLst xmlns:p15="http://schemas.microsoft.com/office/powerpoint/2012/main">
+        <p15:guide id="1" orient="horz" pos="2160" userDrawn="1">
+          <p15:clr>
+            <a:srgbClr val="A4A3A4"/>
+          </p15:clr>
+        </p15:guide>
+        <p15:guide id="2" pos="3840" userDrawn="1">
+          <p15:clr>
+            <a:srgbClr val="A4A3A4"/>
+          </p15:clr>
+        </p15:guide>
+      </p15:sldGuideLst>
     </p:ext>
   </p:extLst>
 </p:presentation>
 </file>
 
-<file path=ppt/revisionInfo.xml><?xml version="1.0" encoding="utf-8"?>
-<p1510:revInfo xmlns:a="http://schemas.openxmlformats.org/drawingml/2006/main" xmlns:r="http://schemas.openxmlformats.org/officeDocument/2006/relationships" xmlns:p1510="http://schemas.microsoft.com/office/powerpoint/2015/10/main">
-  <p1510:revLst>
-    <p1510:client id="{5663758B-1B02-410A-824E-2D82D8BB2A6F}" v="1" dt="2026-05-26T18:06:33.498"/>
-  </p1510:revLst>
-</p1510:revInfo>
+<file path=ppt/authors.xml><?xml version="1.0" encoding="utf-8"?>
+<p188:authorLst xmlns:a="http://schemas.openxmlformats.org/drawingml/2006/main" xmlns:r="http://schemas.openxmlformats.org/officeDocument/2006/relationships" xmlns:p188="http://schemas.microsoft.com/office/powerpoint/2018/8/main">
+  <p188:author id="{762FF113-A812-6DE2-EEF9-4E3674255393}" name="Theodore Mouhlas" initials="TM" userId="S::tmouhlas@v23group.com::01ff3cd0-0633-42e2-959a-392a4aa13f64" providerId="AD"/>
+  <p188:author id="{80603580-F5F1-C191-1AEC-57B23718219D}" name="Liz Orlova" initials="LO" userId="S::lorlova@v23group.com::34bf025f-3747-4d58-94cf-53221bcf2f0e" providerId="AD"/>
+</p188:authorLst>
 </file>
 
 <file path=ppt/changesInfos/changesInfo1.xml><?xml version="1.0" encoding="utf-8"?>
 <pc:chgInfo xmlns:a="http://schemas.openxmlformats.org/drawingml/2006/main" xmlns:r="http://schemas.openxmlformats.org/officeDocument/2006/relationships" xmlns:ac="http://schemas.microsoft.com/office/drawing/2013/main/command" xmlns:pc="http://schemas.microsoft.com/office/powerpoint/2013/main/command">
   <pc:docChgLst>
-    <pc:chgData name="Theodore Mouhlas" userId="01ff3cd0-0633-42e2-959a-392a4aa13f64" providerId="ADAL" clId="{2673A91A-3439-4315-AE72-1AC445A732DB}"/>
-    <pc:docChg chg="undo redo custSel addSld delSld modSld sldOrd">
-      <pc:chgData name="Theodore Mouhlas" userId="01ff3cd0-0633-42e2-959a-392a4aa13f64" providerId="ADAL" clId="{2673A91A-3439-4315-AE72-1AC445A732DB}" dt="2026-05-26T19:18:36.485" v="752" actId="478"/>
+    <pc:chgData name="Theodore Mouhlas" userId="01ff3cd0-0633-42e2-959a-392a4aa13f64" providerId="ADAL" clId="{3807C590-9C5F-4341-9358-7295F7680566}"/>
+    <pc:docChg chg="undo redo custSel modSld">
+      <pc:chgData name="Theodore Mouhlas" userId="01ff3cd0-0633-42e2-959a-392a4aa13f64" providerId="ADAL" clId="{3807C590-9C5F-4341-9358-7295F7680566}" dt="2026-04-17T03:17:04.049" v="946" actId="20577"/>
       <pc:docMkLst>
         <pc:docMk/>
       </pc:docMkLst>
-      <pc:sldChg chg="del">
-        <pc:chgData name="Theodore Mouhlas" userId="01ff3cd0-0633-42e2-959a-392a4aa13f64" providerId="ADAL" clId="{2673A91A-3439-4315-AE72-1AC445A732DB}" dt="2026-05-26T18:34:55.047" v="673"/>
+      <pc:sldChg chg="modSp mod">
+        <pc:chgData name="Theodore Mouhlas" userId="01ff3cd0-0633-42e2-959a-392a4aa13f64" providerId="ADAL" clId="{3807C590-9C5F-4341-9358-7295F7680566}" dt="2026-04-17T03:17:04.049" v="946" actId="20577"/>
         <pc:sldMkLst>
           <pc:docMk/>
-          <pc:sldMk cId="3892114611" sldId="273"/>
-        </pc:sldMkLst>
-      </pc:sldChg>
-      <pc:sldChg chg="del">
-        <pc:chgData name="Theodore Mouhlas" userId="01ff3cd0-0633-42e2-959a-392a4aa13f64" providerId="ADAL" clId="{2673A91A-3439-4315-AE72-1AC445A732DB}" dt="2026-05-26T18:13:21.749" v="344"/>
-        <pc:sldMkLst>
-          <pc:docMk/>
-          <pc:sldMk cId="2394164613" sldId="274"/>
-        </pc:sldMkLst>
-      </pc:sldChg>
-      <pc:sldChg chg="del">
-        <pc:chgData name="Theodore Mouhlas" userId="01ff3cd0-0633-42e2-959a-392a4aa13f64" providerId="ADAL" clId="{2673A91A-3439-4315-AE72-1AC445A732DB}" dt="2026-05-26T18:30:43.236" v="581"/>
-        <pc:sldMkLst>
-          <pc:docMk/>
-          <pc:sldMk cId="3375406878" sldId="299"/>
-        </pc:sldMkLst>
-      </pc:sldChg>
-      <pc:sldChg chg="del">
-        <pc:chgData name="Theodore Mouhlas" userId="01ff3cd0-0633-42e2-959a-392a4aa13f64" providerId="ADAL" clId="{2673A91A-3439-4315-AE72-1AC445A732DB}" dt="2026-05-26T18:35:02.973" v="674"/>
-        <pc:sldMkLst>
-          <pc:docMk/>
-          <pc:sldMk cId="2127938153" sldId="305"/>
-        </pc:sldMkLst>
-      </pc:sldChg>
-      <pc:sldChg chg="del">
-        <pc:chgData name="Theodore Mouhlas" userId="01ff3cd0-0633-42e2-959a-392a4aa13f64" providerId="ADAL" clId="{2673A91A-3439-4315-AE72-1AC445A732DB}" dt="2026-05-26T18:11:48.890" v="277"/>
-        <pc:sldMkLst>
-          <pc:docMk/>
-          <pc:sldMk cId="1631777672" sldId="310"/>
-        </pc:sldMkLst>
-      </pc:sldChg>
-      <pc:sldChg chg="del">
-        <pc:chgData name="Theodore Mouhlas" userId="01ff3cd0-0633-42e2-959a-392a4aa13f64" providerId="ADAL" clId="{2673A91A-3439-4315-AE72-1AC445A732DB}" dt="2026-05-26T18:12:28.930" v="330"/>
-        <pc:sldMkLst>
-          <pc:docMk/>
-          <pc:sldMk cId="2037424839" sldId="311"/>
-        </pc:sldMkLst>
-      </pc:sldChg>
-      <pc:sldChg chg="modSp mod">
-        <pc:chgData name="Theodore Mouhlas" userId="01ff3cd0-0633-42e2-959a-392a4aa13f64" providerId="ADAL" clId="{2673A91A-3439-4315-AE72-1AC445A732DB}" dt="2026-05-26T19:16:40.892" v="735" actId="1582"/>
-        <pc:sldMkLst>
-          <pc:docMk/>
-          <pc:sldMk cId="623374232" sldId="312"/>
+          <pc:sldMk cId="3278326019" sldId="261"/>
         </pc:sldMkLst>
         <pc:spChg chg="mod">
-          <ac:chgData name="Theodore Mouhlas" userId="01ff3cd0-0633-42e2-959a-392a4aa13f64" providerId="ADAL" clId="{2673A91A-3439-4315-AE72-1AC445A732DB}" dt="2026-05-26T19:16:40.892" v="735" actId="1582"/>
+          <ac:chgData name="Theodore Mouhlas" userId="01ff3cd0-0633-42e2-959a-392a4aa13f64" providerId="ADAL" clId="{3807C590-9C5F-4341-9358-7295F7680566}" dt="2026-04-17T03:17:04.049" v="946" actId="20577"/>
           <ac:spMkLst>
             <pc:docMk/>
-            <pc:sldMk cId="623374232" sldId="312"/>
-            <ac:spMk id="7" creationId="{B80DB8F5-3092-494F-B179-38E296F9E96B}"/>
-          </ac:spMkLst>
-        </pc:spChg>
-      </pc:sldChg>
-      <pc:sldChg chg="modSp mod">
-        <pc:chgData name="Theodore Mouhlas" userId="01ff3cd0-0633-42e2-959a-392a4aa13f64" providerId="ADAL" clId="{2673A91A-3439-4315-AE72-1AC445A732DB}" dt="2026-05-26T15:15:56.413" v="64" actId="20577"/>
-        <pc:sldMkLst>
-          <pc:docMk/>
-          <pc:sldMk cId="1797853386" sldId="323"/>
-        </pc:sldMkLst>
-        <pc:spChg chg="mod">
-          <ac:chgData name="Theodore Mouhlas" userId="01ff3cd0-0633-42e2-959a-392a4aa13f64" providerId="ADAL" clId="{2673A91A-3439-4315-AE72-1AC445A732DB}" dt="2026-05-26T15:15:56.413" v="64" actId="20577"/>
-          <ac:spMkLst>
-            <pc:docMk/>
-            <pc:sldMk cId="1797853386" sldId="323"/>
-            <ac:spMk id="10" creationId="{9334F062-AF85-47F1-971D-944673B2B10A}"/>
-          </ac:spMkLst>
-        </pc:spChg>
-      </pc:sldChg>
-      <pc:sldChg chg="addSp delSp modSp del mod">
-        <pc:chgData name="Theodore Mouhlas" userId="01ff3cd0-0633-42e2-959a-392a4aa13f64" providerId="ADAL" clId="{2673A91A-3439-4315-AE72-1AC445A732DB}" dt="2026-05-26T18:10:03.572" v="161"/>
-        <pc:sldMkLst>
-          <pc:docMk/>
-          <pc:sldMk cId="2329745287" sldId="324"/>
-        </pc:sldMkLst>
-        <pc:spChg chg="mod">
-          <ac:chgData name="Theodore Mouhlas" userId="01ff3cd0-0633-42e2-959a-392a4aa13f64" providerId="ADAL" clId="{2673A91A-3439-4315-AE72-1AC445A732DB}" dt="2026-05-26T15:18:26.770" v="131" actId="1038"/>
-          <ac:spMkLst>
-            <pc:docMk/>
-            <pc:sldMk cId="2329745287" sldId="324"/>
-            <ac:spMk id="7" creationId="{21B980EE-74D0-4699-B5A8-0A3914C9427A}"/>
-          </ac:spMkLst>
-        </pc:spChg>
-        <pc:spChg chg="mod">
-          <ac:chgData name="Theodore Mouhlas" userId="01ff3cd0-0633-42e2-959a-392a4aa13f64" providerId="ADAL" clId="{2673A91A-3439-4315-AE72-1AC445A732DB}" dt="2026-05-26T15:18:26.770" v="131" actId="1038"/>
-          <ac:spMkLst>
-            <pc:docMk/>
-            <pc:sldMk cId="2329745287" sldId="324"/>
-            <ac:spMk id="10" creationId="{E1B97C82-2B5F-4860-B770-7DC165379EDB}"/>
-          </ac:spMkLst>
-        </pc:spChg>
-        <pc:spChg chg="add del mod">
-          <ac:chgData name="Theodore Mouhlas" userId="01ff3cd0-0633-42e2-959a-392a4aa13f64" providerId="ADAL" clId="{2673A91A-3439-4315-AE72-1AC445A732DB}" dt="2026-05-26T15:18:26.770" v="131" actId="1038"/>
-          <ac:spMkLst>
-            <pc:docMk/>
-            <pc:sldMk cId="2329745287" sldId="324"/>
-            <ac:spMk id="13" creationId="{8B444574-AEA8-49F4-9E16-7E644839CAEF}"/>
-          </ac:spMkLst>
-        </pc:spChg>
-        <pc:spChg chg="mod">
-          <ac:chgData name="Theodore Mouhlas" userId="01ff3cd0-0633-42e2-959a-392a4aa13f64" providerId="ADAL" clId="{2673A91A-3439-4315-AE72-1AC445A732DB}" dt="2026-05-26T15:18:26.770" v="131" actId="1038"/>
-          <ac:spMkLst>
-            <pc:docMk/>
-            <pc:sldMk cId="2329745287" sldId="324"/>
-            <ac:spMk id="16" creationId="{CC065F66-A204-4DC0-A0C9-F4D7D49C43A8}"/>
-          </ac:spMkLst>
-        </pc:spChg>
-        <pc:spChg chg="mod">
-          <ac:chgData name="Theodore Mouhlas" userId="01ff3cd0-0633-42e2-959a-392a4aa13f64" providerId="ADAL" clId="{2673A91A-3439-4315-AE72-1AC445A732DB}" dt="2026-05-26T15:18:26.770" v="131" actId="1038"/>
-          <ac:spMkLst>
-            <pc:docMk/>
-            <pc:sldMk cId="2329745287" sldId="324"/>
-            <ac:spMk id="19" creationId="{CFCA0FA3-5D4B-4575-ADE3-FAA9E529A0A1}"/>
-          </ac:spMkLst>
-        </pc:spChg>
-        <pc:spChg chg="mod">
-          <ac:chgData name="Theodore Mouhlas" userId="01ff3cd0-0633-42e2-959a-392a4aa13f64" providerId="ADAL" clId="{2673A91A-3439-4315-AE72-1AC445A732DB}" dt="2026-05-26T15:18:26.770" v="131" actId="1038"/>
-          <ac:spMkLst>
-            <pc:docMk/>
-            <pc:sldMk cId="2329745287" sldId="324"/>
-            <ac:spMk id="22" creationId="{A088268F-3801-4851-B921-4A348CC84E17}"/>
-          </ac:spMkLst>
-        </pc:spChg>
-      </pc:sldChg>
-      <pc:sldChg chg="modSp del mod">
-        <pc:chgData name="Theodore Mouhlas" userId="01ff3cd0-0633-42e2-959a-392a4aa13f64" providerId="ADAL" clId="{2673A91A-3439-4315-AE72-1AC445A732DB}" dt="2026-05-26T18:09:10.896" v="133"/>
-        <pc:sldMkLst>
-          <pc:docMk/>
-          <pc:sldMk cId="727788216" sldId="325"/>
-        </pc:sldMkLst>
-        <pc:spChg chg="mod">
-          <ac:chgData name="Theodore Mouhlas" userId="01ff3cd0-0633-42e2-959a-392a4aa13f64" providerId="ADAL" clId="{2673A91A-3439-4315-AE72-1AC445A732DB}" dt="2026-05-26T15:16:08.787" v="76" actId="20577"/>
-          <ac:spMkLst>
-            <pc:docMk/>
-            <pc:sldMk cId="727788216" sldId="325"/>
-            <ac:spMk id="5" creationId="{CBC820CB-203E-4FB7-8F94-481CF57E4EE3}"/>
-          </ac:spMkLst>
-        </pc:spChg>
-        <pc:spChg chg="mod">
-          <ac:chgData name="Theodore Mouhlas" userId="01ff3cd0-0633-42e2-959a-392a4aa13f64" providerId="ADAL" clId="{2673A91A-3439-4315-AE72-1AC445A732DB}" dt="2026-05-26T15:17:01.436" v="117" actId="20577"/>
-          <ac:spMkLst>
-            <pc:docMk/>
-            <pc:sldMk cId="727788216" sldId="325"/>
-            <ac:spMk id="6" creationId="{760721BA-A094-443D-91FD-F5700A36D5F8}"/>
-          </ac:spMkLst>
-        </pc:spChg>
-        <pc:spChg chg="mod">
-          <ac:chgData name="Theodore Mouhlas" userId="01ff3cd0-0633-42e2-959a-392a4aa13f64" providerId="ADAL" clId="{2673A91A-3439-4315-AE72-1AC445A732DB}" dt="2026-05-26T15:17:12.553" v="118" actId="403"/>
-          <ac:spMkLst>
-            <pc:docMk/>
-            <pc:sldMk cId="727788216" sldId="325"/>
-            <ac:spMk id="7" creationId="{684F62CA-6074-4304-B334-4B6055C3F151}"/>
-          </ac:spMkLst>
-        </pc:spChg>
-        <pc:spChg chg="mod">
-          <ac:chgData name="Theodore Mouhlas" userId="01ff3cd0-0633-42e2-959a-392a4aa13f64" providerId="ADAL" clId="{2673A91A-3439-4315-AE72-1AC445A732DB}" dt="2026-05-26T15:17:14.973" v="119" actId="403"/>
-          <ac:spMkLst>
-            <pc:docMk/>
-            <pc:sldMk cId="727788216" sldId="325"/>
-            <ac:spMk id="8" creationId="{1F514BED-B190-4758-B265-C5AF240261D2}"/>
-          </ac:spMkLst>
-        </pc:spChg>
-        <pc:spChg chg="mod">
-          <ac:chgData name="Theodore Mouhlas" userId="01ff3cd0-0633-42e2-959a-392a4aa13f64" providerId="ADAL" clId="{2673A91A-3439-4315-AE72-1AC445A732DB}" dt="2026-05-26T15:17:16.746" v="120" actId="403"/>
-          <ac:spMkLst>
-            <pc:docMk/>
-            <pc:sldMk cId="727788216" sldId="325"/>
-            <ac:spMk id="9" creationId="{FBB353AB-E917-4F55-B5F6-A31097A40792}"/>
-          </ac:spMkLst>
-        </pc:spChg>
-        <pc:spChg chg="mod">
-          <ac:chgData name="Theodore Mouhlas" userId="01ff3cd0-0633-42e2-959a-392a4aa13f64" providerId="ADAL" clId="{2673A91A-3439-4315-AE72-1AC445A732DB}" dt="2026-05-26T15:17:18.687" v="121" actId="403"/>
-          <ac:spMkLst>
-            <pc:docMk/>
-            <pc:sldMk cId="727788216" sldId="325"/>
-            <ac:spMk id="10" creationId="{566404F0-0487-43A9-A99E-E5763E977F10}"/>
-          </ac:spMkLst>
-        </pc:spChg>
-        <pc:spChg chg="mod">
-          <ac:chgData name="Theodore Mouhlas" userId="01ff3cd0-0633-42e2-959a-392a4aa13f64" providerId="ADAL" clId="{2673A91A-3439-4315-AE72-1AC445A732DB}" dt="2026-05-26T15:17:24.957" v="122" actId="403"/>
-          <ac:spMkLst>
-            <pc:docMk/>
-            <pc:sldMk cId="727788216" sldId="325"/>
-            <ac:spMk id="26" creationId="{50959E17-D362-4D58-9169-D67BBAAA9690}"/>
-          </ac:spMkLst>
-        </pc:spChg>
-      </pc:sldChg>
-      <pc:sldChg chg="del">
-        <pc:chgData name="Theodore Mouhlas" userId="01ff3cd0-0633-42e2-959a-392a4aa13f64" providerId="ADAL" clId="{2673A91A-3439-4315-AE72-1AC445A732DB}" dt="2026-05-26T18:52:13.036" v="731"/>
-        <pc:sldMkLst>
-          <pc:docMk/>
-          <pc:sldMk cId="1706636781" sldId="327"/>
-        </pc:sldMkLst>
-      </pc:sldChg>
-      <pc:sldChg chg="del">
-        <pc:chgData name="Theodore Mouhlas" userId="01ff3cd0-0633-42e2-959a-392a4aa13f64" providerId="ADAL" clId="{2673A91A-3439-4315-AE72-1AC445A732DB}" dt="2026-05-26T18:14:14.920" v="362"/>
-        <pc:sldMkLst>
-          <pc:docMk/>
-          <pc:sldMk cId="4144376458" sldId="328"/>
-        </pc:sldMkLst>
-      </pc:sldChg>
-      <pc:sldChg chg="del">
-        <pc:chgData name="Theodore Mouhlas" userId="01ff3cd0-0633-42e2-959a-392a4aa13f64" providerId="ADAL" clId="{2673A91A-3439-4315-AE72-1AC445A732DB}" dt="2026-05-26T18:15:06.212" v="385"/>
-        <pc:sldMkLst>
-          <pc:docMk/>
-          <pc:sldMk cId="3666346471" sldId="329"/>
-        </pc:sldMkLst>
-      </pc:sldChg>
-      <pc:sldChg chg="del">
-        <pc:chgData name="Theodore Mouhlas" userId="01ff3cd0-0633-42e2-959a-392a4aa13f64" providerId="ADAL" clId="{2673A91A-3439-4315-AE72-1AC445A732DB}" dt="2026-05-26T18:15:48.198" v="398"/>
-        <pc:sldMkLst>
-          <pc:docMk/>
-          <pc:sldMk cId="1785711563" sldId="330"/>
-        </pc:sldMkLst>
-      </pc:sldChg>
-      <pc:sldChg chg="del">
-        <pc:chgData name="Theodore Mouhlas" userId="01ff3cd0-0633-42e2-959a-392a4aa13f64" providerId="ADAL" clId="{2673A91A-3439-4315-AE72-1AC445A732DB}" dt="2026-05-26T18:16:39.255" v="431"/>
-        <pc:sldMkLst>
-          <pc:docMk/>
-          <pc:sldMk cId="1181954112" sldId="331"/>
-        </pc:sldMkLst>
-      </pc:sldChg>
-      <pc:sldChg chg="del">
-        <pc:chgData name="Theodore Mouhlas" userId="01ff3cd0-0633-42e2-959a-392a4aa13f64" providerId="ADAL" clId="{2673A91A-3439-4315-AE72-1AC445A732DB}" dt="2026-05-26T18:24:34.584" v="476"/>
-        <pc:sldMkLst>
-          <pc:docMk/>
-          <pc:sldMk cId="2363036190" sldId="332"/>
-        </pc:sldMkLst>
-      </pc:sldChg>
-      <pc:sldChg chg="del">
-        <pc:chgData name="Theodore Mouhlas" userId="01ff3cd0-0633-42e2-959a-392a4aa13f64" providerId="ADAL" clId="{2673A91A-3439-4315-AE72-1AC445A732DB}" dt="2026-05-26T18:28:36.892" v="563"/>
-        <pc:sldMkLst>
-          <pc:docMk/>
-          <pc:sldMk cId="137955057" sldId="334"/>
-        </pc:sldMkLst>
-      </pc:sldChg>
-      <pc:sldChg chg="del">
-        <pc:chgData name="Theodore Mouhlas" userId="01ff3cd0-0633-42e2-959a-392a4aa13f64" providerId="ADAL" clId="{2673A91A-3439-4315-AE72-1AC445A732DB}" dt="2026-05-26T18:31:47.105" v="591"/>
-        <pc:sldMkLst>
-          <pc:docMk/>
-          <pc:sldMk cId="1676856778" sldId="336"/>
-        </pc:sldMkLst>
-      </pc:sldChg>
-      <pc:sldChg chg="del">
-        <pc:chgData name="Theodore Mouhlas" userId="01ff3cd0-0633-42e2-959a-392a4aa13f64" providerId="ADAL" clId="{2673A91A-3439-4315-AE72-1AC445A732DB}" dt="2026-05-26T18:10:52.281" v="234"/>
-        <pc:sldMkLst>
-          <pc:docMk/>
-          <pc:sldMk cId="4105459463" sldId="337"/>
-        </pc:sldMkLst>
-      </pc:sldChg>
-      <pc:sldChg chg="modSp add del mod">
-        <pc:chgData name="Theodore Mouhlas" userId="01ff3cd0-0633-42e2-959a-392a4aa13f64" providerId="ADAL" clId="{2673A91A-3439-4315-AE72-1AC445A732DB}" dt="2026-05-26T18:50:24.148" v="707"/>
-        <pc:sldMkLst>
-          <pc:docMk/>
-          <pc:sldMk cId="1401145330" sldId="338"/>
-        </pc:sldMkLst>
-        <pc:spChg chg="mod">
-          <ac:chgData name="Theodore Mouhlas" userId="01ff3cd0-0633-42e2-959a-392a4aa13f64" providerId="ADAL" clId="{2673A91A-3439-4315-AE72-1AC445A732DB}" dt="2026-05-26T18:09:10.997" v="134"/>
-          <ac:spMkLst>
-            <pc:docMk/>
-            <pc:sldMk cId="1401145330" sldId="338"/>
-            <ac:spMk id="5" creationId="{CBC820CB-203E-4FB7-8F94-481CF57E4EE3}"/>
-          </ac:spMkLst>
-        </pc:spChg>
-        <pc:spChg chg="mod">
-          <ac:chgData name="Theodore Mouhlas" userId="01ff3cd0-0633-42e2-959a-392a4aa13f64" providerId="ADAL" clId="{2673A91A-3439-4315-AE72-1AC445A732DB}" dt="2026-05-26T18:41:42.926" v="705" actId="20577"/>
-          <ac:spMkLst>
-            <pc:docMk/>
-            <pc:sldMk cId="1401145330" sldId="338"/>
-            <ac:spMk id="6" creationId="{760721BA-A094-443D-91FD-F5700A36D5F8}"/>
-          </ac:spMkLst>
-        </pc:spChg>
-        <pc:spChg chg="mod">
-          <ac:chgData name="Theodore Mouhlas" userId="01ff3cd0-0633-42e2-959a-392a4aa13f64" providerId="ADAL" clId="{2673A91A-3439-4315-AE72-1AC445A732DB}" dt="2026-05-26T18:32:24.443" v="642" actId="1035"/>
-          <ac:spMkLst>
-            <pc:docMk/>
-            <pc:sldMk cId="1401145330" sldId="338"/>
-            <ac:spMk id="7" creationId="{684F62CA-6074-4304-B334-4B6055C3F151}"/>
-          </ac:spMkLst>
-        </pc:spChg>
-        <pc:spChg chg="mod">
-          <ac:chgData name="Theodore Mouhlas" userId="01ff3cd0-0633-42e2-959a-392a4aa13f64" providerId="ADAL" clId="{2673A91A-3439-4315-AE72-1AC445A732DB}" dt="2026-05-26T18:32:24.443" v="642" actId="1035"/>
-          <ac:spMkLst>
-            <pc:docMk/>
-            <pc:sldMk cId="1401145330" sldId="338"/>
-            <ac:spMk id="8" creationId="{1F514BED-B190-4758-B265-C5AF240261D2}"/>
-          </ac:spMkLst>
-        </pc:spChg>
-        <pc:spChg chg="mod">
-          <ac:chgData name="Theodore Mouhlas" userId="01ff3cd0-0633-42e2-959a-392a4aa13f64" providerId="ADAL" clId="{2673A91A-3439-4315-AE72-1AC445A732DB}" dt="2026-05-26T18:32:14.316" v="629" actId="403"/>
-          <ac:spMkLst>
-            <pc:docMk/>
-            <pc:sldMk cId="1401145330" sldId="338"/>
-            <ac:spMk id="9" creationId="{FBB353AB-E917-4F55-B5F6-A31097A40792}"/>
-          </ac:spMkLst>
-        </pc:spChg>
-        <pc:spChg chg="mod">
-          <ac:chgData name="Theodore Mouhlas" userId="01ff3cd0-0633-42e2-959a-392a4aa13f64" providerId="ADAL" clId="{2673A91A-3439-4315-AE72-1AC445A732DB}" dt="2026-05-26T18:32:16.637" v="630" actId="403"/>
-          <ac:spMkLst>
-            <pc:docMk/>
-            <pc:sldMk cId="1401145330" sldId="338"/>
-            <ac:spMk id="10" creationId="{566404F0-0487-43A9-A99E-E5763E977F10}"/>
-          </ac:spMkLst>
-        </pc:spChg>
-        <pc:spChg chg="mod">
-          <ac:chgData name="Theodore Mouhlas" userId="01ff3cd0-0633-42e2-959a-392a4aa13f64" providerId="ADAL" clId="{2673A91A-3439-4315-AE72-1AC445A732DB}" dt="2026-05-26T18:34:01.667" v="671" actId="1036"/>
-          <ac:spMkLst>
-            <pc:docMk/>
-            <pc:sldMk cId="1401145330" sldId="338"/>
-            <ac:spMk id="13" creationId="{2EE52D10-BE4B-4872-A693-DE2D8C1A13DE}"/>
-          </ac:spMkLst>
-        </pc:spChg>
-        <pc:spChg chg="mod">
-          <ac:chgData name="Theodore Mouhlas" userId="01ff3cd0-0633-42e2-959a-392a4aa13f64" providerId="ADAL" clId="{2673A91A-3439-4315-AE72-1AC445A732DB}" dt="2026-05-26T18:09:11.027" v="145"/>
-          <ac:spMkLst>
-            <pc:docMk/>
-            <pc:sldMk cId="1401145330" sldId="338"/>
-            <ac:spMk id="15" creationId="{E1BEC6D0-FBFE-4D10-B979-1B4C4003D516}"/>
-          </ac:spMkLst>
-        </pc:spChg>
-        <pc:spChg chg="mod">
-          <ac:chgData name="Theodore Mouhlas" userId="01ff3cd0-0633-42e2-959a-392a4aa13f64" providerId="ADAL" clId="{2673A91A-3439-4315-AE72-1AC445A732DB}" dt="2026-05-26T18:33:57.409" v="668" actId="1035"/>
-          <ac:spMkLst>
-            <pc:docMk/>
-            <pc:sldMk cId="1401145330" sldId="338"/>
-            <ac:spMk id="16" creationId="{C4DD0CD1-6282-4D0D-8198-F99D3696811D}"/>
-          </ac:spMkLst>
-        </pc:spChg>
-        <pc:spChg chg="mod">
-          <ac:chgData name="Theodore Mouhlas" userId="01ff3cd0-0633-42e2-959a-392a4aa13f64" providerId="ADAL" clId="{2673A91A-3439-4315-AE72-1AC445A732DB}" dt="2026-05-26T18:09:11.031" v="148"/>
-          <ac:spMkLst>
-            <pc:docMk/>
-            <pc:sldMk cId="1401145330" sldId="338"/>
-            <ac:spMk id="18" creationId="{AD1EE3D5-D6AB-45CE-9B3C-A867C853E9AA}"/>
-          </ac:spMkLst>
-        </pc:spChg>
-        <pc:spChg chg="mod">
-          <ac:chgData name="Theodore Mouhlas" userId="01ff3cd0-0633-42e2-959a-392a4aa13f64" providerId="ADAL" clId="{2673A91A-3439-4315-AE72-1AC445A732DB}" dt="2026-05-26T18:33:57.409" v="668" actId="1035"/>
-          <ac:spMkLst>
-            <pc:docMk/>
-            <pc:sldMk cId="1401145330" sldId="338"/>
-            <ac:spMk id="19" creationId="{E352BB6F-F04F-4027-BCCB-40CE41D46221}"/>
-          </ac:spMkLst>
-        </pc:spChg>
-        <pc:spChg chg="mod">
-          <ac:chgData name="Theodore Mouhlas" userId="01ff3cd0-0633-42e2-959a-392a4aa13f64" providerId="ADAL" clId="{2673A91A-3439-4315-AE72-1AC445A732DB}" dt="2026-05-26T18:09:11.034" v="151"/>
-          <ac:spMkLst>
-            <pc:docMk/>
-            <pc:sldMk cId="1401145330" sldId="338"/>
-            <ac:spMk id="21" creationId="{BB06FC17-6D6C-45CA-906F-8BC18D17A7A6}"/>
-          </ac:spMkLst>
-        </pc:spChg>
-        <pc:spChg chg="mod">
-          <ac:chgData name="Theodore Mouhlas" userId="01ff3cd0-0633-42e2-959a-392a4aa13f64" providerId="ADAL" clId="{2673A91A-3439-4315-AE72-1AC445A732DB}" dt="2026-05-26T18:33:57.409" v="668" actId="1035"/>
-          <ac:spMkLst>
-            <pc:docMk/>
-            <pc:sldMk cId="1401145330" sldId="338"/>
-            <ac:spMk id="22" creationId="{04120AD4-9148-43A2-BD5F-ED2DCC419224}"/>
-          </ac:spMkLst>
-        </pc:spChg>
-        <pc:spChg chg="mod">
-          <ac:chgData name="Theodore Mouhlas" userId="01ff3cd0-0633-42e2-959a-392a4aa13f64" providerId="ADAL" clId="{2673A91A-3439-4315-AE72-1AC445A732DB}" dt="2026-05-26T18:09:11.037" v="154"/>
-          <ac:spMkLst>
-            <pc:docMk/>
-            <pc:sldMk cId="1401145330" sldId="338"/>
-            <ac:spMk id="24" creationId="{DD40C2B8-0DFB-4E67-B0E8-C9F8DB6B5B17}"/>
-          </ac:spMkLst>
-        </pc:spChg>
-        <pc:spChg chg="mod">
-          <ac:chgData name="Theodore Mouhlas" userId="01ff3cd0-0633-42e2-959a-392a4aa13f64" providerId="ADAL" clId="{2673A91A-3439-4315-AE72-1AC445A732DB}" dt="2026-05-26T18:34:01.667" v="671" actId="1036"/>
-          <ac:spMkLst>
-            <pc:docMk/>
-            <pc:sldMk cId="1401145330" sldId="338"/>
-            <ac:spMk id="25" creationId="{EBD3270C-AEF0-4453-86C2-505B51AD9817}"/>
-          </ac:spMkLst>
-        </pc:spChg>
-        <pc:spChg chg="mod">
-          <ac:chgData name="Theodore Mouhlas" userId="01ff3cd0-0633-42e2-959a-392a4aa13f64" providerId="ADAL" clId="{2673A91A-3439-4315-AE72-1AC445A732DB}" dt="2026-05-26T18:32:09.321" v="628" actId="1035"/>
-          <ac:spMkLst>
-            <pc:docMk/>
-            <pc:sldMk cId="1401145330" sldId="338"/>
-            <ac:spMk id="26" creationId="{50959E17-D362-4D58-9169-D67BBAAA9690}"/>
-          </ac:spMkLst>
-        </pc:spChg>
-      </pc:sldChg>
-      <pc:sldChg chg="delSp modSp add del mod">
-        <pc:chgData name="Theodore Mouhlas" userId="01ff3cd0-0633-42e2-959a-392a4aa13f64" providerId="ADAL" clId="{2673A91A-3439-4315-AE72-1AC445A732DB}" dt="2026-05-26T18:19:39.895" v="446"/>
-        <pc:sldMkLst>
-          <pc:docMk/>
-          <pc:sldMk cId="13819171" sldId="339"/>
-        </pc:sldMkLst>
-        <pc:spChg chg="mod">
-          <ac:chgData name="Theodore Mouhlas" userId="01ff3cd0-0633-42e2-959a-392a4aa13f64" providerId="ADAL" clId="{2673A91A-3439-4315-AE72-1AC445A732DB}" dt="2026-05-26T18:12:16.409" v="323" actId="1035"/>
-          <ac:spMkLst>
-            <pc:docMk/>
-            <pc:sldMk cId="13819171" sldId="339"/>
-            <ac:spMk id="2" creationId="{2E35EB7A-A52F-5A1B-215B-0384D7F189E7}"/>
-          </ac:spMkLst>
-        </pc:spChg>
-        <pc:spChg chg="mod">
-          <ac:chgData name="Theodore Mouhlas" userId="01ff3cd0-0633-42e2-959a-392a4aa13f64" providerId="ADAL" clId="{2673A91A-3439-4315-AE72-1AC445A732DB}" dt="2026-05-26T18:16:06.423" v="429" actId="20577"/>
-          <ac:spMkLst>
-            <pc:docMk/>
-            <pc:sldMk cId="13819171" sldId="339"/>
-            <ac:spMk id="5" creationId="{45AAE1AE-7DFA-4D4E-84E7-E394EDC4B550}"/>
-          </ac:spMkLst>
-        </pc:spChg>
-        <pc:spChg chg="mod">
-          <ac:chgData name="Theodore Mouhlas" userId="01ff3cd0-0633-42e2-959a-392a4aa13f64" providerId="ADAL" clId="{2673A91A-3439-4315-AE72-1AC445A732DB}" dt="2026-05-26T18:11:50.481" v="304" actId="1036"/>
-          <ac:spMkLst>
-            <pc:docMk/>
-            <pc:sldMk cId="13819171" sldId="339"/>
-            <ac:spMk id="6" creationId="{8F94CC48-7D26-4495-87F8-D227CD1CC027}"/>
-          </ac:spMkLst>
-        </pc:spChg>
-        <pc:spChg chg="del mod">
-          <ac:chgData name="Theodore Mouhlas" userId="01ff3cd0-0633-42e2-959a-392a4aa13f64" providerId="ADAL" clId="{2673A91A-3439-4315-AE72-1AC445A732DB}" dt="2026-05-26T18:15:48.816" v="407" actId="478"/>
-          <ac:spMkLst>
-            <pc:docMk/>
-            <pc:sldMk cId="13819171" sldId="339"/>
-            <ac:spMk id="7" creationId="{21B980EE-74D0-4699-B5A8-0A3914C9427A}"/>
-          </ac:spMkLst>
-        </pc:spChg>
-        <pc:spChg chg="mod">
-          <ac:chgData name="Theodore Mouhlas" userId="01ff3cd0-0633-42e2-959a-392a4aa13f64" providerId="ADAL" clId="{2673A91A-3439-4315-AE72-1AC445A732DB}" dt="2026-05-26T18:12:16.409" v="323" actId="1035"/>
-          <ac:spMkLst>
-            <pc:docMk/>
-            <pc:sldMk cId="13819171" sldId="339"/>
-            <ac:spMk id="8" creationId="{8A28107C-48DA-45B0-8463-D5D9FD42562E}"/>
-          </ac:spMkLst>
-        </pc:spChg>
-        <pc:spChg chg="mod">
-          <ac:chgData name="Theodore Mouhlas" userId="01ff3cd0-0633-42e2-959a-392a4aa13f64" providerId="ADAL" clId="{2673A91A-3439-4315-AE72-1AC445A732DB}" dt="2026-05-26T18:15:28.960" v="396" actId="14100"/>
-          <ac:spMkLst>
-            <pc:docMk/>
-            <pc:sldMk cId="13819171" sldId="339"/>
-            <ac:spMk id="9" creationId="{ED99D64B-5472-4A4E-AD62-9B1026C3C2D5}"/>
-          </ac:spMkLst>
-        </pc:spChg>
-        <pc:spChg chg="del mod">
-          <ac:chgData name="Theodore Mouhlas" userId="01ff3cd0-0633-42e2-959a-392a4aa13f64" providerId="ADAL" clId="{2673A91A-3439-4315-AE72-1AC445A732DB}" dt="2026-05-26T18:15:48.816" v="407" actId="478"/>
-          <ac:spMkLst>
-            <pc:docMk/>
-            <pc:sldMk cId="13819171" sldId="339"/>
-            <ac:spMk id="10" creationId="{E1B97C82-2B5F-4860-B770-7DC165379EDB}"/>
-          </ac:spMkLst>
-        </pc:spChg>
-        <pc:spChg chg="mod">
-          <ac:chgData name="Theodore Mouhlas" userId="01ff3cd0-0633-42e2-959a-392a4aa13f64" providerId="ADAL" clId="{2673A91A-3439-4315-AE72-1AC445A732DB}" dt="2026-05-26T18:15:28.960" v="396" actId="14100"/>
-          <ac:spMkLst>
-            <pc:docMk/>
-            <pc:sldMk cId="13819171" sldId="339"/>
-            <ac:spMk id="11" creationId="{BA89B2D3-B45F-4AD4-B6E0-00AF017F1357}"/>
-          </ac:spMkLst>
-        </pc:spChg>
-        <pc:spChg chg="mod">
-          <ac:chgData name="Theodore Mouhlas" userId="01ff3cd0-0633-42e2-959a-392a4aa13f64" providerId="ADAL" clId="{2673A91A-3439-4315-AE72-1AC445A732DB}" dt="2026-05-26T18:15:28.960" v="396" actId="14100"/>
-          <ac:spMkLst>
-            <pc:docMk/>
-            <pc:sldMk cId="13819171" sldId="339"/>
-            <ac:spMk id="12" creationId="{AB720C41-9174-4B7F-815B-8463D676C161}"/>
-          </ac:spMkLst>
-        </pc:spChg>
-        <pc:spChg chg="del mod">
-          <ac:chgData name="Theodore Mouhlas" userId="01ff3cd0-0633-42e2-959a-392a4aa13f64" providerId="ADAL" clId="{2673A91A-3439-4315-AE72-1AC445A732DB}" dt="2026-05-26T18:15:48.816" v="407" actId="478"/>
-          <ac:spMkLst>
-            <pc:docMk/>
-            <pc:sldMk cId="13819171" sldId="339"/>
-            <ac:spMk id="13" creationId="{8B444574-AEA8-49F4-9E16-7E644839CAEF}"/>
-          </ac:spMkLst>
-        </pc:spChg>
-        <pc:spChg chg="mod">
-          <ac:chgData name="Theodore Mouhlas" userId="01ff3cd0-0633-42e2-959a-392a4aa13f64" providerId="ADAL" clId="{2673A91A-3439-4315-AE72-1AC445A732DB}" dt="2026-05-26T18:10:03.634" v="174"/>
-          <ac:spMkLst>
-            <pc:docMk/>
-            <pc:sldMk cId="13819171" sldId="339"/>
-            <ac:spMk id="14" creationId="{1C175836-8AD0-470E-BEC6-A1FD626B9D31}"/>
-          </ac:spMkLst>
-        </pc:spChg>
-        <pc:spChg chg="mod">
-          <ac:chgData name="Theodore Mouhlas" userId="01ff3cd0-0633-42e2-959a-392a4aa13f64" providerId="ADAL" clId="{2673A91A-3439-4315-AE72-1AC445A732DB}" dt="2026-05-26T18:12:28.424" v="328" actId="1036"/>
-          <ac:spMkLst>
-            <pc:docMk/>
-            <pc:sldMk cId="13819171" sldId="339"/>
-            <ac:spMk id="15" creationId="{C9D34985-E018-4E5E-A5E2-E14AB9C5DF59}"/>
-          </ac:spMkLst>
-        </pc:spChg>
-        <pc:spChg chg="del mod">
-          <ac:chgData name="Theodore Mouhlas" userId="01ff3cd0-0633-42e2-959a-392a4aa13f64" providerId="ADAL" clId="{2673A91A-3439-4315-AE72-1AC445A732DB}" dt="2026-05-26T18:15:48.816" v="407" actId="478"/>
-          <ac:spMkLst>
-            <pc:docMk/>
-            <pc:sldMk cId="13819171" sldId="339"/>
-            <ac:spMk id="16" creationId="{CC065F66-A204-4DC0-A0C9-F4D7D49C43A8}"/>
-          </ac:spMkLst>
-        </pc:spChg>
-        <pc:spChg chg="mod">
-          <ac:chgData name="Theodore Mouhlas" userId="01ff3cd0-0633-42e2-959a-392a4aa13f64" providerId="ADAL" clId="{2673A91A-3439-4315-AE72-1AC445A732DB}" dt="2026-05-26T18:15:28.960" v="396" actId="14100"/>
-          <ac:spMkLst>
-            <pc:docMk/>
-            <pc:sldMk cId="13819171" sldId="339"/>
-            <ac:spMk id="17" creationId="{CD121969-E9D6-40FF-A132-C72C5F54464F}"/>
-          </ac:spMkLst>
-        </pc:spChg>
-        <pc:spChg chg="mod">
-          <ac:chgData name="Theodore Mouhlas" userId="01ff3cd0-0633-42e2-959a-392a4aa13f64" providerId="ADAL" clId="{2673A91A-3439-4315-AE72-1AC445A732DB}" dt="2026-05-26T18:12:28.424" v="328" actId="1036"/>
-          <ac:spMkLst>
-            <pc:docMk/>
-            <pc:sldMk cId="13819171" sldId="339"/>
-            <ac:spMk id="18" creationId="{607108FC-8E95-42F3-9B82-8A9B418C5D9E}"/>
-          </ac:spMkLst>
-        </pc:spChg>
-        <pc:spChg chg="del mod">
-          <ac:chgData name="Theodore Mouhlas" userId="01ff3cd0-0633-42e2-959a-392a4aa13f64" providerId="ADAL" clId="{2673A91A-3439-4315-AE72-1AC445A732DB}" dt="2026-05-26T18:15:48.816" v="407" actId="478"/>
-          <ac:spMkLst>
-            <pc:docMk/>
-            <pc:sldMk cId="13819171" sldId="339"/>
-            <ac:spMk id="19" creationId="{CFCA0FA3-5D4B-4575-ADE3-FAA9E529A0A1}"/>
-          </ac:spMkLst>
-        </pc:spChg>
-        <pc:spChg chg="mod">
-          <ac:chgData name="Theodore Mouhlas" userId="01ff3cd0-0633-42e2-959a-392a4aa13f64" providerId="ADAL" clId="{2673A91A-3439-4315-AE72-1AC445A732DB}" dt="2026-05-26T18:14:57.023" v="377" actId="1035"/>
-          <ac:spMkLst>
-            <pc:docMk/>
-            <pc:sldMk cId="13819171" sldId="339"/>
-            <ac:spMk id="20" creationId="{4A8EA73C-66F7-4CFF-88B2-9E2584152534}"/>
-          </ac:spMkLst>
-        </pc:spChg>
-        <pc:spChg chg="mod">
-          <ac:chgData name="Theodore Mouhlas" userId="01ff3cd0-0633-42e2-959a-392a4aa13f64" providerId="ADAL" clId="{2673A91A-3439-4315-AE72-1AC445A732DB}" dt="2026-05-26T18:15:03.441" v="383" actId="1037"/>
-          <ac:spMkLst>
-            <pc:docMk/>
-            <pc:sldMk cId="13819171" sldId="339"/>
-            <ac:spMk id="21" creationId="{4D12C0E4-BCB6-4848-8023-99D8B77A3DEF}"/>
-          </ac:spMkLst>
-        </pc:spChg>
-        <pc:spChg chg="del">
-          <ac:chgData name="Theodore Mouhlas" userId="01ff3cd0-0633-42e2-959a-392a4aa13f64" providerId="ADAL" clId="{2673A91A-3439-4315-AE72-1AC445A732DB}" dt="2026-05-26T18:15:48.816" v="407" actId="478"/>
-          <ac:spMkLst>
-            <pc:docMk/>
-            <pc:sldMk cId="13819171" sldId="339"/>
-            <ac:spMk id="22" creationId="{A088268F-3801-4851-B921-4A348CC84E17}"/>
-          </ac:spMkLst>
-        </pc:spChg>
-        <pc:spChg chg="mod">
-          <ac:chgData name="Theodore Mouhlas" userId="01ff3cd0-0633-42e2-959a-392a4aa13f64" providerId="ADAL" clId="{2673A91A-3439-4315-AE72-1AC445A732DB}" dt="2026-05-26T18:10:03.650" v="184"/>
-          <ac:spMkLst>
-            <pc:docMk/>
-            <pc:sldMk cId="13819171" sldId="339"/>
-            <ac:spMk id="23" creationId="{A69B585B-8EF8-470A-AF87-531AA23EA6C2}"/>
-          </ac:spMkLst>
-        </pc:spChg>
-        <pc:spChg chg="mod">
-          <ac:chgData name="Theodore Mouhlas" userId="01ff3cd0-0633-42e2-959a-392a4aa13f64" providerId="ADAL" clId="{2673A91A-3439-4315-AE72-1AC445A732DB}" dt="2026-05-26T18:10:03.654" v="186"/>
-          <ac:spMkLst>
-            <pc:docMk/>
-            <pc:sldMk cId="13819171" sldId="339"/>
-            <ac:spMk id="24" creationId="{E4B94D33-FB01-4F3B-9C03-1FF7A3DF0BB3}"/>
-          </ac:spMkLst>
-        </pc:spChg>
-        <pc:spChg chg="mod">
-          <ac:chgData name="Theodore Mouhlas" userId="01ff3cd0-0633-42e2-959a-392a4aa13f64" providerId="ADAL" clId="{2673A91A-3439-4315-AE72-1AC445A732DB}" dt="2026-05-26T18:10:03.656" v="188"/>
-          <ac:spMkLst>
-            <pc:docMk/>
-            <pc:sldMk cId="13819171" sldId="339"/>
-            <ac:spMk id="25" creationId="{03BAF204-C73F-4262-8840-BE4B9528ED8E}"/>
-          </ac:spMkLst>
-        </pc:spChg>
-        <pc:spChg chg="mod">
-          <ac:chgData name="Theodore Mouhlas" userId="01ff3cd0-0633-42e2-959a-392a4aa13f64" providerId="ADAL" clId="{2673A91A-3439-4315-AE72-1AC445A732DB}" dt="2026-05-26T18:12:28.424" v="328" actId="1036"/>
-          <ac:spMkLst>
-            <pc:docMk/>
-            <pc:sldMk cId="13819171" sldId="339"/>
-            <ac:spMk id="32" creationId="{13BC3AB1-DF02-136E-A79D-88DA11EA2264}"/>
-          </ac:spMkLst>
-        </pc:spChg>
-        <pc:spChg chg="mod">
-          <ac:chgData name="Theodore Mouhlas" userId="01ff3cd0-0633-42e2-959a-392a4aa13f64" providerId="ADAL" clId="{2673A91A-3439-4315-AE72-1AC445A732DB}" dt="2026-05-26T18:12:28.424" v="328" actId="1036"/>
-          <ac:spMkLst>
-            <pc:docMk/>
-            <pc:sldMk cId="13819171" sldId="339"/>
-            <ac:spMk id="33" creationId="{0E318B69-7A68-4BE3-8F12-0209536C2A40}"/>
-          </ac:spMkLst>
-        </pc:spChg>
-        <pc:spChg chg="mod">
-          <ac:chgData name="Theodore Mouhlas" userId="01ff3cd0-0633-42e2-959a-392a4aa13f64" providerId="ADAL" clId="{2673A91A-3439-4315-AE72-1AC445A732DB}" dt="2026-05-26T18:15:28.960" v="396" actId="14100"/>
-          <ac:spMkLst>
-            <pc:docMk/>
-            <pc:sldMk cId="13819171" sldId="339"/>
-            <ac:spMk id="34" creationId="{72D177EB-5E12-4994-AAA3-2903DF556964}"/>
-          </ac:spMkLst>
-        </pc:spChg>
-        <pc:spChg chg="mod">
-          <ac:chgData name="Theodore Mouhlas" userId="01ff3cd0-0633-42e2-959a-392a4aa13f64" providerId="ADAL" clId="{2673A91A-3439-4315-AE72-1AC445A732DB}" dt="2026-05-26T18:15:28.960" v="396" actId="14100"/>
-          <ac:spMkLst>
-            <pc:docMk/>
-            <pc:sldMk cId="13819171" sldId="339"/>
-            <ac:spMk id="35" creationId="{734FCF85-A3A7-4146-ABB6-8B823A5EA3FE}"/>
-          </ac:spMkLst>
-        </pc:spChg>
-        <pc:spChg chg="mod">
-          <ac:chgData name="Theodore Mouhlas" userId="01ff3cd0-0633-42e2-959a-392a4aa13f64" providerId="ADAL" clId="{2673A91A-3439-4315-AE72-1AC445A732DB}" dt="2026-05-26T18:12:28.424" v="328" actId="1036"/>
-          <ac:spMkLst>
-            <pc:docMk/>
-            <pc:sldMk cId="13819171" sldId="339"/>
-            <ac:spMk id="36" creationId="{4F10F189-EB77-493F-A4C4-F715C8831C6C}"/>
-          </ac:spMkLst>
-        </pc:spChg>
-      </pc:sldChg>
-      <pc:sldChg chg="modSp add del mod">
-        <pc:chgData name="Theodore Mouhlas" userId="01ff3cd0-0633-42e2-959a-392a4aa13f64" providerId="ADAL" clId="{2673A91A-3439-4315-AE72-1AC445A732DB}" dt="2026-05-26T18:21:24.082" v="454"/>
-        <pc:sldMkLst>
-          <pc:docMk/>
-          <pc:sldMk cId="800357790" sldId="340"/>
-        </pc:sldMkLst>
-        <pc:spChg chg="mod">
-          <ac:chgData name="Theodore Mouhlas" userId="01ff3cd0-0633-42e2-959a-392a4aa13f64" providerId="ADAL" clId="{2673A91A-3439-4315-AE72-1AC445A732DB}" dt="2026-05-26T18:10:52.316" v="236"/>
-          <ac:spMkLst>
-            <pc:docMk/>
-            <pc:sldMk cId="800357790" sldId="340"/>
-            <ac:spMk id="5" creationId="{0BB00342-2DF1-46FE-9005-785F1F26D872}"/>
-          </ac:spMkLst>
-        </pc:spChg>
-        <pc:spChg chg="mod">
-          <ac:chgData name="Theodore Mouhlas" userId="01ff3cd0-0633-42e2-959a-392a4aa13f64" providerId="ADAL" clId="{2673A91A-3439-4315-AE72-1AC445A732DB}" dt="2026-05-26T18:10:52.321" v="238"/>
-          <ac:spMkLst>
-            <pc:docMk/>
-            <pc:sldMk cId="800357790" sldId="340"/>
-            <ac:spMk id="6" creationId="{B382F5E8-27A9-48B5-A65B-AA4071C6BAC4}"/>
-          </ac:spMkLst>
-        </pc:spChg>
-        <pc:spChg chg="mod">
-          <ac:chgData name="Theodore Mouhlas" userId="01ff3cd0-0633-42e2-959a-392a4aa13f64" providerId="ADAL" clId="{2673A91A-3439-4315-AE72-1AC445A732DB}" dt="2026-05-26T18:10:52.321" v="239"/>
-          <ac:spMkLst>
-            <pc:docMk/>
-            <pc:sldMk cId="800357790" sldId="340"/>
-            <ac:spMk id="7" creationId="{A5F7BA1B-725A-450E-B98A-6553E4C37556}"/>
-          </ac:spMkLst>
-        </pc:spChg>
-        <pc:spChg chg="mod">
-          <ac:chgData name="Theodore Mouhlas" userId="01ff3cd0-0633-42e2-959a-392a4aa13f64" providerId="ADAL" clId="{2673A91A-3439-4315-AE72-1AC445A732DB}" dt="2026-05-26T18:10:52.328" v="241"/>
-          <ac:spMkLst>
-            <pc:docMk/>
-            <pc:sldMk cId="800357790" sldId="340"/>
-            <ac:spMk id="8" creationId="{15346D40-D849-42D4-958E-8A3D0809B7DB}"/>
-          </ac:spMkLst>
-        </pc:spChg>
-        <pc:spChg chg="mod">
-          <ac:chgData name="Theodore Mouhlas" userId="01ff3cd0-0633-42e2-959a-392a4aa13f64" providerId="ADAL" clId="{2673A91A-3439-4315-AE72-1AC445A732DB}" dt="2026-05-26T18:10:52.328" v="242"/>
-          <ac:spMkLst>
-            <pc:docMk/>
-            <pc:sldMk cId="800357790" sldId="340"/>
-            <ac:spMk id="9" creationId="{E319775E-CCEF-4E30-9889-0017CE78991D}"/>
-          </ac:spMkLst>
-        </pc:spChg>
-        <pc:spChg chg="mod">
-          <ac:chgData name="Theodore Mouhlas" userId="01ff3cd0-0633-42e2-959a-392a4aa13f64" providerId="ADAL" clId="{2673A91A-3439-4315-AE72-1AC445A732DB}" dt="2026-05-26T18:10:52.334" v="244"/>
-          <ac:spMkLst>
-            <pc:docMk/>
-            <pc:sldMk cId="800357790" sldId="340"/>
-            <ac:spMk id="10" creationId="{A6B44853-A1B8-42CD-9563-9FE02ED15D26}"/>
-          </ac:spMkLst>
-        </pc:spChg>
-        <pc:spChg chg="mod">
-          <ac:chgData name="Theodore Mouhlas" userId="01ff3cd0-0633-42e2-959a-392a4aa13f64" providerId="ADAL" clId="{2673A91A-3439-4315-AE72-1AC445A732DB}" dt="2026-05-26T18:10:52.334" v="245"/>
-          <ac:spMkLst>
-            <pc:docMk/>
-            <pc:sldMk cId="800357790" sldId="340"/>
-            <ac:spMk id="11" creationId="{66C35ADF-45AC-4E88-AE9C-2D129B854376}"/>
-          </ac:spMkLst>
-        </pc:spChg>
-        <pc:spChg chg="mod">
-          <ac:chgData name="Theodore Mouhlas" userId="01ff3cd0-0633-42e2-959a-392a4aa13f64" providerId="ADAL" clId="{2673A91A-3439-4315-AE72-1AC445A732DB}" dt="2026-05-26T18:10:52.340" v="247"/>
-          <ac:spMkLst>
-            <pc:docMk/>
-            <pc:sldMk cId="800357790" sldId="340"/>
-            <ac:spMk id="12" creationId="{5879753C-12EB-410C-B983-92FA54D2AC26}"/>
-          </ac:spMkLst>
-        </pc:spChg>
-      </pc:sldChg>
-      <pc:sldChg chg="modSp add mod">
-        <pc:chgData name="Theodore Mouhlas" userId="01ff3cd0-0633-42e2-959a-392a4aa13f64" providerId="ADAL" clId="{2673A91A-3439-4315-AE72-1AC445A732DB}" dt="2026-05-26T18:11:48.934" v="298"/>
-        <pc:sldMkLst>
-          <pc:docMk/>
-          <pc:sldMk cId="1820576408" sldId="341"/>
-        </pc:sldMkLst>
-        <pc:spChg chg="mod">
-          <ac:chgData name="Theodore Mouhlas" userId="01ff3cd0-0633-42e2-959a-392a4aa13f64" providerId="ADAL" clId="{2673A91A-3439-4315-AE72-1AC445A732DB}" dt="2026-05-26T18:11:48.909" v="279"/>
-          <ac:spMkLst>
-            <pc:docMk/>
-            <pc:sldMk cId="1820576408" sldId="341"/>
-            <ac:spMk id="5" creationId="{73249499-58BF-4F62-BC9F-8635EC3E369C}"/>
-          </ac:spMkLst>
-        </pc:spChg>
-        <pc:spChg chg="mod">
-          <ac:chgData name="Theodore Mouhlas" userId="01ff3cd0-0633-42e2-959a-392a4aa13f64" providerId="ADAL" clId="{2673A91A-3439-4315-AE72-1AC445A732DB}" dt="2026-05-26T18:11:48.911" v="281"/>
-          <ac:spMkLst>
-            <pc:docMk/>
-            <pc:sldMk cId="1820576408" sldId="341"/>
-            <ac:spMk id="6" creationId="{CE1CACA5-8579-48B0-9CED-DF07FFE50644}"/>
-          </ac:spMkLst>
-        </pc:spChg>
-        <pc:spChg chg="mod">
-          <ac:chgData name="Theodore Mouhlas" userId="01ff3cd0-0633-42e2-959a-392a4aa13f64" providerId="ADAL" clId="{2673A91A-3439-4315-AE72-1AC445A732DB}" dt="2026-05-26T18:11:48.913" v="283"/>
-          <ac:spMkLst>
-            <pc:docMk/>
-            <pc:sldMk cId="1820576408" sldId="341"/>
-            <ac:spMk id="8" creationId="{391176D1-261B-4C04-AB2F-8CBB5DCC1E0E}"/>
-          </ac:spMkLst>
-        </pc:spChg>
-        <pc:spChg chg="mod">
-          <ac:chgData name="Theodore Mouhlas" userId="01ff3cd0-0633-42e2-959a-392a4aa13f64" providerId="ADAL" clId="{2673A91A-3439-4315-AE72-1AC445A732DB}" dt="2026-05-26T18:11:48.913" v="284"/>
-          <ac:spMkLst>
-            <pc:docMk/>
-            <pc:sldMk cId="1820576408" sldId="341"/>
-            <ac:spMk id="9" creationId="{145FC90F-ADA2-4B3C-A710-0809A41EFF42}"/>
-          </ac:spMkLst>
-        </pc:spChg>
-        <pc:spChg chg="mod">
-          <ac:chgData name="Theodore Mouhlas" userId="01ff3cd0-0633-42e2-959a-392a4aa13f64" providerId="ADAL" clId="{2673A91A-3439-4315-AE72-1AC445A732DB}" dt="2026-05-26T18:11:48.917" v="286"/>
-          <ac:spMkLst>
-            <pc:docMk/>
-            <pc:sldMk cId="1820576408" sldId="341"/>
-            <ac:spMk id="11" creationId="{EB3AD3EF-FF6D-425A-8FE9-C9E946D038B7}"/>
-          </ac:spMkLst>
-        </pc:spChg>
-        <pc:spChg chg="mod">
-          <ac:chgData name="Theodore Mouhlas" userId="01ff3cd0-0633-42e2-959a-392a4aa13f64" providerId="ADAL" clId="{2673A91A-3439-4315-AE72-1AC445A732DB}" dt="2026-05-26T18:11:48.921" v="288"/>
-          <ac:spMkLst>
-            <pc:docMk/>
-            <pc:sldMk cId="1820576408" sldId="341"/>
-            <ac:spMk id="12" creationId="{3FB7FAD0-A8DF-49BC-A2FC-9B0CF3DCC2E2}"/>
-          </ac:spMkLst>
-        </pc:spChg>
-        <pc:spChg chg="mod">
-          <ac:chgData name="Theodore Mouhlas" userId="01ff3cd0-0633-42e2-959a-392a4aa13f64" providerId="ADAL" clId="{2673A91A-3439-4315-AE72-1AC445A732DB}" dt="2026-05-26T18:11:48.922" v="290"/>
-          <ac:spMkLst>
-            <pc:docMk/>
-            <pc:sldMk cId="1820576408" sldId="341"/>
-            <ac:spMk id="14" creationId="{E3633BF7-6225-437D-BBE7-BAFA7CBC4C6F}"/>
-          </ac:spMkLst>
-        </pc:spChg>
-        <pc:spChg chg="mod">
-          <ac:chgData name="Theodore Mouhlas" userId="01ff3cd0-0633-42e2-959a-392a4aa13f64" providerId="ADAL" clId="{2673A91A-3439-4315-AE72-1AC445A732DB}" dt="2026-05-26T18:11:48.925" v="292"/>
-          <ac:spMkLst>
-            <pc:docMk/>
-            <pc:sldMk cId="1820576408" sldId="341"/>
-            <ac:spMk id="15" creationId="{408EF1F7-2CB9-4627-89BA-1C894E9BCB79}"/>
-          </ac:spMkLst>
-        </pc:spChg>
-        <pc:spChg chg="mod">
-          <ac:chgData name="Theodore Mouhlas" userId="01ff3cd0-0633-42e2-959a-392a4aa13f64" providerId="ADAL" clId="{2673A91A-3439-4315-AE72-1AC445A732DB}" dt="2026-05-26T18:11:48.927" v="294"/>
-          <ac:spMkLst>
-            <pc:docMk/>
-            <pc:sldMk cId="1820576408" sldId="341"/>
-            <ac:spMk id="17" creationId="{2F6B7381-5E38-4EE8-BFC8-C28ABADCAF45}"/>
-          </ac:spMkLst>
-        </pc:spChg>
-        <pc:spChg chg="mod">
-          <ac:chgData name="Theodore Mouhlas" userId="01ff3cd0-0633-42e2-959a-392a4aa13f64" providerId="ADAL" clId="{2673A91A-3439-4315-AE72-1AC445A732DB}" dt="2026-05-26T18:11:48.932" v="296"/>
-          <ac:spMkLst>
-            <pc:docMk/>
-            <pc:sldMk cId="1820576408" sldId="341"/>
-            <ac:spMk id="18" creationId="{E07DA7AD-1B08-470E-987D-F8BE92D4ECE2}"/>
-          </ac:spMkLst>
-        </pc:spChg>
-        <pc:spChg chg="mod">
-          <ac:chgData name="Theodore Mouhlas" userId="01ff3cd0-0633-42e2-959a-392a4aa13f64" providerId="ADAL" clId="{2673A91A-3439-4315-AE72-1AC445A732DB}" dt="2026-05-26T18:11:48.934" v="298"/>
-          <ac:spMkLst>
-            <pc:docMk/>
-            <pc:sldMk cId="1820576408" sldId="341"/>
-            <ac:spMk id="19" creationId="{7BEDAC0A-56AF-47C1-87DF-F4927D0E5271}"/>
-          </ac:spMkLst>
-        </pc:spChg>
-      </pc:sldChg>
-      <pc:sldChg chg="modSp add mod">
-        <pc:chgData name="Theodore Mouhlas" userId="01ff3cd0-0633-42e2-959a-392a4aa13f64" providerId="ADAL" clId="{2673A91A-3439-4315-AE72-1AC445A732DB}" dt="2026-05-26T18:12:45.087" v="342"/>
-        <pc:sldMkLst>
-          <pc:docMk/>
-          <pc:sldMk cId="1587941034" sldId="342"/>
-        </pc:sldMkLst>
-        <pc:spChg chg="mod">
-          <ac:chgData name="Theodore Mouhlas" userId="01ff3cd0-0633-42e2-959a-392a4aa13f64" providerId="ADAL" clId="{2673A91A-3439-4315-AE72-1AC445A732DB}" dt="2026-05-26T18:12:28.964" v="332"/>
-          <ac:spMkLst>
-            <pc:docMk/>
-            <pc:sldMk cId="1587941034" sldId="342"/>
-            <ac:spMk id="3" creationId="{8B7DA7C3-20FA-41AA-B472-7F50B20145BC}"/>
-          </ac:spMkLst>
-        </pc:spChg>
-        <pc:spChg chg="mod">
-          <ac:chgData name="Theodore Mouhlas" userId="01ff3cd0-0633-42e2-959a-392a4aa13f64" providerId="ADAL" clId="{2673A91A-3439-4315-AE72-1AC445A732DB}" dt="2026-05-26T18:12:28.966" v="334"/>
-          <ac:spMkLst>
-            <pc:docMk/>
-            <pc:sldMk cId="1587941034" sldId="342"/>
-            <ac:spMk id="4" creationId="{D7AEBB37-DC2F-4233-A2C3-D7ED70402875}"/>
-          </ac:spMkLst>
-        </pc:spChg>
-        <pc:spChg chg="mod">
-          <ac:chgData name="Theodore Mouhlas" userId="01ff3cd0-0633-42e2-959a-392a4aa13f64" providerId="ADAL" clId="{2673A91A-3439-4315-AE72-1AC445A732DB}" dt="2026-05-26T18:12:28.967" v="336"/>
-          <ac:spMkLst>
-            <pc:docMk/>
-            <pc:sldMk cId="1587941034" sldId="342"/>
-            <ac:spMk id="14" creationId="{E125FA21-A0AD-4B13-9C19-29D0BF7B0F68}"/>
-          </ac:spMkLst>
-        </pc:spChg>
-        <pc:spChg chg="mod">
-          <ac:chgData name="Theodore Mouhlas" userId="01ff3cd0-0633-42e2-959a-392a4aa13f64" providerId="ADAL" clId="{2673A91A-3439-4315-AE72-1AC445A732DB}" dt="2026-05-26T18:12:45.087" v="342"/>
-          <ac:spMkLst>
-            <pc:docMk/>
-            <pc:sldMk cId="1587941034" sldId="342"/>
-            <ac:spMk id="37" creationId="{36A4EC6B-5867-4F10-B3D6-5884E930645B}"/>
-          </ac:spMkLst>
-        </pc:spChg>
-        <pc:spChg chg="mod">
-          <ac:chgData name="Theodore Mouhlas" userId="01ff3cd0-0633-42e2-959a-392a4aa13f64" providerId="ADAL" clId="{2673A91A-3439-4315-AE72-1AC445A732DB}" dt="2026-05-26T18:12:28.972" v="338"/>
-          <ac:spMkLst>
-            <pc:docMk/>
-            <pc:sldMk cId="1587941034" sldId="342"/>
-            <ac:spMk id="38" creationId="{4BC479F3-298E-4958-8E1E-31A196F502C0}"/>
-          </ac:spMkLst>
-        </pc:spChg>
-      </pc:sldChg>
-      <pc:sldChg chg="modSp add mod">
-        <pc:chgData name="Theodore Mouhlas" userId="01ff3cd0-0633-42e2-959a-392a4aa13f64" providerId="ADAL" clId="{2673A91A-3439-4315-AE72-1AC445A732DB}" dt="2026-05-26T19:16:58.421" v="738" actId="1036"/>
-        <pc:sldMkLst>
-          <pc:docMk/>
-          <pc:sldMk cId="4116740350" sldId="343"/>
-        </pc:sldMkLst>
-        <pc:spChg chg="mod">
-          <ac:chgData name="Theodore Mouhlas" userId="01ff3cd0-0633-42e2-959a-392a4aa13f64" providerId="ADAL" clId="{2673A91A-3439-4315-AE72-1AC445A732DB}" dt="2026-05-26T18:13:21.805" v="346"/>
-          <ac:spMkLst>
-            <pc:docMk/>
-            <pc:sldMk cId="4116740350" sldId="343"/>
-            <ac:spMk id="3" creationId="{8F207169-E78E-47F6-B2E1-C4AF0580D7DF}"/>
-          </ac:spMkLst>
-        </pc:spChg>
-        <pc:spChg chg="mod">
-          <ac:chgData name="Theodore Mouhlas" userId="01ff3cd0-0633-42e2-959a-392a4aa13f64" providerId="ADAL" clId="{2673A91A-3439-4315-AE72-1AC445A732DB}" dt="2026-05-26T18:13:21.806" v="348"/>
-          <ac:spMkLst>
-            <pc:docMk/>
-            <pc:sldMk cId="4116740350" sldId="343"/>
-            <ac:spMk id="4" creationId="{DC83A4BF-7180-4119-819A-510B9B461C0C}"/>
-          </ac:spMkLst>
-        </pc:spChg>
-        <pc:spChg chg="mod">
-          <ac:chgData name="Theodore Mouhlas" userId="01ff3cd0-0633-42e2-959a-392a4aa13f64" providerId="ADAL" clId="{2673A91A-3439-4315-AE72-1AC445A732DB}" dt="2026-05-26T19:16:58.421" v="738" actId="1036"/>
-          <ac:spMkLst>
-            <pc:docMk/>
-            <pc:sldMk cId="4116740350" sldId="343"/>
-            <ac:spMk id="5" creationId="{3ADA0904-961E-470C-BB35-6A19E6EFDBB5}"/>
-          </ac:spMkLst>
-        </pc:spChg>
-        <pc:spChg chg="mod">
-          <ac:chgData name="Theodore Mouhlas" userId="01ff3cd0-0633-42e2-959a-392a4aa13f64" providerId="ADAL" clId="{2673A91A-3439-4315-AE72-1AC445A732DB}" dt="2026-05-26T18:13:21.807" v="349"/>
-          <ac:spMkLst>
-            <pc:docMk/>
-            <pc:sldMk cId="4116740350" sldId="343"/>
-            <ac:spMk id="7" creationId="{703D62D4-7A2C-4BAE-8ABA-A285CE6F529E}"/>
-          </ac:spMkLst>
-        </pc:spChg>
-        <pc:spChg chg="mod">
-          <ac:chgData name="Theodore Mouhlas" userId="01ff3cd0-0633-42e2-959a-392a4aa13f64" providerId="ADAL" clId="{2673A91A-3439-4315-AE72-1AC445A732DB}" dt="2026-05-26T19:16:58.421" v="738" actId="1036"/>
-          <ac:spMkLst>
-            <pc:docMk/>
-            <pc:sldMk cId="4116740350" sldId="343"/>
-            <ac:spMk id="8" creationId="{73974E2B-E42E-40B7-B5A0-DCFF59A70BFB}"/>
-          </ac:spMkLst>
-        </pc:spChg>
-        <pc:spChg chg="mod">
-          <ac:chgData name="Theodore Mouhlas" userId="01ff3cd0-0633-42e2-959a-392a4aa13f64" providerId="ADAL" clId="{2673A91A-3439-4315-AE72-1AC445A732DB}" dt="2026-05-26T18:13:21.808" v="351"/>
-          <ac:spMkLst>
-            <pc:docMk/>
-            <pc:sldMk cId="4116740350" sldId="343"/>
-            <ac:spMk id="10" creationId="{A48420C1-DC49-4FCB-B788-F0E586B12C09}"/>
-          </ac:spMkLst>
-        </pc:spChg>
-        <pc:spChg chg="mod">
-          <ac:chgData name="Theodore Mouhlas" userId="01ff3cd0-0633-42e2-959a-392a4aa13f64" providerId="ADAL" clId="{2673A91A-3439-4315-AE72-1AC445A732DB}" dt="2026-05-26T19:16:58.421" v="738" actId="1036"/>
-          <ac:spMkLst>
-            <pc:docMk/>
-            <pc:sldMk cId="4116740350" sldId="343"/>
-            <ac:spMk id="11" creationId="{0E12BD1C-D3EE-4C77-9AD6-1BD1EDBAC3A3}"/>
-          </ac:spMkLst>
-        </pc:spChg>
-        <pc:spChg chg="mod">
-          <ac:chgData name="Theodore Mouhlas" userId="01ff3cd0-0633-42e2-959a-392a4aa13f64" providerId="ADAL" clId="{2673A91A-3439-4315-AE72-1AC445A732DB}" dt="2026-05-26T18:13:21.810" v="353"/>
-          <ac:spMkLst>
-            <pc:docMk/>
-            <pc:sldMk cId="4116740350" sldId="343"/>
-            <ac:spMk id="13" creationId="{04E1541B-A9D3-4DBB-9CFF-8BB34EC1BC02}"/>
-          </ac:spMkLst>
-        </pc:spChg>
-        <pc:spChg chg="mod">
-          <ac:chgData name="Theodore Mouhlas" userId="01ff3cd0-0633-42e2-959a-392a4aa13f64" providerId="ADAL" clId="{2673A91A-3439-4315-AE72-1AC445A732DB}" dt="2026-05-26T19:16:58.421" v="738" actId="1036"/>
-          <ac:spMkLst>
-            <pc:docMk/>
-            <pc:sldMk cId="4116740350" sldId="343"/>
-            <ac:spMk id="14" creationId="{413BFE09-AA2E-4AB5-9CAF-2ECAE79D1FCE}"/>
-          </ac:spMkLst>
-        </pc:spChg>
-        <pc:spChg chg="mod">
-          <ac:chgData name="Theodore Mouhlas" userId="01ff3cd0-0633-42e2-959a-392a4aa13f64" providerId="ADAL" clId="{2673A91A-3439-4315-AE72-1AC445A732DB}" dt="2026-05-26T18:13:21.810" v="354"/>
-          <ac:spMkLst>
-            <pc:docMk/>
-            <pc:sldMk cId="4116740350" sldId="343"/>
-            <ac:spMk id="15" creationId="{94C63140-436F-408E-B654-AC51412C86FA}"/>
-          </ac:spMkLst>
-        </pc:spChg>
-        <pc:spChg chg="mod">
-          <ac:chgData name="Theodore Mouhlas" userId="01ff3cd0-0633-42e2-959a-392a4aa13f64" providerId="ADAL" clId="{2673A91A-3439-4315-AE72-1AC445A732DB}" dt="2026-05-26T18:13:21.813" v="356"/>
-          <ac:spMkLst>
-            <pc:docMk/>
-            <pc:sldMk cId="4116740350" sldId="343"/>
-            <ac:spMk id="16" creationId="{5C28CC3E-503E-4E5B-A862-B16C24DC79EA}"/>
-          </ac:spMkLst>
-        </pc:spChg>
-        <pc:spChg chg="mod">
-          <ac:chgData name="Theodore Mouhlas" userId="01ff3cd0-0633-42e2-959a-392a4aa13f64" providerId="ADAL" clId="{2673A91A-3439-4315-AE72-1AC445A732DB}" dt="2026-05-26T19:16:58.421" v="738" actId="1036"/>
-          <ac:spMkLst>
-            <pc:docMk/>
-            <pc:sldMk cId="4116740350" sldId="343"/>
-            <ac:spMk id="17" creationId="{43B2730E-510B-407B-A5B9-43164C73DC0A}"/>
-          </ac:spMkLst>
-        </pc:spChg>
-        <pc:spChg chg="mod">
-          <ac:chgData name="Theodore Mouhlas" userId="01ff3cd0-0633-42e2-959a-392a4aa13f64" providerId="ADAL" clId="{2673A91A-3439-4315-AE72-1AC445A732DB}" dt="2026-05-26T18:13:21.813" v="357"/>
-          <ac:spMkLst>
-            <pc:docMk/>
-            <pc:sldMk cId="4116740350" sldId="343"/>
-            <ac:spMk id="18" creationId="{5A0005F2-4C4E-47D8-ADD7-69B0BA65A096}"/>
-          </ac:spMkLst>
-        </pc:spChg>
-        <pc:spChg chg="mod">
-          <ac:chgData name="Theodore Mouhlas" userId="01ff3cd0-0633-42e2-959a-392a4aa13f64" providerId="ADAL" clId="{2673A91A-3439-4315-AE72-1AC445A732DB}" dt="2026-05-26T18:13:21.815" v="359"/>
-          <ac:spMkLst>
-            <pc:docMk/>
-            <pc:sldMk cId="4116740350" sldId="343"/>
-            <ac:spMk id="19" creationId="{EE4F139C-B452-48BA-9D71-1163C68EE70C}"/>
-          </ac:spMkLst>
-        </pc:spChg>
-        <pc:spChg chg="mod">
-          <ac:chgData name="Theodore Mouhlas" userId="01ff3cd0-0633-42e2-959a-392a4aa13f64" providerId="ADAL" clId="{2673A91A-3439-4315-AE72-1AC445A732DB}" dt="2026-05-26T19:16:58.421" v="738" actId="1036"/>
-          <ac:spMkLst>
-            <pc:docMk/>
-            <pc:sldMk cId="4116740350" sldId="343"/>
-            <ac:spMk id="20" creationId="{CE474A9B-AFA1-46F3-B83B-7992E1725043}"/>
-          </ac:spMkLst>
-        </pc:spChg>
-        <pc:spChg chg="mod">
-          <ac:chgData name="Theodore Mouhlas" userId="01ff3cd0-0633-42e2-959a-392a4aa13f64" providerId="ADAL" clId="{2673A91A-3439-4315-AE72-1AC445A732DB}" dt="2026-05-26T18:13:21.815" v="360"/>
-          <ac:spMkLst>
-            <pc:docMk/>
-            <pc:sldMk cId="4116740350" sldId="343"/>
-            <ac:spMk id="25" creationId="{1BBBC082-415D-4F94-BA05-33873A3677F5}"/>
-          </ac:spMkLst>
-        </pc:spChg>
-      </pc:sldChg>
-      <pc:sldChg chg="modSp add mod">
-        <pc:chgData name="Theodore Mouhlas" userId="01ff3cd0-0633-42e2-959a-392a4aa13f64" providerId="ADAL" clId="{2673A91A-3439-4315-AE72-1AC445A732DB}" dt="2026-05-26T18:14:15.001" v="372"/>
-        <pc:sldMkLst>
-          <pc:docMk/>
-          <pc:sldMk cId="1319208998" sldId="344"/>
-        </pc:sldMkLst>
-        <pc:spChg chg="mod">
-          <ac:chgData name="Theodore Mouhlas" userId="01ff3cd0-0633-42e2-959a-392a4aa13f64" providerId="ADAL" clId="{2673A91A-3439-4315-AE72-1AC445A732DB}" dt="2026-05-26T18:14:14.977" v="363"/>
-          <ac:spMkLst>
-            <pc:docMk/>
-            <pc:sldMk cId="1319208998" sldId="344"/>
-            <ac:spMk id="2" creationId="{0F7B85AD-49C7-45BF-979F-05F35676F151}"/>
-          </ac:spMkLst>
-        </pc:spChg>
-        <pc:spChg chg="mod">
-          <ac:chgData name="Theodore Mouhlas" userId="01ff3cd0-0633-42e2-959a-392a4aa13f64" providerId="ADAL" clId="{2673A91A-3439-4315-AE72-1AC445A732DB}" dt="2026-05-26T18:14:14.982" v="365"/>
-          <ac:spMkLst>
-            <pc:docMk/>
-            <pc:sldMk cId="1319208998" sldId="344"/>
-            <ac:spMk id="3" creationId="{2FC92F5C-9086-4D4F-A7E4-D88151751304}"/>
-          </ac:spMkLst>
-        </pc:spChg>
-        <pc:spChg chg="mod">
-          <ac:chgData name="Theodore Mouhlas" userId="01ff3cd0-0633-42e2-959a-392a4aa13f64" providerId="ADAL" clId="{2673A91A-3439-4315-AE72-1AC445A732DB}" dt="2026-05-26T18:14:14.985" v="367"/>
-          <ac:spMkLst>
-            <pc:docMk/>
-            <pc:sldMk cId="1319208998" sldId="344"/>
-            <ac:spMk id="4" creationId="{1C41DE1A-F92E-4103-8E30-0F78271C35C8}"/>
-          </ac:spMkLst>
-        </pc:spChg>
-        <pc:spChg chg="mod">
-          <ac:chgData name="Theodore Mouhlas" userId="01ff3cd0-0633-42e2-959a-392a4aa13f64" providerId="ADAL" clId="{2673A91A-3439-4315-AE72-1AC445A732DB}" dt="2026-05-26T18:14:14.986" v="368"/>
-          <ac:spMkLst>
-            <pc:docMk/>
-            <pc:sldMk cId="1319208998" sldId="344"/>
-            <ac:spMk id="8" creationId="{7D292E1E-2A2D-43CD-A702-3E8AA39301B2}"/>
-          </ac:spMkLst>
-        </pc:spChg>
-        <pc:spChg chg="mod">
-          <ac:chgData name="Theodore Mouhlas" userId="01ff3cd0-0633-42e2-959a-392a4aa13f64" providerId="ADAL" clId="{2673A91A-3439-4315-AE72-1AC445A732DB}" dt="2026-05-26T18:14:14.990" v="369"/>
-          <ac:spMkLst>
-            <pc:docMk/>
-            <pc:sldMk cId="1319208998" sldId="344"/>
-            <ac:spMk id="9" creationId="{C7C744EE-3CDA-4C61-B579-404B0C278FCF}"/>
-          </ac:spMkLst>
-        </pc:spChg>
-        <pc:spChg chg="mod">
-          <ac:chgData name="Theodore Mouhlas" userId="01ff3cd0-0633-42e2-959a-392a4aa13f64" providerId="ADAL" clId="{2673A91A-3439-4315-AE72-1AC445A732DB}" dt="2026-05-26T18:14:15" v="371"/>
-          <ac:spMkLst>
-            <pc:docMk/>
-            <pc:sldMk cId="1319208998" sldId="344"/>
-            <ac:spMk id="10" creationId="{B65D4799-DCE0-4CBE-9063-140E470E8178}"/>
-          </ac:spMkLst>
-        </pc:spChg>
-        <pc:spChg chg="mod">
-          <ac:chgData name="Theodore Mouhlas" userId="01ff3cd0-0633-42e2-959a-392a4aa13f64" providerId="ADAL" clId="{2673A91A-3439-4315-AE72-1AC445A732DB}" dt="2026-05-26T18:14:15.001" v="372"/>
-          <ac:spMkLst>
-            <pc:docMk/>
-            <pc:sldMk cId="1319208998" sldId="344"/>
-            <ac:spMk id="11" creationId="{2492E87A-2BC2-432C-B4AB-1B976A108C65}"/>
-          </ac:spMkLst>
-        </pc:spChg>
-      </pc:sldChg>
-      <pc:sldChg chg="modSp add mod">
-        <pc:chgData name="Theodore Mouhlas" userId="01ff3cd0-0633-42e2-959a-392a4aa13f64" providerId="ADAL" clId="{2673A91A-3439-4315-AE72-1AC445A732DB}" dt="2026-05-26T19:17:24.473" v="739" actId="1582"/>
-        <pc:sldMkLst>
-          <pc:docMk/>
-          <pc:sldMk cId="1059577359" sldId="345"/>
-        </pc:sldMkLst>
-        <pc:spChg chg="mod">
-          <ac:chgData name="Theodore Mouhlas" userId="01ff3cd0-0633-42e2-959a-392a4aa13f64" providerId="ADAL" clId="{2673A91A-3439-4315-AE72-1AC445A732DB}" dt="2026-05-26T18:15:06.251" v="386"/>
-          <ac:spMkLst>
-            <pc:docMk/>
-            <pc:sldMk cId="1059577359" sldId="345"/>
-            <ac:spMk id="2" creationId="{3E847FF8-987B-4E2D-A743-D5017575A8F8}"/>
-          </ac:spMkLst>
-        </pc:spChg>
-        <pc:spChg chg="mod">
-          <ac:chgData name="Theodore Mouhlas" userId="01ff3cd0-0633-42e2-959a-392a4aa13f64" providerId="ADAL" clId="{2673A91A-3439-4315-AE72-1AC445A732DB}" dt="2026-05-26T18:15:06.253" v="388"/>
-          <ac:spMkLst>
-            <pc:docMk/>
-            <pc:sldMk cId="1059577359" sldId="345"/>
-            <ac:spMk id="4" creationId="{867680F1-D5EA-4371-9E39-28366A9A2C7B}"/>
-          </ac:spMkLst>
-        </pc:spChg>
-        <pc:spChg chg="mod">
-          <ac:chgData name="Theodore Mouhlas" userId="01ff3cd0-0633-42e2-959a-392a4aa13f64" providerId="ADAL" clId="{2673A91A-3439-4315-AE72-1AC445A732DB}" dt="2026-05-26T19:17:24.473" v="739" actId="1582"/>
-          <ac:spMkLst>
-            <pc:docMk/>
-            <pc:sldMk cId="1059577359" sldId="345"/>
-            <ac:spMk id="5" creationId="{A71A244C-F75B-437A-92DD-341FF82D0E05}"/>
-          </ac:spMkLst>
-        </pc:spChg>
-        <pc:spChg chg="mod">
-          <ac:chgData name="Theodore Mouhlas" userId="01ff3cd0-0633-42e2-959a-392a4aa13f64" providerId="ADAL" clId="{2673A91A-3439-4315-AE72-1AC445A732DB}" dt="2026-05-26T18:15:06.255" v="390"/>
-          <ac:spMkLst>
-            <pc:docMk/>
-            <pc:sldMk cId="1059577359" sldId="345"/>
-            <ac:spMk id="8" creationId="{D6435E94-CB42-41D9-A6B1-427D04784C86}"/>
-          </ac:spMkLst>
-        </pc:spChg>
-        <pc:spChg chg="mod">
-          <ac:chgData name="Theodore Mouhlas" userId="01ff3cd0-0633-42e2-959a-392a4aa13f64" providerId="ADAL" clId="{2673A91A-3439-4315-AE72-1AC445A732DB}" dt="2026-05-26T18:15:06.255" v="391"/>
-          <ac:spMkLst>
-            <pc:docMk/>
-            <pc:sldMk cId="1059577359" sldId="345"/>
-            <ac:spMk id="9" creationId="{7B80D01F-8F76-4C2F-8F64-7CBE101E1707}"/>
-          </ac:spMkLst>
-        </pc:spChg>
-        <pc:spChg chg="mod">
-          <ac:chgData name="Theodore Mouhlas" userId="01ff3cd0-0633-42e2-959a-392a4aa13f64" providerId="ADAL" clId="{2673A91A-3439-4315-AE72-1AC445A732DB}" dt="2026-05-26T18:15:06.260" v="393"/>
-          <ac:spMkLst>
-            <pc:docMk/>
-            <pc:sldMk cId="1059577359" sldId="345"/>
-            <ac:spMk id="10" creationId="{D7A93E44-E898-4DFC-B001-C6726301BA83}"/>
-          </ac:spMkLst>
-        </pc:spChg>
-      </pc:sldChg>
-      <pc:sldChg chg="modSp add mod">
-        <pc:chgData name="Theodore Mouhlas" userId="01ff3cd0-0633-42e2-959a-392a4aa13f64" providerId="ADAL" clId="{2673A91A-3439-4315-AE72-1AC445A732DB}" dt="2026-05-26T18:15:48.254" v="406"/>
-        <pc:sldMkLst>
-          <pc:docMk/>
-          <pc:sldMk cId="3138829510" sldId="346"/>
-        </pc:sldMkLst>
-        <pc:spChg chg="mod">
-          <ac:chgData name="Theodore Mouhlas" userId="01ff3cd0-0633-42e2-959a-392a4aa13f64" providerId="ADAL" clId="{2673A91A-3439-4315-AE72-1AC445A732DB}" dt="2026-05-26T18:15:48.248" v="399"/>
-          <ac:spMkLst>
-            <pc:docMk/>
-            <pc:sldMk cId="3138829510" sldId="346"/>
-            <ac:spMk id="2" creationId="{72A98A6E-73E0-4218-8232-CBA4FF2B4326}"/>
-          </ac:spMkLst>
-        </pc:spChg>
-        <pc:spChg chg="mod">
-          <ac:chgData name="Theodore Mouhlas" userId="01ff3cd0-0633-42e2-959a-392a4aa13f64" providerId="ADAL" clId="{2673A91A-3439-4315-AE72-1AC445A732DB}" dt="2026-05-26T18:15:48.250" v="401"/>
-          <ac:spMkLst>
-            <pc:docMk/>
-            <pc:sldMk cId="3138829510" sldId="346"/>
-            <ac:spMk id="3" creationId="{499D0C0E-694E-44D3-9D21-587AD38CD790}"/>
-          </ac:spMkLst>
-        </pc:spChg>
-        <pc:spChg chg="mod">
-          <ac:chgData name="Theodore Mouhlas" userId="01ff3cd0-0633-42e2-959a-392a4aa13f64" providerId="ADAL" clId="{2673A91A-3439-4315-AE72-1AC445A732DB}" dt="2026-05-26T18:15:48.251" v="403"/>
-          <ac:spMkLst>
-            <pc:docMk/>
-            <pc:sldMk cId="3138829510" sldId="346"/>
-            <ac:spMk id="4" creationId="{CEA899B2-AA0C-4304-AE69-D24793D36DD7}"/>
-          </ac:spMkLst>
-        </pc:spChg>
-        <pc:spChg chg="mod">
-          <ac:chgData name="Theodore Mouhlas" userId="01ff3cd0-0633-42e2-959a-392a4aa13f64" providerId="ADAL" clId="{2673A91A-3439-4315-AE72-1AC445A732DB}" dt="2026-05-26T18:15:48.253" v="405"/>
-          <ac:spMkLst>
-            <pc:docMk/>
-            <pc:sldMk cId="3138829510" sldId="346"/>
-            <ac:spMk id="8" creationId="{A078BEB5-6CDB-4D39-8917-4EE8E4AA42E7}"/>
-          </ac:spMkLst>
-        </pc:spChg>
-        <pc:spChg chg="mod">
-          <ac:chgData name="Theodore Mouhlas" userId="01ff3cd0-0633-42e2-959a-392a4aa13f64" providerId="ADAL" clId="{2673A91A-3439-4315-AE72-1AC445A732DB}" dt="2026-05-26T18:15:48.254" v="406"/>
-          <ac:spMkLst>
-            <pc:docMk/>
-            <pc:sldMk cId="3138829510" sldId="346"/>
-            <ac:spMk id="9" creationId="{3D023872-AAFB-4FC4-A22B-EF32EA21E9A9}"/>
-          </ac:spMkLst>
-        </pc:spChg>
-      </pc:sldChg>
-      <pc:sldChg chg="modSp add mod">
-        <pc:chgData name="Theodore Mouhlas" userId="01ff3cd0-0633-42e2-959a-392a4aa13f64" providerId="ADAL" clId="{2673A91A-3439-4315-AE72-1AC445A732DB}" dt="2026-05-26T18:16:39.330" v="444"/>
-        <pc:sldMkLst>
-          <pc:docMk/>
-          <pc:sldMk cId="2505366336" sldId="347"/>
-        </pc:sldMkLst>
-        <pc:spChg chg="mod">
-          <ac:chgData name="Theodore Mouhlas" userId="01ff3cd0-0633-42e2-959a-392a4aa13f64" providerId="ADAL" clId="{2673A91A-3439-4315-AE72-1AC445A732DB}" dt="2026-05-26T18:16:39.310" v="432"/>
-          <ac:spMkLst>
-            <pc:docMk/>
-            <pc:sldMk cId="2505366336" sldId="347"/>
-            <ac:spMk id="2" creationId="{A3789804-1859-4C93-9925-CC1D08A7C40A}"/>
-          </ac:spMkLst>
-        </pc:spChg>
-        <pc:spChg chg="mod">
-          <ac:chgData name="Theodore Mouhlas" userId="01ff3cd0-0633-42e2-959a-392a4aa13f64" providerId="ADAL" clId="{2673A91A-3439-4315-AE72-1AC445A732DB}" dt="2026-05-26T18:16:39.312" v="434"/>
-          <ac:spMkLst>
-            <pc:docMk/>
-            <pc:sldMk cId="2505366336" sldId="347"/>
-            <ac:spMk id="3" creationId="{19A657E9-C736-43C6-8C61-CB4AE87089A2}"/>
-          </ac:spMkLst>
-        </pc:spChg>
-        <pc:spChg chg="mod">
-          <ac:chgData name="Theodore Mouhlas" userId="01ff3cd0-0633-42e2-959a-392a4aa13f64" providerId="ADAL" clId="{2673A91A-3439-4315-AE72-1AC445A732DB}" dt="2026-05-26T18:16:39.315" v="436"/>
-          <ac:spMkLst>
-            <pc:docMk/>
-            <pc:sldMk cId="2505366336" sldId="347"/>
-            <ac:spMk id="4" creationId="{AEA33690-A337-4B47-B69F-E54E49DE385E}"/>
-          </ac:spMkLst>
-        </pc:spChg>
-        <pc:spChg chg="mod">
-          <ac:chgData name="Theodore Mouhlas" userId="01ff3cd0-0633-42e2-959a-392a4aa13f64" providerId="ADAL" clId="{2673A91A-3439-4315-AE72-1AC445A732DB}" dt="2026-05-26T18:16:39.318" v="438"/>
-          <ac:spMkLst>
-            <pc:docMk/>
-            <pc:sldMk cId="2505366336" sldId="347"/>
-            <ac:spMk id="8" creationId="{C20242A2-143E-4BD1-AEB5-9A6FC072F74D}"/>
-          </ac:spMkLst>
-        </pc:spChg>
-        <pc:spChg chg="mod">
-          <ac:chgData name="Theodore Mouhlas" userId="01ff3cd0-0633-42e2-959a-392a4aa13f64" providerId="ADAL" clId="{2673A91A-3439-4315-AE72-1AC445A732DB}" dt="2026-05-26T18:16:39.321" v="440"/>
-          <ac:spMkLst>
-            <pc:docMk/>
-            <pc:sldMk cId="2505366336" sldId="347"/>
-            <ac:spMk id="9" creationId="{AB05C29C-B4FB-4808-86A5-1FE3E5AB02CD}"/>
-          </ac:spMkLst>
-        </pc:spChg>
-        <pc:spChg chg="mod">
-          <ac:chgData name="Theodore Mouhlas" userId="01ff3cd0-0633-42e2-959a-392a4aa13f64" providerId="ADAL" clId="{2673A91A-3439-4315-AE72-1AC445A732DB}" dt="2026-05-26T18:16:39.324" v="442"/>
-          <ac:spMkLst>
-            <pc:docMk/>
-            <pc:sldMk cId="2505366336" sldId="347"/>
-            <ac:spMk id="10" creationId="{53317BD5-D459-4965-989E-38B3FFF05742}"/>
-          </ac:spMkLst>
-        </pc:spChg>
-        <pc:spChg chg="mod">
-          <ac:chgData name="Theodore Mouhlas" userId="01ff3cd0-0633-42e2-959a-392a4aa13f64" providerId="ADAL" clId="{2673A91A-3439-4315-AE72-1AC445A732DB}" dt="2026-05-26T18:16:39.330" v="444"/>
-          <ac:spMkLst>
-            <pc:docMk/>
-            <pc:sldMk cId="2505366336" sldId="347"/>
-            <ac:spMk id="13" creationId="{EE651DD3-EE9B-4037-8457-E0C2BCF3B829}"/>
-          </ac:spMkLst>
-        </pc:spChg>
-      </pc:sldChg>
-      <pc:sldChg chg="modSp add del mod">
-        <pc:chgData name="Theodore Mouhlas" userId="01ff3cd0-0633-42e2-959a-392a4aa13f64" providerId="ADAL" clId="{2673A91A-3439-4315-AE72-1AC445A732DB}" dt="2026-05-26T18:21:31.952" v="458"/>
-        <pc:sldMkLst>
-          <pc:docMk/>
-          <pc:sldMk cId="2264334748" sldId="348"/>
-        </pc:sldMkLst>
-        <pc:spChg chg="mod">
-          <ac:chgData name="Theodore Mouhlas" userId="01ff3cd0-0633-42e2-959a-392a4aa13f64" providerId="ADAL" clId="{2673A91A-3439-4315-AE72-1AC445A732DB}" dt="2026-05-26T18:19:39.932" v="448"/>
-          <ac:spMkLst>
-            <pc:docMk/>
-            <pc:sldMk cId="2264334748" sldId="348"/>
-            <ac:spMk id="5" creationId="{45AAE1AE-7DFA-4D4E-84E7-E394EDC4B550}"/>
-          </ac:spMkLst>
-        </pc:spChg>
-        <pc:spChg chg="mod">
-          <ac:chgData name="Theodore Mouhlas" userId="01ff3cd0-0633-42e2-959a-392a4aa13f64" providerId="ADAL" clId="{2673A91A-3439-4315-AE72-1AC445A732DB}" dt="2026-05-26T18:19:39.932" v="449"/>
-          <ac:spMkLst>
-            <pc:docMk/>
-            <pc:sldMk cId="2264334748" sldId="348"/>
-            <ac:spMk id="24" creationId="{E4B94D33-FB01-4F3B-9C03-1FF7A3DF0BB3}"/>
-          </ac:spMkLst>
-        </pc:spChg>
-      </pc:sldChg>
-      <pc:sldChg chg="add del">
-        <pc:chgData name="Theodore Mouhlas" userId="01ff3cd0-0633-42e2-959a-392a4aa13f64" providerId="ADAL" clId="{2673A91A-3439-4315-AE72-1AC445A732DB}" dt="2026-05-26T18:20:25.863" v="452"/>
-        <pc:sldMkLst>
-          <pc:docMk/>
-          <pc:sldMk cId="1714330316" sldId="349"/>
-        </pc:sldMkLst>
-      </pc:sldChg>
-      <pc:sldChg chg="modSp add del mod">
-        <pc:chgData name="Theodore Mouhlas" userId="01ff3cd0-0633-42e2-959a-392a4aa13f64" providerId="ADAL" clId="{2673A91A-3439-4315-AE72-1AC445A732DB}" dt="2026-05-26T18:51:42.358" v="721"/>
-        <pc:sldMkLst>
-          <pc:docMk/>
-          <pc:sldMk cId="4094045416" sldId="349"/>
-        </pc:sldMkLst>
-        <pc:spChg chg="mod">
-          <ac:chgData name="Theodore Mouhlas" userId="01ff3cd0-0633-42e2-959a-392a4aa13f64" providerId="ADAL" clId="{2673A91A-3439-4315-AE72-1AC445A732DB}" dt="2026-05-26T18:21:24.149" v="456"/>
-          <ac:spMkLst>
-            <pc:docMk/>
-            <pc:sldMk cId="4094045416" sldId="349"/>
-            <ac:spMk id="5" creationId="{0BB00342-2DF1-46FE-9005-785F1F26D872}"/>
-          </ac:spMkLst>
-        </pc:spChg>
-      </pc:sldChg>
-      <pc:sldChg chg="add del">
-        <pc:chgData name="Theodore Mouhlas" userId="01ff3cd0-0633-42e2-959a-392a4aa13f64" providerId="ADAL" clId="{2673A91A-3439-4315-AE72-1AC445A732DB}" dt="2026-05-26T18:22:37.498" v="460"/>
-        <pc:sldMkLst>
-          <pc:docMk/>
-          <pc:sldMk cId="1997143574" sldId="350"/>
-        </pc:sldMkLst>
-      </pc:sldChg>
-      <pc:sldChg chg="add del">
-        <pc:chgData name="Theodore Mouhlas" userId="01ff3cd0-0633-42e2-959a-392a4aa13f64" providerId="ADAL" clId="{2673A91A-3439-4315-AE72-1AC445A732DB}" dt="2026-05-26T18:23:12.296" v="462"/>
-        <pc:sldMkLst>
-          <pc:docMk/>
-          <pc:sldMk cId="1987674669" sldId="351"/>
-        </pc:sldMkLst>
-      </pc:sldChg>
-      <pc:sldChg chg="modSp add del mod">
-        <pc:chgData name="Theodore Mouhlas" userId="01ff3cd0-0633-42e2-959a-392a4aa13f64" providerId="ADAL" clId="{2673A91A-3439-4315-AE72-1AC445A732DB}" dt="2026-05-26T18:51:12.221" v="711"/>
-        <pc:sldMkLst>
-          <pc:docMk/>
-          <pc:sldMk cId="3128680289" sldId="352"/>
-        </pc:sldMkLst>
-        <pc:spChg chg="mod">
-          <ac:chgData name="Theodore Mouhlas" userId="01ff3cd0-0633-42e2-959a-392a4aa13f64" providerId="ADAL" clId="{2673A91A-3439-4315-AE72-1AC445A732DB}" dt="2026-05-26T18:25:30.486" v="512" actId="1036"/>
-          <ac:spMkLst>
-            <pc:docMk/>
-            <pc:sldMk cId="3128680289" sldId="352"/>
-            <ac:spMk id="2" creationId="{2E35EB7A-A52F-5A1B-215B-0384D7F189E7}"/>
-          </ac:spMkLst>
-        </pc:spChg>
-        <pc:spChg chg="mod">
-          <ac:chgData name="Theodore Mouhlas" userId="01ff3cd0-0633-42e2-959a-392a4aa13f64" providerId="ADAL" clId="{2673A91A-3439-4315-AE72-1AC445A732DB}" dt="2026-05-26T18:26:03" v="551" actId="1035"/>
-          <ac:spMkLst>
-            <pc:docMk/>
-            <pc:sldMk cId="3128680289" sldId="352"/>
-            <ac:spMk id="8" creationId="{8A28107C-48DA-45B0-8463-D5D9FD42562E}"/>
-          </ac:spMkLst>
-        </pc:spChg>
-        <pc:spChg chg="mod">
-          <ac:chgData name="Theodore Mouhlas" userId="01ff3cd0-0633-42e2-959a-392a4aa13f64" providerId="ADAL" clId="{2673A91A-3439-4315-AE72-1AC445A732DB}" dt="2026-05-26T18:26:12.334" v="559" actId="1036"/>
-          <ac:spMkLst>
-            <pc:docMk/>
-            <pc:sldMk cId="3128680289" sldId="352"/>
-            <ac:spMk id="9" creationId="{ED99D64B-5472-4A4E-AD62-9B1026C3C2D5}"/>
-          </ac:spMkLst>
-        </pc:spChg>
-        <pc:spChg chg="mod">
-          <ac:chgData name="Theodore Mouhlas" userId="01ff3cd0-0633-42e2-959a-392a4aa13f64" providerId="ADAL" clId="{2673A91A-3439-4315-AE72-1AC445A732DB}" dt="2026-05-26T18:26:03" v="551" actId="1035"/>
-          <ac:spMkLst>
-            <pc:docMk/>
-            <pc:sldMk cId="3128680289" sldId="352"/>
-            <ac:spMk id="11" creationId="{BA89B2D3-B45F-4AD4-B6E0-00AF017F1357}"/>
-          </ac:spMkLst>
-        </pc:spChg>
-        <pc:spChg chg="mod">
-          <ac:chgData name="Theodore Mouhlas" userId="01ff3cd0-0633-42e2-959a-392a4aa13f64" providerId="ADAL" clId="{2673A91A-3439-4315-AE72-1AC445A732DB}" dt="2026-05-26T18:26:12.334" v="559" actId="1036"/>
-          <ac:spMkLst>
-            <pc:docMk/>
-            <pc:sldMk cId="3128680289" sldId="352"/>
-            <ac:spMk id="12" creationId="{AB720C41-9174-4B7F-815B-8463D676C161}"/>
-          </ac:spMkLst>
-        </pc:spChg>
-        <pc:spChg chg="mod">
-          <ac:chgData name="Theodore Mouhlas" userId="01ff3cd0-0633-42e2-959a-392a4aa13f64" providerId="ADAL" clId="{2673A91A-3439-4315-AE72-1AC445A732DB}" dt="2026-05-26T18:26:03" v="551" actId="1035"/>
-          <ac:spMkLst>
-            <pc:docMk/>
-            <pc:sldMk cId="3128680289" sldId="352"/>
-            <ac:spMk id="14" creationId="{1C175836-8AD0-470E-BEC6-A1FD626B9D31}"/>
-          </ac:spMkLst>
-        </pc:spChg>
-        <pc:spChg chg="mod">
-          <ac:chgData name="Theodore Mouhlas" userId="01ff3cd0-0633-42e2-959a-392a4aa13f64" providerId="ADAL" clId="{2673A91A-3439-4315-AE72-1AC445A732DB}" dt="2026-05-26T18:26:01.486" v="549" actId="14100"/>
-          <ac:spMkLst>
-            <pc:docMk/>
-            <pc:sldMk cId="3128680289" sldId="352"/>
-            <ac:spMk id="15" creationId="{C9D34985-E018-4E5E-A5E2-E14AB9C5DF59}"/>
-          </ac:spMkLst>
-        </pc:spChg>
-        <pc:spChg chg="mod">
-          <ac:chgData name="Theodore Mouhlas" userId="01ff3cd0-0633-42e2-959a-392a4aa13f64" providerId="ADAL" clId="{2673A91A-3439-4315-AE72-1AC445A732DB}" dt="2026-05-26T18:26:03" v="551" actId="1035"/>
-          <ac:spMkLst>
-            <pc:docMk/>
-            <pc:sldMk cId="3128680289" sldId="352"/>
-            <ac:spMk id="17" creationId="{CD121969-E9D6-40FF-A132-C72C5F54464F}"/>
-          </ac:spMkLst>
-        </pc:spChg>
-        <pc:spChg chg="mod">
-          <ac:chgData name="Theodore Mouhlas" userId="01ff3cd0-0633-42e2-959a-392a4aa13f64" providerId="ADAL" clId="{2673A91A-3439-4315-AE72-1AC445A732DB}" dt="2026-05-26T18:23:12.340" v="470"/>
-          <ac:spMkLst>
-            <pc:docMk/>
-            <pc:sldMk cId="3128680289" sldId="352"/>
-            <ac:spMk id="18" creationId="{607108FC-8E95-42F3-9B82-8A9B418C5D9E}"/>
-          </ac:spMkLst>
-        </pc:spChg>
-        <pc:spChg chg="mod">
-          <ac:chgData name="Theodore Mouhlas" userId="01ff3cd0-0633-42e2-959a-392a4aa13f64" providerId="ADAL" clId="{2673A91A-3439-4315-AE72-1AC445A732DB}" dt="2026-05-26T18:26:03" v="551" actId="1035"/>
-          <ac:spMkLst>
-            <pc:docMk/>
-            <pc:sldMk cId="3128680289" sldId="352"/>
-            <ac:spMk id="20" creationId="{4A8EA73C-66F7-4CFF-88B2-9E2584152534}"/>
-          </ac:spMkLst>
-        </pc:spChg>
-        <pc:spChg chg="mod">
-          <ac:chgData name="Theodore Mouhlas" userId="01ff3cd0-0633-42e2-959a-392a4aa13f64" providerId="ADAL" clId="{2673A91A-3439-4315-AE72-1AC445A732DB}" dt="2026-05-26T18:26:12.334" v="559" actId="1036"/>
-          <ac:spMkLst>
-            <pc:docMk/>
-            <pc:sldMk cId="3128680289" sldId="352"/>
-            <ac:spMk id="21" creationId="{4D12C0E4-BCB6-4848-8023-99D8B77A3DEF}"/>
-          </ac:spMkLst>
-        </pc:spChg>
-        <pc:spChg chg="mod">
-          <ac:chgData name="Theodore Mouhlas" userId="01ff3cd0-0633-42e2-959a-392a4aa13f64" providerId="ADAL" clId="{2673A91A-3439-4315-AE72-1AC445A732DB}" dt="2026-05-26T18:26:03" v="551" actId="1035"/>
-          <ac:spMkLst>
-            <pc:docMk/>
-            <pc:sldMk cId="3128680289" sldId="352"/>
-            <ac:spMk id="23" creationId="{A69B585B-8EF8-470A-AF87-531AA23EA6C2}"/>
-          </ac:spMkLst>
-        </pc:spChg>
-        <pc:spChg chg="mod">
-          <ac:chgData name="Theodore Mouhlas" userId="01ff3cd0-0633-42e2-959a-392a4aa13f64" providerId="ADAL" clId="{2673A91A-3439-4315-AE72-1AC445A732DB}" dt="2026-05-26T18:26:12.334" v="559" actId="1036"/>
-          <ac:spMkLst>
-            <pc:docMk/>
-            <pc:sldMk cId="3128680289" sldId="352"/>
-            <ac:spMk id="24" creationId="{E4B94D33-FB01-4F3B-9C03-1FF7A3DF0BB3}"/>
-          </ac:spMkLst>
-        </pc:spChg>
-        <pc:spChg chg="mod">
-          <ac:chgData name="Theodore Mouhlas" userId="01ff3cd0-0633-42e2-959a-392a4aa13f64" providerId="ADAL" clId="{2673A91A-3439-4315-AE72-1AC445A732DB}" dt="2026-05-26T18:29:12.459" v="579" actId="1035"/>
-          <ac:spMkLst>
-            <pc:docMk/>
-            <pc:sldMk cId="3128680289" sldId="352"/>
-            <ac:spMk id="25" creationId="{03BAF204-C73F-4262-8840-BE4B9528ED8E}"/>
-          </ac:spMkLst>
-        </pc:spChg>
-        <pc:spChg chg="mod">
-          <ac:chgData name="Theodore Mouhlas" userId="01ff3cd0-0633-42e2-959a-392a4aa13f64" providerId="ADAL" clId="{2673A91A-3439-4315-AE72-1AC445A732DB}" dt="2026-05-26T18:25:30.486" v="512" actId="1036"/>
-          <ac:spMkLst>
-            <pc:docMk/>
-            <pc:sldMk cId="3128680289" sldId="352"/>
-            <ac:spMk id="34" creationId="{72D177EB-5E12-4994-AAA3-2903DF556964}"/>
-          </ac:spMkLst>
-        </pc:spChg>
-      </pc:sldChg>
-      <pc:sldChg chg="modSp add mod">
-        <pc:chgData name="Theodore Mouhlas" userId="01ff3cd0-0633-42e2-959a-392a4aa13f64" providerId="ADAL" clId="{2673A91A-3439-4315-AE72-1AC445A732DB}" dt="2026-05-26T18:24:34.675" v="507"/>
-        <pc:sldMkLst>
-          <pc:docMk/>
-          <pc:sldMk cId="2008891599" sldId="353"/>
-        </pc:sldMkLst>
-        <pc:spChg chg="mod">
-          <ac:chgData name="Theodore Mouhlas" userId="01ff3cd0-0633-42e2-959a-392a4aa13f64" providerId="ADAL" clId="{2673A91A-3439-4315-AE72-1AC445A732DB}" dt="2026-05-26T18:24:34.639" v="478"/>
-          <ac:spMkLst>
-            <pc:docMk/>
-            <pc:sldMk cId="2008891599" sldId="353"/>
-            <ac:spMk id="2" creationId="{8FFE75D9-B5A2-4BF7-B896-25965CD8B4E2}"/>
-          </ac:spMkLst>
-        </pc:spChg>
-        <pc:spChg chg="mod">
-          <ac:chgData name="Theodore Mouhlas" userId="01ff3cd0-0633-42e2-959a-392a4aa13f64" providerId="ADAL" clId="{2673A91A-3439-4315-AE72-1AC445A732DB}" dt="2026-05-26T18:24:34.642" v="480"/>
-          <ac:spMkLst>
-            <pc:docMk/>
-            <pc:sldMk cId="2008891599" sldId="353"/>
-            <ac:spMk id="3" creationId="{8D265759-CB91-4295-B8B7-E11B3852E70F}"/>
-          </ac:spMkLst>
-        </pc:spChg>
-        <pc:spChg chg="mod">
-          <ac:chgData name="Theodore Mouhlas" userId="01ff3cd0-0633-42e2-959a-392a4aa13f64" providerId="ADAL" clId="{2673A91A-3439-4315-AE72-1AC445A732DB}" dt="2026-05-26T18:24:34.646" v="482"/>
-          <ac:spMkLst>
-            <pc:docMk/>
-            <pc:sldMk cId="2008891599" sldId="353"/>
-            <ac:spMk id="4" creationId="{557FEB7A-DBC1-430D-9E07-D778046A7D66}"/>
-          </ac:spMkLst>
-        </pc:spChg>
-        <pc:spChg chg="mod">
-          <ac:chgData name="Theodore Mouhlas" userId="01ff3cd0-0633-42e2-959a-392a4aa13f64" providerId="ADAL" clId="{2673A91A-3439-4315-AE72-1AC445A732DB}" dt="2026-05-26T18:24:34.648" v="484"/>
-          <ac:spMkLst>
-            <pc:docMk/>
-            <pc:sldMk cId="2008891599" sldId="353"/>
-            <ac:spMk id="6" creationId="{28F1DDDD-1B4F-4DB6-B195-C8025A09E02F}"/>
-          </ac:spMkLst>
-        </pc:spChg>
-        <pc:spChg chg="mod">
-          <ac:chgData name="Theodore Mouhlas" userId="01ff3cd0-0633-42e2-959a-392a4aa13f64" providerId="ADAL" clId="{2673A91A-3439-4315-AE72-1AC445A732DB}" dt="2026-05-26T18:24:34.649" v="486"/>
-          <ac:spMkLst>
-            <pc:docMk/>
-            <pc:sldMk cId="2008891599" sldId="353"/>
-            <ac:spMk id="7" creationId="{4783A24D-174B-4228-95E6-6124C824AFC6}"/>
-          </ac:spMkLst>
-        </pc:spChg>
-        <pc:spChg chg="mod">
-          <ac:chgData name="Theodore Mouhlas" userId="01ff3cd0-0633-42e2-959a-392a4aa13f64" providerId="ADAL" clId="{2673A91A-3439-4315-AE72-1AC445A732DB}" dt="2026-05-26T18:24:34.650" v="488"/>
-          <ac:spMkLst>
-            <pc:docMk/>
-            <pc:sldMk cId="2008891599" sldId="353"/>
-            <ac:spMk id="9" creationId="{76EFAFF8-A15A-460A-AD15-3666598F0C22}"/>
-          </ac:spMkLst>
-        </pc:spChg>
-        <pc:spChg chg="mod">
-          <ac:chgData name="Theodore Mouhlas" userId="01ff3cd0-0633-42e2-959a-392a4aa13f64" providerId="ADAL" clId="{2673A91A-3439-4315-AE72-1AC445A732DB}" dt="2026-05-26T18:24:34.652" v="490"/>
-          <ac:spMkLst>
-            <pc:docMk/>
-            <pc:sldMk cId="2008891599" sldId="353"/>
-            <ac:spMk id="12" creationId="{DC01A761-3275-40F5-9126-942205313409}"/>
-          </ac:spMkLst>
-        </pc:spChg>
-        <pc:spChg chg="mod">
-          <ac:chgData name="Theodore Mouhlas" userId="01ff3cd0-0633-42e2-959a-392a4aa13f64" providerId="ADAL" clId="{2673A91A-3439-4315-AE72-1AC445A732DB}" dt="2026-05-26T18:24:34.653" v="492"/>
-          <ac:spMkLst>
-            <pc:docMk/>
-            <pc:sldMk cId="2008891599" sldId="353"/>
-            <ac:spMk id="15" creationId="{7A761E66-DE16-4480-98C4-B3E727E688E7}"/>
-          </ac:spMkLst>
-        </pc:spChg>
-        <pc:spChg chg="mod">
-          <ac:chgData name="Theodore Mouhlas" userId="01ff3cd0-0633-42e2-959a-392a4aa13f64" providerId="ADAL" clId="{2673A91A-3439-4315-AE72-1AC445A732DB}" dt="2026-05-26T18:24:34.654" v="494"/>
-          <ac:spMkLst>
-            <pc:docMk/>
-            <pc:sldMk cId="2008891599" sldId="353"/>
-            <ac:spMk id="18" creationId="{1B19B45B-43CF-4D59-835E-640FBF8E9BDA}"/>
-          </ac:spMkLst>
-        </pc:spChg>
-        <pc:spChg chg="mod">
-          <ac:chgData name="Theodore Mouhlas" userId="01ff3cd0-0633-42e2-959a-392a4aa13f64" providerId="ADAL" clId="{2673A91A-3439-4315-AE72-1AC445A732DB}" dt="2026-05-26T18:24:34.657" v="496"/>
-          <ac:spMkLst>
-            <pc:docMk/>
-            <pc:sldMk cId="2008891599" sldId="353"/>
-            <ac:spMk id="21" creationId="{68D91B27-60E6-4F71-91DA-15C787197636}"/>
-          </ac:spMkLst>
-        </pc:spChg>
-        <pc:spChg chg="mod">
-          <ac:chgData name="Theodore Mouhlas" userId="01ff3cd0-0633-42e2-959a-392a4aa13f64" providerId="ADAL" clId="{2673A91A-3439-4315-AE72-1AC445A732DB}" dt="2026-05-26T18:24:34.659" v="498"/>
-          <ac:spMkLst>
-            <pc:docMk/>
-            <pc:sldMk cId="2008891599" sldId="353"/>
-            <ac:spMk id="22" creationId="{BA44A5AF-4C18-4571-A484-89233D646F27}"/>
-          </ac:spMkLst>
-        </pc:spChg>
-        <pc:spChg chg="mod">
-          <ac:chgData name="Theodore Mouhlas" userId="01ff3cd0-0633-42e2-959a-392a4aa13f64" providerId="ADAL" clId="{2673A91A-3439-4315-AE72-1AC445A732DB}" dt="2026-05-26T18:24:34.662" v="500"/>
-          <ac:spMkLst>
-            <pc:docMk/>
-            <pc:sldMk cId="2008891599" sldId="353"/>
-            <ac:spMk id="25" creationId="{0621368C-D9D7-41FC-9097-1439EF984C34}"/>
-          </ac:spMkLst>
-        </pc:spChg>
-        <pc:spChg chg="mod">
-          <ac:chgData name="Theodore Mouhlas" userId="01ff3cd0-0633-42e2-959a-392a4aa13f64" providerId="ADAL" clId="{2673A91A-3439-4315-AE72-1AC445A732DB}" dt="2026-05-26T18:24:34.667" v="502"/>
-          <ac:spMkLst>
-            <pc:docMk/>
-            <pc:sldMk cId="2008891599" sldId="353"/>
-            <ac:spMk id="28" creationId="{34D10E1C-E481-4F55-A93E-9BABE7473CAE}"/>
-          </ac:spMkLst>
-        </pc:spChg>
-        <pc:spChg chg="mod">
-          <ac:chgData name="Theodore Mouhlas" userId="01ff3cd0-0633-42e2-959a-392a4aa13f64" providerId="ADAL" clId="{2673A91A-3439-4315-AE72-1AC445A732DB}" dt="2026-05-26T18:24:34.667" v="503"/>
-          <ac:spMkLst>
-            <pc:docMk/>
-            <pc:sldMk cId="2008891599" sldId="353"/>
-            <ac:spMk id="31" creationId="{8B0E526F-6949-46FB-B674-D57DCD852471}"/>
-          </ac:spMkLst>
-        </pc:spChg>
-        <pc:spChg chg="mod">
-          <ac:chgData name="Theodore Mouhlas" userId="01ff3cd0-0633-42e2-959a-392a4aa13f64" providerId="ADAL" clId="{2673A91A-3439-4315-AE72-1AC445A732DB}" dt="2026-05-26T18:24:34.670" v="505"/>
-          <ac:spMkLst>
-            <pc:docMk/>
-            <pc:sldMk cId="2008891599" sldId="353"/>
-            <ac:spMk id="32" creationId="{467A4AA0-39BB-4C2B-96B1-F4DCA1336613}"/>
-          </ac:spMkLst>
-        </pc:spChg>
-        <pc:spChg chg="mod">
-          <ac:chgData name="Theodore Mouhlas" userId="01ff3cd0-0633-42e2-959a-392a4aa13f64" providerId="ADAL" clId="{2673A91A-3439-4315-AE72-1AC445A732DB}" dt="2026-05-26T18:24:34.675" v="507"/>
-          <ac:spMkLst>
-            <pc:docMk/>
-            <pc:sldMk cId="2008891599" sldId="353"/>
-            <ac:spMk id="33" creationId="{4DAD85B3-77B2-4DEF-AF24-4CC7771DE0F9}"/>
-          </ac:spMkLst>
-        </pc:spChg>
-      </pc:sldChg>
-      <pc:sldChg chg="new del ord">
-        <pc:chgData name="Theodore Mouhlas" userId="01ff3cd0-0633-42e2-959a-392a4aa13f64" providerId="ADAL" clId="{2673A91A-3439-4315-AE72-1AC445A732DB}" dt="2026-05-26T18:26:46.287" v="561"/>
-        <pc:sldMkLst>
-          <pc:docMk/>
-          <pc:sldMk cId="2686429383" sldId="354"/>
-        </pc:sldMkLst>
-      </pc:sldChg>
-      <pc:sldChg chg="add">
-        <pc:chgData name="Theodore Mouhlas" userId="01ff3cd0-0633-42e2-959a-392a4aa13f64" providerId="ADAL" clId="{2673A91A-3439-4315-AE72-1AC445A732DB}" dt="2026-05-26T18:26:46.280" v="560"/>
-        <pc:sldMkLst>
-          <pc:docMk/>
-          <pc:sldMk cId="3019373684" sldId="355"/>
-        </pc:sldMkLst>
-      </pc:sldChg>
-      <pc:sldChg chg="modSp add mod">
-        <pc:chgData name="Theodore Mouhlas" userId="01ff3cd0-0633-42e2-959a-392a4aa13f64" providerId="ADAL" clId="{2673A91A-3439-4315-AE72-1AC445A732DB}" dt="2026-05-26T18:28:37.006" v="574"/>
-        <pc:sldMkLst>
-          <pc:docMk/>
-          <pc:sldMk cId="35471701" sldId="356"/>
-        </pc:sldMkLst>
-        <pc:spChg chg="mod">
-          <ac:chgData name="Theodore Mouhlas" userId="01ff3cd0-0633-42e2-959a-392a4aa13f64" providerId="ADAL" clId="{2673A91A-3439-4315-AE72-1AC445A732DB}" dt="2026-05-26T18:28:36.959" v="565"/>
-          <ac:spMkLst>
-            <pc:docMk/>
-            <pc:sldMk cId="35471701" sldId="356"/>
-            <ac:spMk id="3" creationId="{A324A2D0-6633-42D5-850E-FFDC454ED3AF}"/>
-          </ac:spMkLst>
-        </pc:spChg>
-        <pc:spChg chg="mod">
-          <ac:chgData name="Theodore Mouhlas" userId="01ff3cd0-0633-42e2-959a-392a4aa13f64" providerId="ADAL" clId="{2673A91A-3439-4315-AE72-1AC445A732DB}" dt="2026-05-26T18:28:36.960" v="566"/>
-          <ac:spMkLst>
-            <pc:docMk/>
-            <pc:sldMk cId="35471701" sldId="356"/>
-            <ac:spMk id="4" creationId="{C7D15C94-2230-40ED-87EA-629CD51472C1}"/>
-          </ac:spMkLst>
-        </pc:spChg>
-        <pc:spChg chg="mod">
-          <ac:chgData name="Theodore Mouhlas" userId="01ff3cd0-0633-42e2-959a-392a4aa13f64" providerId="ADAL" clId="{2673A91A-3439-4315-AE72-1AC445A732DB}" dt="2026-05-26T18:28:36.979" v="568"/>
-          <ac:spMkLst>
-            <pc:docMk/>
-            <pc:sldMk cId="35471701" sldId="356"/>
-            <ac:spMk id="10" creationId="{63C7BB44-E6DB-415D-87F4-BD80FA7B6A42}"/>
-          </ac:spMkLst>
-        </pc:spChg>
-        <pc:spChg chg="mod">
-          <ac:chgData name="Theodore Mouhlas" userId="01ff3cd0-0633-42e2-959a-392a4aa13f64" providerId="ADAL" clId="{2673A91A-3439-4315-AE72-1AC445A732DB}" dt="2026-05-26T18:28:36.988" v="570"/>
-          <ac:spMkLst>
-            <pc:docMk/>
-            <pc:sldMk cId="35471701" sldId="356"/>
-            <ac:spMk id="16" creationId="{30FC7D45-AFD6-4E5D-A6A9-46C7AA4BEB69}"/>
-          </ac:spMkLst>
-        </pc:spChg>
-        <pc:spChg chg="mod">
-          <ac:chgData name="Theodore Mouhlas" userId="01ff3cd0-0633-42e2-959a-392a4aa13f64" providerId="ADAL" clId="{2673A91A-3439-4315-AE72-1AC445A732DB}" dt="2026-05-26T18:28:36.996" v="572"/>
-          <ac:spMkLst>
-            <pc:docMk/>
-            <pc:sldMk cId="35471701" sldId="356"/>
-            <ac:spMk id="22" creationId="{D5453D0D-FD91-4EC6-8386-04C733EA717D}"/>
-          </ac:spMkLst>
-        </pc:spChg>
-        <pc:spChg chg="mod">
-          <ac:chgData name="Theodore Mouhlas" userId="01ff3cd0-0633-42e2-959a-392a4aa13f64" providerId="ADAL" clId="{2673A91A-3439-4315-AE72-1AC445A732DB}" dt="2026-05-26T18:28:37.006" v="574"/>
-          <ac:spMkLst>
-            <pc:docMk/>
-            <pc:sldMk cId="35471701" sldId="356"/>
-            <ac:spMk id="28" creationId="{EDA0DF51-3064-4F4C-BA94-9B05094F4906}"/>
-          </ac:spMkLst>
-        </pc:spChg>
-      </pc:sldChg>
-      <pc:sldChg chg="modSp add mod">
-        <pc:chgData name="Theodore Mouhlas" userId="01ff3cd0-0633-42e2-959a-392a4aa13f64" providerId="ADAL" clId="{2673A91A-3439-4315-AE72-1AC445A732DB}" dt="2026-05-26T18:30:43.326" v="589"/>
-        <pc:sldMkLst>
-          <pc:docMk/>
-          <pc:sldMk cId="3103455598" sldId="357"/>
-        </pc:sldMkLst>
-        <pc:spChg chg="mod">
-          <ac:chgData name="Theodore Mouhlas" userId="01ff3cd0-0633-42e2-959a-392a4aa13f64" providerId="ADAL" clId="{2673A91A-3439-4315-AE72-1AC445A732DB}" dt="2026-05-26T18:30:43.318" v="583"/>
-          <ac:spMkLst>
-            <pc:docMk/>
-            <pc:sldMk cId="3103455598" sldId="357"/>
-            <ac:spMk id="3" creationId="{F9BF5EEF-1BC5-4F08-B83B-CC0EB6BDE091}"/>
-          </ac:spMkLst>
-        </pc:spChg>
-        <pc:spChg chg="mod">
-          <ac:chgData name="Theodore Mouhlas" userId="01ff3cd0-0633-42e2-959a-392a4aa13f64" providerId="ADAL" clId="{2673A91A-3439-4315-AE72-1AC445A732DB}" dt="2026-05-26T18:30:43.319" v="585"/>
-          <ac:spMkLst>
-            <pc:docMk/>
-            <pc:sldMk cId="3103455598" sldId="357"/>
-            <ac:spMk id="4" creationId="{A0792E8A-DBC7-4299-A39F-F6F13BDA249D}"/>
-          </ac:spMkLst>
-        </pc:spChg>
-        <pc:spChg chg="mod">
-          <ac:chgData name="Theodore Mouhlas" userId="01ff3cd0-0633-42e2-959a-392a4aa13f64" providerId="ADAL" clId="{2673A91A-3439-4315-AE72-1AC445A732DB}" dt="2026-05-26T18:30:43.322" v="587"/>
-          <ac:spMkLst>
-            <pc:docMk/>
-            <pc:sldMk cId="3103455598" sldId="357"/>
-            <ac:spMk id="41" creationId="{7276B5BF-65B3-4766-853A-C77059981DAA}"/>
-          </ac:spMkLst>
-        </pc:spChg>
-        <pc:spChg chg="mod">
-          <ac:chgData name="Theodore Mouhlas" userId="01ff3cd0-0633-42e2-959a-392a4aa13f64" providerId="ADAL" clId="{2673A91A-3439-4315-AE72-1AC445A732DB}" dt="2026-05-26T18:30:43.326" v="589"/>
-          <ac:spMkLst>
-            <pc:docMk/>
-            <pc:sldMk cId="3103455598" sldId="357"/>
-            <ac:spMk id="97" creationId="{02AD16D4-404B-4646-9F7B-D7CF2D86B540}"/>
-          </ac:spMkLst>
-        </pc:spChg>
-      </pc:sldChg>
-      <pc:sldChg chg="delSp modSp add mod">
-        <pc:chgData name="Theodore Mouhlas" userId="01ff3cd0-0633-42e2-959a-392a4aa13f64" providerId="ADAL" clId="{2673A91A-3439-4315-AE72-1AC445A732DB}" dt="2026-05-26T19:18:36.485" v="752" actId="478"/>
-        <pc:sldMkLst>
-          <pc:docMk/>
-          <pc:sldMk cId="4046895894" sldId="358"/>
-        </pc:sldMkLst>
-        <pc:spChg chg="mod">
-          <ac:chgData name="Theodore Mouhlas" userId="01ff3cd0-0633-42e2-959a-392a4aa13f64" providerId="ADAL" clId="{2673A91A-3439-4315-AE72-1AC445A732DB}" dt="2026-05-26T18:31:47.148" v="593"/>
-          <ac:spMkLst>
-            <pc:docMk/>
-            <pc:sldMk cId="4046895894" sldId="358"/>
-            <ac:spMk id="3" creationId="{57012220-732B-43E3-9D89-1D92F3989F04}"/>
-          </ac:spMkLst>
-        </pc:spChg>
-        <pc:spChg chg="mod">
-          <ac:chgData name="Theodore Mouhlas" userId="01ff3cd0-0633-42e2-959a-392a4aa13f64" providerId="ADAL" clId="{2673A91A-3439-4315-AE72-1AC445A732DB}" dt="2026-05-26T19:18:09.665" v="747" actId="242"/>
-          <ac:spMkLst>
-            <pc:docMk/>
-            <pc:sldMk cId="4046895894" sldId="358"/>
-            <ac:spMk id="5" creationId="{9DC6A563-95E2-4275-B593-4B4E562EAA87}"/>
-          </ac:spMkLst>
-        </pc:spChg>
-        <pc:spChg chg="mod">
-          <ac:chgData name="Theodore Mouhlas" userId="01ff3cd0-0633-42e2-959a-392a4aa13f64" providerId="ADAL" clId="{2673A91A-3439-4315-AE72-1AC445A732DB}" dt="2026-05-26T19:17:54.833" v="743" actId="1037"/>
-          <ac:spMkLst>
-            <pc:docMk/>
-            <pc:sldMk cId="4046895894" sldId="358"/>
-            <ac:spMk id="6" creationId="{63423C96-ABBB-4DF8-9645-F756697FE54F}"/>
-          </ac:spMkLst>
-        </pc:spChg>
-        <pc:spChg chg="mod">
-          <ac:chgData name="Theodore Mouhlas" userId="01ff3cd0-0633-42e2-959a-392a4aa13f64" providerId="ADAL" clId="{2673A91A-3439-4315-AE72-1AC445A732DB}" dt="2026-05-26T19:18:09.665" v="747" actId="242"/>
-          <ac:spMkLst>
-            <pc:docMk/>
-            <pc:sldMk cId="4046895894" sldId="358"/>
-            <ac:spMk id="8" creationId="{44F9E662-25AB-409D-8F35-30366F03A61A}"/>
-          </ac:spMkLst>
-        </pc:spChg>
-        <pc:spChg chg="mod">
-          <ac:chgData name="Theodore Mouhlas" userId="01ff3cd0-0633-42e2-959a-392a4aa13f64" providerId="ADAL" clId="{2673A91A-3439-4315-AE72-1AC445A732DB}" dt="2026-05-26T18:31:47.149" v="595"/>
-          <ac:spMkLst>
-            <pc:docMk/>
-            <pc:sldMk cId="4046895894" sldId="358"/>
-            <ac:spMk id="10" creationId="{6A1A2FA8-1352-46D0-A80D-00FA54656895}"/>
-          </ac:spMkLst>
-        </pc:spChg>
-        <pc:spChg chg="mod">
-          <ac:chgData name="Theodore Mouhlas" userId="01ff3cd0-0633-42e2-959a-392a4aa13f64" providerId="ADAL" clId="{2673A91A-3439-4315-AE72-1AC445A732DB}" dt="2026-05-26T19:18:25.334" v="750" actId="404"/>
-          <ac:spMkLst>
-            <pc:docMk/>
-            <pc:sldMk cId="4046895894" sldId="358"/>
-            <ac:spMk id="11" creationId="{F654F842-24AA-45FC-A2E0-2C7C9418043D}"/>
-          </ac:spMkLst>
-        </pc:spChg>
-        <pc:spChg chg="mod">
-          <ac:chgData name="Theodore Mouhlas" userId="01ff3cd0-0633-42e2-959a-392a4aa13f64" providerId="ADAL" clId="{2673A91A-3439-4315-AE72-1AC445A732DB}" dt="2026-05-26T19:18:25.334" v="750" actId="404"/>
-          <ac:spMkLst>
-            <pc:docMk/>
-            <pc:sldMk cId="4046895894" sldId="358"/>
-            <ac:spMk id="12" creationId="{C415F96A-DC72-4F1E-8342-AA266BCF7513}"/>
-          </ac:spMkLst>
-        </pc:spChg>
-        <pc:spChg chg="mod">
-          <ac:chgData name="Theodore Mouhlas" userId="01ff3cd0-0633-42e2-959a-392a4aa13f64" providerId="ADAL" clId="{2673A91A-3439-4315-AE72-1AC445A732DB}" dt="2026-05-26T19:18:25.334" v="750" actId="404"/>
-          <ac:spMkLst>
-            <pc:docMk/>
-            <pc:sldMk cId="4046895894" sldId="358"/>
-            <ac:spMk id="13" creationId="{80BFC35F-0ADB-459F-BD2C-7D96DB7F00BA}"/>
-          </ac:spMkLst>
-        </pc:spChg>
-        <pc:spChg chg="mod">
-          <ac:chgData name="Theodore Mouhlas" userId="01ff3cd0-0633-42e2-959a-392a4aa13f64" providerId="ADAL" clId="{2673A91A-3439-4315-AE72-1AC445A732DB}" dt="2026-05-26T19:18:25.334" v="750" actId="404"/>
-          <ac:spMkLst>
-            <pc:docMk/>
-            <pc:sldMk cId="4046895894" sldId="358"/>
-            <ac:spMk id="14" creationId="{BB286790-F237-4BE6-8CA6-82881F0A6486}"/>
-          </ac:spMkLst>
-        </pc:spChg>
-        <pc:spChg chg="mod">
-          <ac:chgData name="Theodore Mouhlas" userId="01ff3cd0-0633-42e2-959a-392a4aa13f64" providerId="ADAL" clId="{2673A91A-3439-4315-AE72-1AC445A732DB}" dt="2026-05-26T19:18:25.334" v="750" actId="404"/>
-          <ac:spMkLst>
-            <pc:docMk/>
-            <pc:sldMk cId="4046895894" sldId="358"/>
-            <ac:spMk id="15" creationId="{39A2E125-C6FB-45D3-BB0B-1CE8FB7DB424}"/>
-          </ac:spMkLst>
-        </pc:spChg>
-        <pc:spChg chg="mod">
-          <ac:chgData name="Theodore Mouhlas" userId="01ff3cd0-0633-42e2-959a-392a4aa13f64" providerId="ADAL" clId="{2673A91A-3439-4315-AE72-1AC445A732DB}" dt="2026-05-26T19:18:25.334" v="750" actId="404"/>
-          <ac:spMkLst>
-            <pc:docMk/>
-            <pc:sldMk cId="4046895894" sldId="358"/>
-            <ac:spMk id="16" creationId="{D096CB93-37B0-46E4-A72B-7169790EA4D0}"/>
-          </ac:spMkLst>
-        </pc:spChg>
-        <pc:spChg chg="mod">
-          <ac:chgData name="Theodore Mouhlas" userId="01ff3cd0-0633-42e2-959a-392a4aa13f64" providerId="ADAL" clId="{2673A91A-3439-4315-AE72-1AC445A732DB}" dt="2026-05-26T19:17:58.552" v="746" actId="403"/>
-          <ac:spMkLst>
-            <pc:docMk/>
-            <pc:sldMk cId="4046895894" sldId="358"/>
-            <ac:spMk id="17" creationId="{3169AE39-AF1C-457C-A742-043E723957FB}"/>
-          </ac:spMkLst>
-        </pc:spChg>
-        <pc:spChg chg="mod">
-          <ac:chgData name="Theodore Mouhlas" userId="01ff3cd0-0633-42e2-959a-392a4aa13f64" providerId="ADAL" clId="{2673A91A-3439-4315-AE72-1AC445A732DB}" dt="2026-05-26T19:17:58.552" v="746" actId="403"/>
-          <ac:spMkLst>
-            <pc:docMk/>
-            <pc:sldMk cId="4046895894" sldId="358"/>
-            <ac:spMk id="18" creationId="{D83ED040-4FE2-43CE-8666-F85CE84B4AA9}"/>
-          </ac:spMkLst>
-        </pc:spChg>
-        <pc:spChg chg="mod">
-          <ac:chgData name="Theodore Mouhlas" userId="01ff3cd0-0633-42e2-959a-392a4aa13f64" providerId="ADAL" clId="{2673A91A-3439-4315-AE72-1AC445A732DB}" dt="2026-05-26T19:18:25.334" v="750" actId="404"/>
-          <ac:spMkLst>
-            <pc:docMk/>
-            <pc:sldMk cId="4046895894" sldId="358"/>
-            <ac:spMk id="19" creationId="{BF03DF21-AB3F-44F6-8E5E-6358D8C5E58A}"/>
-          </ac:spMkLst>
-        </pc:spChg>
-        <pc:spChg chg="mod">
-          <ac:chgData name="Theodore Mouhlas" userId="01ff3cd0-0633-42e2-959a-392a4aa13f64" providerId="ADAL" clId="{2673A91A-3439-4315-AE72-1AC445A732DB}" dt="2026-05-26T19:18:25.334" v="750" actId="404"/>
-          <ac:spMkLst>
-            <pc:docMk/>
-            <pc:sldMk cId="4046895894" sldId="358"/>
-            <ac:spMk id="20" creationId="{1EFF7D8D-C2E7-4CED-8B99-EDE8A2F60354}"/>
-          </ac:spMkLst>
-        </pc:spChg>
-        <pc:spChg chg="mod">
-          <ac:chgData name="Theodore Mouhlas" userId="01ff3cd0-0633-42e2-959a-392a4aa13f64" providerId="ADAL" clId="{2673A91A-3439-4315-AE72-1AC445A732DB}" dt="2026-05-26T19:17:58.552" v="746" actId="403"/>
-          <ac:spMkLst>
-            <pc:docMk/>
-            <pc:sldMk cId="4046895894" sldId="358"/>
-            <ac:spMk id="21" creationId="{8798F9CD-ED54-42B5-BB54-53D783C5379F}"/>
-          </ac:spMkLst>
-        </pc:spChg>
-        <pc:spChg chg="mod">
-          <ac:chgData name="Theodore Mouhlas" userId="01ff3cd0-0633-42e2-959a-392a4aa13f64" providerId="ADAL" clId="{2673A91A-3439-4315-AE72-1AC445A732DB}" dt="2026-05-26T19:17:58.552" v="746" actId="403"/>
-          <ac:spMkLst>
-            <pc:docMk/>
-            <pc:sldMk cId="4046895894" sldId="358"/>
-            <ac:spMk id="22" creationId="{6DADE060-153C-4BE9-A6D6-5C9A91D2AFC1}"/>
-          </ac:spMkLst>
-        </pc:spChg>
-        <pc:spChg chg="mod">
-          <ac:chgData name="Theodore Mouhlas" userId="01ff3cd0-0633-42e2-959a-392a4aa13f64" providerId="ADAL" clId="{2673A91A-3439-4315-AE72-1AC445A732DB}" dt="2026-05-26T19:18:25.334" v="750" actId="404"/>
-          <ac:spMkLst>
-            <pc:docMk/>
-            <pc:sldMk cId="4046895894" sldId="358"/>
-            <ac:spMk id="23" creationId="{A2468890-314E-46C2-9A33-1195D448FD75}"/>
-          </ac:spMkLst>
-        </pc:spChg>
-        <pc:spChg chg="mod">
-          <ac:chgData name="Theodore Mouhlas" userId="01ff3cd0-0633-42e2-959a-392a4aa13f64" providerId="ADAL" clId="{2673A91A-3439-4315-AE72-1AC445A732DB}" dt="2026-05-26T18:31:47.165" v="618"/>
-          <ac:spMkLst>
-            <pc:docMk/>
-            <pc:sldMk cId="4046895894" sldId="358"/>
-            <ac:spMk id="25" creationId="{A60FFE5E-F62A-4129-BE28-18F5D8998CB2}"/>
-          </ac:spMkLst>
-        </pc:spChg>
-        <pc:spChg chg="mod">
-          <ac:chgData name="Theodore Mouhlas" userId="01ff3cd0-0633-42e2-959a-392a4aa13f64" providerId="ADAL" clId="{2673A91A-3439-4315-AE72-1AC445A732DB}" dt="2026-05-26T19:17:58.552" v="746" actId="403"/>
-          <ac:spMkLst>
-            <pc:docMk/>
-            <pc:sldMk cId="4046895894" sldId="358"/>
-            <ac:spMk id="26" creationId="{36766CDC-1A08-4FC7-870D-7855A3B9A04D}"/>
-          </ac:spMkLst>
-        </pc:spChg>
-        <pc:spChg chg="mod">
-          <ac:chgData name="Theodore Mouhlas" userId="01ff3cd0-0633-42e2-959a-392a4aa13f64" providerId="ADAL" clId="{2673A91A-3439-4315-AE72-1AC445A732DB}" dt="2026-05-26T19:17:58.552" v="746" actId="403"/>
-          <ac:spMkLst>
-            <pc:docMk/>
-            <pc:sldMk cId="4046895894" sldId="358"/>
-            <ac:spMk id="27" creationId="{B087DE68-400C-4673-A5AD-E8AFED35A8CD}"/>
-          </ac:spMkLst>
-        </pc:spChg>
-        <pc:spChg chg="mod">
-          <ac:chgData name="Theodore Mouhlas" userId="01ff3cd0-0633-42e2-959a-392a4aa13f64" providerId="ADAL" clId="{2673A91A-3439-4315-AE72-1AC445A732DB}" dt="2026-05-26T19:18:25.334" v="750" actId="404"/>
-          <ac:spMkLst>
-            <pc:docMk/>
-            <pc:sldMk cId="4046895894" sldId="358"/>
-            <ac:spMk id="28" creationId="{47F92A00-2DA8-4E28-8A87-071EC0E01253}"/>
-          </ac:spMkLst>
-        </pc:spChg>
-        <pc:spChg chg="del">
-          <ac:chgData name="Theodore Mouhlas" userId="01ff3cd0-0633-42e2-959a-392a4aa13f64" providerId="ADAL" clId="{2673A91A-3439-4315-AE72-1AC445A732DB}" dt="2026-05-26T19:18:32.758" v="751" actId="478"/>
-          <ac:spMkLst>
-            <pc:docMk/>
-            <pc:sldMk cId="4046895894" sldId="358"/>
-            <ac:spMk id="29" creationId="{A7F4E5D4-09D8-49F5-994D-37AEF8A17E4B}"/>
-          </ac:spMkLst>
-        </pc:spChg>
-        <pc:spChg chg="del">
-          <ac:chgData name="Theodore Mouhlas" userId="01ff3cd0-0633-42e2-959a-392a4aa13f64" providerId="ADAL" clId="{2673A91A-3439-4315-AE72-1AC445A732DB}" dt="2026-05-26T19:18:36.485" v="752" actId="478"/>
-          <ac:spMkLst>
-            <pc:docMk/>
-            <pc:sldMk cId="4046895894" sldId="358"/>
-            <ac:spMk id="30" creationId="{D3D26D02-DCBC-474F-8712-3D5687080954}"/>
-          </ac:spMkLst>
-        </pc:spChg>
-        <pc:spChg chg="del">
-          <ac:chgData name="Theodore Mouhlas" userId="01ff3cd0-0633-42e2-959a-392a4aa13f64" providerId="ADAL" clId="{2673A91A-3439-4315-AE72-1AC445A732DB}" dt="2026-05-26T19:18:36.485" v="752" actId="478"/>
-          <ac:spMkLst>
-            <pc:docMk/>
-            <pc:sldMk cId="4046895894" sldId="358"/>
-            <ac:spMk id="31" creationId="{294C2D47-CD88-4DA3-931A-C17F8E280C20}"/>
-          </ac:spMkLst>
-        </pc:spChg>
-        <pc:spChg chg="del">
-          <ac:chgData name="Theodore Mouhlas" userId="01ff3cd0-0633-42e2-959a-392a4aa13f64" providerId="ADAL" clId="{2673A91A-3439-4315-AE72-1AC445A732DB}" dt="2026-05-26T19:18:36.485" v="752" actId="478"/>
-          <ac:spMkLst>
-            <pc:docMk/>
-            <pc:sldMk cId="4046895894" sldId="358"/>
-            <ac:spMk id="32" creationId="{24AE35C9-C6C4-46F3-87AD-B07FD12B3C49}"/>
-          </ac:spMkLst>
-        </pc:spChg>
-        <pc:spChg chg="del">
-          <ac:chgData name="Theodore Mouhlas" userId="01ff3cd0-0633-42e2-959a-392a4aa13f64" providerId="ADAL" clId="{2673A91A-3439-4315-AE72-1AC445A732DB}" dt="2026-05-26T19:18:36.485" v="752" actId="478"/>
-          <ac:spMkLst>
-            <pc:docMk/>
-            <pc:sldMk cId="4046895894" sldId="358"/>
-            <ac:spMk id="33" creationId="{82E63DCF-9264-4A8F-98CC-0C0B2D9977DB}"/>
-          </ac:spMkLst>
-        </pc:spChg>
-      </pc:sldChg>
-      <pc:sldChg chg="add del">
-        <pc:chgData name="Theodore Mouhlas" userId="01ff3cd0-0633-42e2-959a-392a4aa13f64" providerId="ADAL" clId="{2673A91A-3439-4315-AE72-1AC445A732DB}" dt="2026-05-26T18:35:44.593" v="687"/>
-        <pc:sldMkLst>
-          <pc:docMk/>
-          <pc:sldMk cId="3564992012" sldId="359"/>
-        </pc:sldMkLst>
-      </pc:sldChg>
-      <pc:sldChg chg="delSp add mod">
-        <pc:chgData name="Theodore Mouhlas" userId="01ff3cd0-0633-42e2-959a-392a4aa13f64" providerId="ADAL" clId="{2673A91A-3439-4315-AE72-1AC445A732DB}" dt="2026-05-26T18:36:40.330" v="694" actId="478"/>
-        <pc:sldMkLst>
-          <pc:docMk/>
-          <pc:sldMk cId="3805499028" sldId="360"/>
-        </pc:sldMkLst>
-        <pc:spChg chg="del">
-          <ac:chgData name="Theodore Mouhlas" userId="01ff3cd0-0633-42e2-959a-392a4aa13f64" providerId="ADAL" clId="{2673A91A-3439-4315-AE72-1AC445A732DB}" dt="2026-05-26T18:36:37.770" v="691" actId="478"/>
-          <ac:spMkLst>
-            <pc:docMk/>
-            <pc:sldMk cId="3805499028" sldId="360"/>
-            <ac:spMk id="250" creationId="{00000000-0000-0000-0000-000000000000}"/>
-          </ac:spMkLst>
-        </pc:spChg>
-        <pc:spChg chg="del">
-          <ac:chgData name="Theodore Mouhlas" userId="01ff3cd0-0633-42e2-959a-392a4aa13f64" providerId="ADAL" clId="{2673A91A-3439-4315-AE72-1AC445A732DB}" dt="2026-05-26T18:36:39.362" v="693" actId="478"/>
-          <ac:spMkLst>
-            <pc:docMk/>
-            <pc:sldMk cId="3805499028" sldId="360"/>
-            <ac:spMk id="251" creationId="{00000000-0000-0000-0000-000000000000}"/>
-          </ac:spMkLst>
-        </pc:spChg>
-        <pc:spChg chg="del">
-          <ac:chgData name="Theodore Mouhlas" userId="01ff3cd0-0633-42e2-959a-392a4aa13f64" providerId="ADAL" clId="{2673A91A-3439-4315-AE72-1AC445A732DB}" dt="2026-05-26T18:36:31.834" v="690" actId="478"/>
-          <ac:spMkLst>
-            <pc:docMk/>
-            <pc:sldMk cId="3805499028" sldId="360"/>
-            <ac:spMk id="252" creationId="{00000000-0000-0000-0000-000000000000}"/>
-          </ac:spMkLst>
-        </pc:spChg>
-        <pc:spChg chg="del">
-          <ac:chgData name="Theodore Mouhlas" userId="01ff3cd0-0633-42e2-959a-392a4aa13f64" providerId="ADAL" clId="{2673A91A-3439-4315-AE72-1AC445A732DB}" dt="2026-05-26T18:36:40.330" v="694" actId="478"/>
-          <ac:spMkLst>
-            <pc:docMk/>
-            <pc:sldMk cId="3805499028" sldId="360"/>
-            <ac:spMk id="253" creationId="{00000000-0000-0000-0000-000000000000}"/>
-          </ac:spMkLst>
-        </pc:spChg>
-        <pc:spChg chg="del">
-          <ac:chgData name="Theodore Mouhlas" userId="01ff3cd0-0633-42e2-959a-392a4aa13f64" providerId="ADAL" clId="{2673A91A-3439-4315-AE72-1AC445A732DB}" dt="2026-05-26T18:36:31.834" v="690" actId="478"/>
-          <ac:spMkLst>
-            <pc:docMk/>
-            <pc:sldMk cId="3805499028" sldId="360"/>
-            <ac:spMk id="254" creationId="{00000000-0000-0000-0000-000000000000}"/>
-          </ac:spMkLst>
-        </pc:spChg>
-        <pc:spChg chg="del">
-          <ac:chgData name="Theodore Mouhlas" userId="01ff3cd0-0633-42e2-959a-392a4aa13f64" providerId="ADAL" clId="{2673A91A-3439-4315-AE72-1AC445A732DB}" dt="2026-05-26T18:36:31.834" v="690" actId="478"/>
-          <ac:spMkLst>
-            <pc:docMk/>
-            <pc:sldMk cId="3805499028" sldId="360"/>
-            <ac:spMk id="255" creationId="{00000000-0000-0000-0000-000000000000}"/>
-          </ac:spMkLst>
-        </pc:spChg>
-        <pc:spChg chg="del">
-          <ac:chgData name="Theodore Mouhlas" userId="01ff3cd0-0633-42e2-959a-392a4aa13f64" providerId="ADAL" clId="{2673A91A-3439-4315-AE72-1AC445A732DB}" dt="2026-05-26T18:36:31.834" v="690" actId="478"/>
-          <ac:spMkLst>
-            <pc:docMk/>
-            <pc:sldMk cId="3805499028" sldId="360"/>
-            <ac:spMk id="256" creationId="{00000000-0000-0000-0000-000000000000}"/>
-          </ac:spMkLst>
-        </pc:spChg>
-        <pc:picChg chg="del">
-          <ac:chgData name="Theodore Mouhlas" userId="01ff3cd0-0633-42e2-959a-392a4aa13f64" providerId="ADAL" clId="{2673A91A-3439-4315-AE72-1AC445A732DB}" dt="2026-05-26T18:36:38.266" v="692" actId="478"/>
-          <ac:picMkLst>
-            <pc:docMk/>
-            <pc:sldMk cId="3805499028" sldId="360"/>
-            <ac:picMk id="22" creationId="{26B9ABA1-1102-6CD6-6B46-0899BBC3E797}"/>
-          </ac:picMkLst>
-        </pc:picChg>
-      </pc:sldChg>
-      <pc:sldChg chg="modSp add mod">
-        <pc:chgData name="Theodore Mouhlas" userId="01ff3cd0-0633-42e2-959a-392a4aa13f64" providerId="ADAL" clId="{2673A91A-3439-4315-AE72-1AC445A732DB}" dt="2026-05-26T18:50:24.252" v="709"/>
-        <pc:sldMkLst>
-          <pc:docMk/>
-          <pc:sldMk cId="2934175048" sldId="361"/>
-        </pc:sldMkLst>
-        <pc:spChg chg="mod">
-          <ac:chgData name="Theodore Mouhlas" userId="01ff3cd0-0633-42e2-959a-392a4aa13f64" providerId="ADAL" clId="{2673A91A-3439-4315-AE72-1AC445A732DB}" dt="2026-05-26T18:50:24.252" v="709"/>
-          <ac:spMkLst>
-            <pc:docMk/>
-            <pc:sldMk cId="2934175048" sldId="361"/>
-            <ac:spMk id="6" creationId="{760721BA-A094-443D-91FD-F5700A36D5F8}"/>
-          </ac:spMkLst>
-        </pc:spChg>
-      </pc:sldChg>
-      <pc:sldChg chg="modSp add mod">
-        <pc:chgData name="Theodore Mouhlas" userId="01ff3cd0-0633-42e2-959a-392a4aa13f64" providerId="ADAL" clId="{2673A91A-3439-4315-AE72-1AC445A732DB}" dt="2026-05-26T19:16:14.066" v="734" actId="403"/>
-        <pc:sldMkLst>
-          <pc:docMk/>
-          <pc:sldMk cId="3986147515" sldId="362"/>
-        </pc:sldMkLst>
-        <pc:spChg chg="mod">
-          <ac:chgData name="Theodore Mouhlas" userId="01ff3cd0-0633-42e2-959a-392a4aa13f64" providerId="ADAL" clId="{2673A91A-3439-4315-AE72-1AC445A732DB}" dt="2026-05-26T18:51:12.253" v="712"/>
-          <ac:spMkLst>
-            <pc:docMk/>
-            <pc:sldMk cId="3986147515" sldId="362"/>
-            <ac:spMk id="6" creationId="{8F94CC48-7D26-4495-87F8-D227CD1CC027}"/>
-          </ac:spMkLst>
-        </pc:spChg>
-        <pc:spChg chg="mod">
-          <ac:chgData name="Theodore Mouhlas" userId="01ff3cd0-0633-42e2-959a-392a4aa13f64" providerId="ADAL" clId="{2673A91A-3439-4315-AE72-1AC445A732DB}" dt="2026-05-26T19:16:14.066" v="734" actId="403"/>
-          <ac:spMkLst>
-            <pc:docMk/>
-            <pc:sldMk cId="3986147515" sldId="362"/>
-            <ac:spMk id="9" creationId="{ED99D64B-5472-4A4E-AD62-9B1026C3C2D5}"/>
-          </ac:spMkLst>
-        </pc:spChg>
-        <pc:spChg chg="mod">
-          <ac:chgData name="Theodore Mouhlas" userId="01ff3cd0-0633-42e2-959a-392a4aa13f64" providerId="ADAL" clId="{2673A91A-3439-4315-AE72-1AC445A732DB}" dt="2026-05-26T18:51:12.259" v="715"/>
-          <ac:spMkLst>
-            <pc:docMk/>
-            <pc:sldMk cId="3986147515" sldId="362"/>
-            <ac:spMk id="12" creationId="{AB720C41-9174-4B7F-815B-8463D676C161}"/>
-          </ac:spMkLst>
-        </pc:spChg>
-        <pc:spChg chg="mod">
-          <ac:chgData name="Theodore Mouhlas" userId="01ff3cd0-0633-42e2-959a-392a4aa13f64" providerId="ADAL" clId="{2673A91A-3439-4315-AE72-1AC445A732DB}" dt="2026-05-26T18:51:12.259" v="716"/>
-          <ac:spMkLst>
-            <pc:docMk/>
-            <pc:sldMk cId="3986147515" sldId="362"/>
-            <ac:spMk id="15" creationId="{C9D34985-E018-4E5E-A5E2-E14AB9C5DF59}"/>
-          </ac:spMkLst>
-        </pc:spChg>
-        <pc:spChg chg="mod">
-          <ac:chgData name="Theodore Mouhlas" userId="01ff3cd0-0633-42e2-959a-392a4aa13f64" providerId="ADAL" clId="{2673A91A-3439-4315-AE72-1AC445A732DB}" dt="2026-05-26T18:51:12.261" v="717"/>
-          <ac:spMkLst>
-            <pc:docMk/>
-            <pc:sldMk cId="3986147515" sldId="362"/>
-            <ac:spMk id="18" creationId="{607108FC-8E95-42F3-9B82-8A9B418C5D9E}"/>
-          </ac:spMkLst>
-        </pc:spChg>
-        <pc:spChg chg="mod">
-          <ac:chgData name="Theodore Mouhlas" userId="01ff3cd0-0633-42e2-959a-392a4aa13f64" providerId="ADAL" clId="{2673A91A-3439-4315-AE72-1AC445A732DB}" dt="2026-05-26T18:51:12.262" v="718"/>
-          <ac:spMkLst>
-            <pc:docMk/>
-            <pc:sldMk cId="3986147515" sldId="362"/>
-            <ac:spMk id="21" creationId="{4D12C0E4-BCB6-4848-8023-99D8B77A3DEF}"/>
-          </ac:spMkLst>
-        </pc:spChg>
-        <pc:spChg chg="mod">
-          <ac:chgData name="Theodore Mouhlas" userId="01ff3cd0-0633-42e2-959a-392a4aa13f64" providerId="ADAL" clId="{2673A91A-3439-4315-AE72-1AC445A732DB}" dt="2026-05-26T18:51:12.265" v="719"/>
-          <ac:spMkLst>
-            <pc:docMk/>
-            <pc:sldMk cId="3986147515" sldId="362"/>
-            <ac:spMk id="24" creationId="{E4B94D33-FB01-4F3B-9C03-1FF7A3DF0BB3}"/>
-          </ac:spMkLst>
-        </pc:spChg>
-      </pc:sldChg>
-      <pc:sldChg chg="modSp add del mod">
-        <pc:chgData name="Theodore Mouhlas" userId="01ff3cd0-0633-42e2-959a-392a4aa13f64" providerId="ADAL" clId="{2673A91A-3439-4315-AE72-1AC445A732DB}" dt="2026-05-26T18:51:53.745" v="727"/>
-        <pc:sldMkLst>
-          <pc:docMk/>
-          <pc:sldMk cId="4169193157" sldId="363"/>
-        </pc:sldMkLst>
-        <pc:spChg chg="mod">
-          <ac:chgData name="Theodore Mouhlas" userId="01ff3cd0-0633-42e2-959a-392a4aa13f64" providerId="ADAL" clId="{2673A91A-3439-4315-AE72-1AC445A732DB}" dt="2026-05-26T18:51:42.393" v="722"/>
-          <ac:spMkLst>
-            <pc:docMk/>
-            <pc:sldMk cId="4169193157" sldId="363"/>
-            <ac:spMk id="6" creationId="{B382F5E8-27A9-48B5-A65B-AA4071C6BAC4}"/>
-          </ac:spMkLst>
-        </pc:spChg>
-        <pc:spChg chg="mod">
-          <ac:chgData name="Theodore Mouhlas" userId="01ff3cd0-0633-42e2-959a-392a4aa13f64" providerId="ADAL" clId="{2673A91A-3439-4315-AE72-1AC445A732DB}" dt="2026-05-26T18:51:42.396" v="723"/>
-          <ac:spMkLst>
-            <pc:docMk/>
-            <pc:sldMk cId="4169193157" sldId="363"/>
-            <ac:spMk id="10" creationId="{A6B44853-A1B8-42CD-9563-9FE02ED15D26}"/>
-          </ac:spMkLst>
-        </pc:spChg>
-        <pc:spChg chg="mod">
-          <ac:chgData name="Theodore Mouhlas" userId="01ff3cd0-0633-42e2-959a-392a4aa13f64" providerId="ADAL" clId="{2673A91A-3439-4315-AE72-1AC445A732DB}" dt="2026-05-26T18:51:42.400" v="724"/>
-          <ac:spMkLst>
-            <pc:docMk/>
-            <pc:sldMk cId="4169193157" sldId="363"/>
-            <ac:spMk id="11" creationId="{66C35ADF-45AC-4E88-AE9C-2D129B854376}"/>
-          </ac:spMkLst>
-        </pc:spChg>
-        <pc:spChg chg="mod">
-          <ac:chgData name="Theodore Mouhlas" userId="01ff3cd0-0633-42e2-959a-392a4aa13f64" providerId="ADAL" clId="{2673A91A-3439-4315-AE72-1AC445A732DB}" dt="2026-05-26T18:51:42.401" v="725"/>
-          <ac:spMkLst>
-            <pc:docMk/>
-            <pc:sldMk cId="4169193157" sldId="363"/>
-            <ac:spMk id="12" creationId="{5879753C-12EB-410C-B983-92FA54D2AC26}"/>
-          </ac:spMkLst>
-        </pc:spChg>
-      </pc:sldChg>
-      <pc:sldChg chg="modSp add mod">
-        <pc:chgData name="Theodore Mouhlas" userId="01ff3cd0-0633-42e2-959a-392a4aa13f64" providerId="ADAL" clId="{2673A91A-3439-4315-AE72-1AC445A732DB}" dt="2026-05-26T18:51:53.791" v="729"/>
-        <pc:sldMkLst>
-          <pc:docMk/>
-          <pc:sldMk cId="2000374355" sldId="364"/>
-        </pc:sldMkLst>
-        <pc:spChg chg="mod">
-          <ac:chgData name="Theodore Mouhlas" userId="01ff3cd0-0633-42e2-959a-392a4aa13f64" providerId="ADAL" clId="{2673A91A-3439-4315-AE72-1AC445A732DB}" dt="2026-05-26T18:51:53.791" v="729"/>
-          <ac:spMkLst>
-            <pc:docMk/>
-            <pc:sldMk cId="2000374355" sldId="364"/>
-            <ac:spMk id="10" creationId="{A6B44853-A1B8-42CD-9563-9FE02ED15D26}"/>
-          </ac:spMkLst>
-        </pc:spChg>
-      </pc:sldChg>
-      <pc:sldChg chg="modSp add mod">
-        <pc:chgData name="Theodore Mouhlas" userId="01ff3cd0-0633-42e2-959a-392a4aa13f64" providerId="ADAL" clId="{2673A91A-3439-4315-AE72-1AC445A732DB}" dt="2026-05-26T18:52:13.082" v="732"/>
-        <pc:sldMkLst>
-          <pc:docMk/>
-          <pc:sldMk cId="3578650649" sldId="365"/>
-        </pc:sldMkLst>
-        <pc:spChg chg="mod">
-          <ac:chgData name="Theodore Mouhlas" userId="01ff3cd0-0633-42e2-959a-392a4aa13f64" providerId="ADAL" clId="{2673A91A-3439-4315-AE72-1AC445A732DB}" dt="2026-05-26T18:52:13.082" v="732"/>
-          <ac:spMkLst>
-            <pc:docMk/>
-            <pc:sldMk cId="3578650649" sldId="365"/>
-            <ac:spMk id="6" creationId="{BCE14C67-D0E1-4A38-A795-4C31BE33907F}"/>
+            <pc:sldMk cId="3278326019" sldId="261"/>
+            <ac:spMk id="12" creationId="{D0173BD7-74B5-5E8D-0A2D-A11B45F6EE8E}"/>
           </ac:spMkLst>
         </pc:spChg>
       </pc:sldChg>
     </pc:docChg>
   </pc:docChgLst>
   <pc:docChgLst>
-    <pc:chgData name="Henry Chakardjian" userId="20f15cf7-4c9e-4834-aa5b-7e06544057cf" providerId="ADAL" clId="{A15EA703-ACC8-44C1-99E1-D112E40BA85E}"/>
-    <pc:docChg chg="modSld">
-      <pc:chgData name="Henry Chakardjian" userId="20f15cf7-4c9e-4834-aa5b-7e06544057cf" providerId="ADAL" clId="{A15EA703-ACC8-44C1-99E1-D112E40BA85E}" dt="2026-05-21T18:41:35.133" v="0" actId="947"/>
+    <pc:chgData name="Theodore Mouhlas" userId="01ff3cd0-0633-42e2-959a-392a4aa13f64" providerId="ADAL" clId="{2673A91A-3439-4315-AE72-1AC445A732DB}"/>
+    <pc:docChg chg="custSel delSld modSld">
+      <pc:chgData name="Theodore Mouhlas" userId="01ff3cd0-0633-42e2-959a-392a4aa13f64" providerId="ADAL" clId="{2673A91A-3439-4315-AE72-1AC445A732DB}" dt="2026-04-22T22:06:23.295" v="25" actId="2696"/>
       <pc:docMkLst>
         <pc:docMk/>
       </pc:docMkLst>
-      <pc:sldChg chg="modSp mod">
-        <pc:chgData name="Henry Chakardjian" userId="20f15cf7-4c9e-4834-aa5b-7e06544057cf" providerId="ADAL" clId="{A15EA703-ACC8-44C1-99E1-D112E40BA85E}" dt="2026-05-21T18:41:35.133" v="0" actId="947"/>
+      <pc:sldChg chg="delSp modSp mod">
+        <pc:chgData name="Theodore Mouhlas" userId="01ff3cd0-0633-42e2-959a-392a4aa13f64" providerId="ADAL" clId="{2673A91A-3439-4315-AE72-1AC445A732DB}" dt="2026-04-22T22:06:08.066" v="24" actId="1035"/>
         <pc:sldMkLst>
           <pc:docMk/>
-          <pc:sldMk cId="623374232" sldId="312"/>
+          <pc:sldMk cId="775383213" sldId="258"/>
         </pc:sldMkLst>
-        <pc:graphicFrameChg chg="modGraphic">
-          <ac:chgData name="Henry Chakardjian" userId="20f15cf7-4c9e-4834-aa5b-7e06544057cf" providerId="ADAL" clId="{A15EA703-ACC8-44C1-99E1-D112E40BA85E}" dt="2026-05-21T18:41:35.133" v="0" actId="947"/>
-          <ac:graphicFrameMkLst>
+        <pc:picChg chg="del">
+          <ac:chgData name="Theodore Mouhlas" userId="01ff3cd0-0633-42e2-959a-392a4aa13f64" providerId="ADAL" clId="{2673A91A-3439-4315-AE72-1AC445A732DB}" dt="2026-04-22T22:05:57.107" v="1" actId="478"/>
+          <ac:picMkLst>
             <pc:docMk/>
-            <pc:sldMk cId="623374232" sldId="312"/>
-            <ac:graphicFrameMk id="6" creationId="{54BB4DCD-F71E-48D1-9FC2-FA458CDE7CB4}"/>
-          </ac:graphicFrameMkLst>
-        </pc:graphicFrameChg>
+            <pc:sldMk cId="775383213" sldId="258"/>
+            <ac:picMk id="11" creationId="{9A9A37EC-836B-4D9A-0639-AFAAA06FCCBD}"/>
+          </ac:picMkLst>
+        </pc:picChg>
+        <pc:picChg chg="mod">
+          <ac:chgData name="Theodore Mouhlas" userId="01ff3cd0-0633-42e2-959a-392a4aa13f64" providerId="ADAL" clId="{2673A91A-3439-4315-AE72-1AC445A732DB}" dt="2026-04-22T22:06:08.066" v="24" actId="1035"/>
+          <ac:picMkLst>
+            <pc:docMk/>
+            <pc:sldMk cId="775383213" sldId="258"/>
+            <ac:picMk id="14" creationId="{EBB9CF9D-173F-DE4D-C1BD-D91FF735FD19}"/>
+          </ac:picMkLst>
+        </pc:picChg>
+      </pc:sldChg>
+      <pc:sldChg chg="modSp mod">
+        <pc:chgData name="Theodore Mouhlas" userId="01ff3cd0-0633-42e2-959a-392a4aa13f64" providerId="ADAL" clId="{2673A91A-3439-4315-AE72-1AC445A732DB}" dt="2026-04-22T22:05:29.915" v="0" actId="20577"/>
+        <pc:sldMkLst>
+          <pc:docMk/>
+          <pc:sldMk cId="3278326019" sldId="261"/>
+        </pc:sldMkLst>
+        <pc:spChg chg="mod">
+          <ac:chgData name="Theodore Mouhlas" userId="01ff3cd0-0633-42e2-959a-392a4aa13f64" providerId="ADAL" clId="{2673A91A-3439-4315-AE72-1AC445A732DB}" dt="2026-04-22T22:05:29.915" v="0" actId="20577"/>
+          <ac:spMkLst>
+            <pc:docMk/>
+            <pc:sldMk cId="3278326019" sldId="261"/>
+            <ac:spMk id="12" creationId="{D0173BD7-74B5-5E8D-0A2D-A11B45F6EE8E}"/>
+          </ac:spMkLst>
+        </pc:spChg>
+      </pc:sldChg>
+      <pc:sldChg chg="del">
+        <pc:chgData name="Theodore Mouhlas" userId="01ff3cd0-0633-42e2-959a-392a4aa13f64" providerId="ADAL" clId="{2673A91A-3439-4315-AE72-1AC445A732DB}" dt="2026-04-22T22:06:23.295" v="25" actId="2696"/>
+        <pc:sldMkLst>
+          <pc:docMk/>
+          <pc:sldMk cId="3523174100" sldId="309"/>
+        </pc:sldMkLst>
       </pc:sldChg>
     </pc:docChg>
   </pc:docChgLst>
 </pc:chgInfo>
+</file>
+
+<file path=ppt/handoutMasters/handoutMaster1.xml><?xml version="1.0" encoding="utf-8"?>
+<p:handoutMaster xmlns:a="http://schemas.openxmlformats.org/drawingml/2006/main" xmlns:r="http://schemas.openxmlformats.org/officeDocument/2006/relationships" xmlns:p="http://schemas.openxmlformats.org/presentationml/2006/main">
+  <p:cSld>
+    <p:bg>
+      <p:bgRef idx="1001">
+        <a:schemeClr val="bg1"/>
+      </p:bgRef>
+    </p:bg>
+    <p:spTree>
+      <p:nvGrpSpPr>
+        <p:cNvPr id="1" name=""/>
+        <p:cNvGrpSpPr/>
+        <p:nvPr/>
+      </p:nvGrpSpPr>
+      <p:grpSpPr>
+        <a:xfrm>
+          <a:off x="0" y="0"/>
+          <a:ext cx="0" cy="0"/>
+          <a:chOff x="0" y="0"/>
+          <a:chExt cx="0" cy="0"/>
+        </a:xfrm>
+      </p:grpSpPr>
+      <p:sp>
+        <p:nvSpPr>
+          <p:cNvPr id="2" name="Header Placeholder 1">
+            <a:extLst>
+              <a:ext uri="{FF2B5EF4-FFF2-40B4-BE49-F238E27FC236}">
+                <a16:creationId xmlns:a16="http://schemas.microsoft.com/office/drawing/2014/main" id="{F2DF5942-D746-A330-C15A-717919133463}"/>
+              </a:ext>
+            </a:extLst>
+          </p:cNvPr>
+          <p:cNvSpPr>
+            <a:spLocks noGrp="1"/>
+          </p:cNvSpPr>
+          <p:nvPr>
+            <p:ph type="hdr" sz="quarter"/>
+          </p:nvPr>
+        </p:nvSpPr>
+        <p:spPr>
+          <a:xfrm>
+            <a:off x="0" y="0"/>
+            <a:ext cx="3011488" cy="463550"/>
+          </a:xfrm>
+          <a:prstGeom prst="rect">
+            <a:avLst/>
+          </a:prstGeom>
+        </p:spPr>
+        <p:txBody>
+          <a:bodyPr vert="horz" lIns="91432" tIns="45716" rIns="91432" bIns="45716" rtlCol="0"/>
+          <a:lstStyle>
+            <a:lvl1pPr algn="l">
+              <a:defRPr sz="1200"/>
+            </a:lvl1pPr>
+          </a:lstStyle>
+          <a:p>
+            <a:endParaRPr lang="en-US"/>
+          </a:p>
+        </p:txBody>
+      </p:sp>
+      <p:sp>
+        <p:nvSpPr>
+          <p:cNvPr id="3" name="Date Placeholder 2">
+            <a:extLst>
+              <a:ext uri="{FF2B5EF4-FFF2-40B4-BE49-F238E27FC236}">
+                <a16:creationId xmlns:a16="http://schemas.microsoft.com/office/drawing/2014/main" id="{8041B20E-6589-F5E2-6B56-E50F50392D2B}"/>
+              </a:ext>
+            </a:extLst>
+          </p:cNvPr>
+          <p:cNvSpPr>
+            <a:spLocks noGrp="1"/>
+          </p:cNvSpPr>
+          <p:nvPr>
+            <p:ph type="dt" sz="quarter" idx="1"/>
+          </p:nvPr>
+        </p:nvSpPr>
+        <p:spPr>
+          <a:xfrm>
+            <a:off x="3937000" y="0"/>
+            <a:ext cx="3011488" cy="463550"/>
+          </a:xfrm>
+          <a:prstGeom prst="rect">
+            <a:avLst/>
+          </a:prstGeom>
+        </p:spPr>
+        <p:txBody>
+          <a:bodyPr vert="horz" lIns="91432" tIns="45716" rIns="91432" bIns="45716" rtlCol="0"/>
+          <a:lstStyle>
+            <a:lvl1pPr algn="r">
+              <a:defRPr sz="1200"/>
+            </a:lvl1pPr>
+          </a:lstStyle>
+          <a:p>
+            <a:fld id="{DEE9EA20-DEEE-4080-865A-F07DEA378638}" type="datetimeFigureOut">
+              <a:rPr lang="en-US" smtClean="0"/>
+              <a:t>4/22/2026</a:t>
+            </a:fld>
+            <a:endParaRPr lang="en-US"/>
+          </a:p>
+        </p:txBody>
+      </p:sp>
+      <p:sp>
+        <p:nvSpPr>
+          <p:cNvPr id="4" name="Footer Placeholder 3">
+            <a:extLst>
+              <a:ext uri="{FF2B5EF4-FFF2-40B4-BE49-F238E27FC236}">
+                <a16:creationId xmlns:a16="http://schemas.microsoft.com/office/drawing/2014/main" id="{EFB1710D-CBEA-6968-B09E-0C1B6F0657B3}"/>
+              </a:ext>
+            </a:extLst>
+          </p:cNvPr>
+          <p:cNvSpPr>
+            <a:spLocks noGrp="1"/>
+          </p:cNvSpPr>
+          <p:nvPr>
+            <p:ph type="ftr" sz="quarter" idx="2"/>
+          </p:nvPr>
+        </p:nvSpPr>
+        <p:spPr>
+          <a:xfrm>
+            <a:off x="0" y="8772527"/>
+            <a:ext cx="3011488" cy="463550"/>
+          </a:xfrm>
+          <a:prstGeom prst="rect">
+            <a:avLst/>
+          </a:prstGeom>
+        </p:spPr>
+        <p:txBody>
+          <a:bodyPr vert="horz" lIns="91432" tIns="45716" rIns="91432" bIns="45716" rtlCol="0" anchor="b"/>
+          <a:lstStyle>
+            <a:lvl1pPr algn="l">
+              <a:defRPr sz="1200"/>
+            </a:lvl1pPr>
+          </a:lstStyle>
+          <a:p>
+            <a:endParaRPr lang="en-US"/>
+          </a:p>
+        </p:txBody>
+      </p:sp>
+      <p:sp>
+        <p:nvSpPr>
+          <p:cNvPr id="5" name="Slide Number Placeholder 4">
+            <a:extLst>
+              <a:ext uri="{FF2B5EF4-FFF2-40B4-BE49-F238E27FC236}">
+                <a16:creationId xmlns:a16="http://schemas.microsoft.com/office/drawing/2014/main" id="{01449BD2-5518-C5D0-2B9A-D7871EDA1D11}"/>
+              </a:ext>
+            </a:extLst>
+          </p:cNvPr>
+          <p:cNvSpPr>
+            <a:spLocks noGrp="1"/>
+          </p:cNvSpPr>
+          <p:nvPr>
+            <p:ph type="sldNum" sz="quarter" idx="3"/>
+          </p:nvPr>
+        </p:nvSpPr>
+        <p:spPr>
+          <a:xfrm>
+            <a:off x="3937000" y="8772527"/>
+            <a:ext cx="3011488" cy="463550"/>
+          </a:xfrm>
+          <a:prstGeom prst="rect">
+            <a:avLst/>
+          </a:prstGeom>
+        </p:spPr>
+        <p:txBody>
+          <a:bodyPr vert="horz" lIns="91432" tIns="45716" rIns="91432" bIns="45716" rtlCol="0" anchor="b"/>
+          <a:lstStyle>
+            <a:lvl1pPr algn="r">
+              <a:defRPr sz="1200"/>
+            </a:lvl1pPr>
+          </a:lstStyle>
+          <a:p>
+            <a:fld id="{DEAFE809-7C34-48BB-8C23-6DF0C13D77DF}" type="slidenum">
+              <a:rPr lang="en-US" smtClean="0"/>
+              <a:t>‹#›</a:t>
+            </a:fld>
+            <a:endParaRPr lang="en-US"/>
+          </a:p>
+        </p:txBody>
+      </p:sp>
+    </p:spTree>
+    <p:extLst>
+      <p:ext uri="{BB962C8B-B14F-4D97-AF65-F5344CB8AC3E}">
+        <p14:creationId xmlns:p14="http://schemas.microsoft.com/office/powerpoint/2010/main" val="3709312626"/>
+      </p:ext>
+    </p:extLst>
+  </p:cSld>
+  <p:clrMap bg1="lt1" tx1="dk1" bg2="lt2" tx2="dk2" accent1="accent1" accent2="accent2" accent3="accent3" accent4="accent4" accent5="accent5" accent6="accent6" hlink="hlink" folHlink="folHlink"/>
+  <p:hf sldNum="0" hdr="0" ftr="0" dt="0"/>
+</p:handoutMaster>
 </file>
 
 <file path=ppt/notesMasters/notesMaster1.xml><?xml version="1.0" encoding="utf-8"?>
@@ -2257,15 +441,15 @@
         </p:nvSpPr>
         <p:spPr>
           <a:xfrm>
-            <a:off x="0" y="0"/>
-            <a:ext cx="2971800" cy="458788"/>
+            <a:off x="0" y="1"/>
+            <a:ext cx="3011699" cy="463408"/>
           </a:xfrm>
           <a:prstGeom prst="rect">
             <a:avLst/>
           </a:prstGeom>
         </p:spPr>
         <p:txBody>
-          <a:bodyPr vert="horz" lIns="91440" tIns="45720" rIns="91440" bIns="45720" rtlCol="0"/>
+          <a:bodyPr vert="horz" lIns="92482" tIns="46242" rIns="92482" bIns="46242" rtlCol="0"/>
           <a:lstStyle>
             <a:lvl1pPr algn="l">
               <a:defRPr sz="1200"/>
@@ -2288,24 +472,24 @@
         </p:nvSpPr>
         <p:spPr>
           <a:xfrm>
-            <a:off x="3884613" y="0"/>
-            <a:ext cx="2971800" cy="458788"/>
+            <a:off x="3936768" y="1"/>
+            <a:ext cx="3011699" cy="463408"/>
           </a:xfrm>
           <a:prstGeom prst="rect">
             <a:avLst/>
           </a:prstGeom>
         </p:spPr>
         <p:txBody>
-          <a:bodyPr vert="horz" lIns="91440" tIns="45720" rIns="91440" bIns="45720" rtlCol="0"/>
+          <a:bodyPr vert="horz" lIns="92482" tIns="46242" rIns="92482" bIns="46242" rtlCol="0"/>
           <a:lstStyle>
             <a:lvl1pPr algn="r">
               <a:defRPr sz="1200"/>
             </a:lvl1pPr>
           </a:lstStyle>
           <a:p>
-            <a:fld id="{12430CF0-9E86-44DF-A0A3-50DA5A1E7B98}" type="datetimeFigureOut">
+            <a:fld id="{B38D921E-B01F-41DE-83EE-643516D1B4BA}" type="datetimeFigureOut">
               <a:rPr lang="en-US" smtClean="0"/>
-              <a:t>5/26/2026</a:t>
+              <a:t>4/22/2026</a:t>
             </a:fld>
             <a:endParaRPr lang="en-US"/>
           </a:p>
@@ -2323,8 +507,8 @@
         </p:nvSpPr>
         <p:spPr>
           <a:xfrm>
-            <a:off x="685800" y="1143000"/>
-            <a:ext cx="5486400" cy="3086100"/>
+            <a:off x="704850" y="1154113"/>
+            <a:ext cx="5540375" cy="3117850"/>
           </a:xfrm>
           <a:prstGeom prst="rect">
             <a:avLst/>
@@ -2337,7 +521,7 @@
           </a:ln>
         </p:spPr>
         <p:txBody>
-          <a:bodyPr vert="horz" lIns="91440" tIns="45720" rIns="91440" bIns="45720" rtlCol="0" anchor="ctr"/>
+          <a:bodyPr vert="horz" lIns="92482" tIns="46242" rIns="92482" bIns="46242" rtlCol="0" anchor="ctr"/>
           <a:lstStyle/>
           <a:p>
             <a:endParaRPr lang="en-US"/>
@@ -2356,15 +540,15 @@
         </p:nvSpPr>
         <p:spPr>
           <a:xfrm>
-            <a:off x="685800" y="4400550"/>
-            <a:ext cx="5486400" cy="3600450"/>
+            <a:off x="695008" y="4444860"/>
+            <a:ext cx="5560060" cy="3636706"/>
           </a:xfrm>
           <a:prstGeom prst="rect">
             <a:avLst/>
           </a:prstGeom>
         </p:spPr>
         <p:txBody>
-          <a:bodyPr vert="horz" lIns="91440" tIns="45720" rIns="91440" bIns="45720" rtlCol="0"/>
+          <a:bodyPr vert="horz" lIns="92482" tIns="46242" rIns="92482" bIns="46242" rtlCol="0"/>
           <a:lstStyle/>
           <a:p>
             <a:pPr lvl="0"/>
@@ -2415,15 +599,15 @@
         </p:nvSpPr>
         <p:spPr>
           <a:xfrm>
-            <a:off x="0" y="8685213"/>
-            <a:ext cx="2971800" cy="458787"/>
+            <a:off x="0" y="8772671"/>
+            <a:ext cx="3011699" cy="463407"/>
           </a:xfrm>
           <a:prstGeom prst="rect">
             <a:avLst/>
           </a:prstGeom>
         </p:spPr>
         <p:txBody>
-          <a:bodyPr vert="horz" lIns="91440" tIns="45720" rIns="91440" bIns="45720" rtlCol="0" anchor="b"/>
+          <a:bodyPr vert="horz" lIns="92482" tIns="46242" rIns="92482" bIns="46242" rtlCol="0" anchor="b"/>
           <a:lstStyle>
             <a:lvl1pPr algn="l">
               <a:defRPr sz="1200"/>
@@ -2446,22 +630,22 @@
         </p:nvSpPr>
         <p:spPr>
           <a:xfrm>
-            <a:off x="3884613" y="8685213"/>
-            <a:ext cx="2971800" cy="458787"/>
+            <a:off x="3936768" y="8772671"/>
+            <a:ext cx="3011699" cy="463407"/>
           </a:xfrm>
           <a:prstGeom prst="rect">
             <a:avLst/>
           </a:prstGeom>
         </p:spPr>
         <p:txBody>
-          <a:bodyPr vert="horz" lIns="91440" tIns="45720" rIns="91440" bIns="45720" rtlCol="0" anchor="b"/>
+          <a:bodyPr vert="horz" lIns="92482" tIns="46242" rIns="92482" bIns="46242" rtlCol="0" anchor="b"/>
           <a:lstStyle>
             <a:lvl1pPr algn="r">
               <a:defRPr sz="1200"/>
             </a:lvl1pPr>
           </a:lstStyle>
           <a:p>
-            <a:fld id="{49CCFE5D-0E94-4C6A-9121-D03DF1868F53}" type="slidenum">
+            <a:fld id="{D42659DC-4DE7-4598-B6CD-19E348061B99}" type="slidenum">
               <a:rPr lang="en-US" smtClean="0"/>
               <a:t>‹#›</a:t>
             </a:fld>
@@ -2472,11 +656,12 @@
     </p:spTree>
     <p:extLst>
       <p:ext uri="{BB962C8B-B14F-4D97-AF65-F5344CB8AC3E}">
-        <p14:creationId xmlns:p14="http://schemas.microsoft.com/office/powerpoint/2010/main" val="691085576"/>
+        <p14:creationId xmlns:p14="http://schemas.microsoft.com/office/powerpoint/2010/main" val="1326689715"/>
       </p:ext>
     </p:extLst>
   </p:cSld>
   <p:clrMap bg1="lt1" tx1="dk1" bg2="lt2" tx2="dk2" accent1="accent1" accent2="accent2" accent3="accent3" accent4="accent4" accent5="accent5" accent6="accent6" hlink="hlink" folHlink="folHlink"/>
+  <p:hf sldNum="0" hdr="0" ftr="0" dt="0"/>
   <p:notesStyle>
     <a:lvl1pPr marL="0" algn="l" defTabSz="914400" rtl="0" eaLnBrk="1" latinLnBrk="0" hangingPunct="1">
       <a:defRPr sz="1200" kern="1200">
@@ -2573,7 +758,7 @@
 </file>
 
 <file path=ppt/slideLayouts/slideLayout1.xml><?xml version="1.0" encoding="utf-8"?>
-<p:sldLayout xmlns:a="http://schemas.openxmlformats.org/drawingml/2006/main" xmlns:r="http://schemas.openxmlformats.org/officeDocument/2006/relationships" xmlns:p="http://schemas.openxmlformats.org/presentationml/2006/main" type="title">
+<p:sldLayout xmlns:a="http://schemas.openxmlformats.org/drawingml/2006/main" xmlns:r="http://schemas.openxmlformats.org/officeDocument/2006/relationships" xmlns:p="http://schemas.openxmlformats.org/presentationml/2006/main" type="title" preserve="1">
   <p:cSld name="Title Slide">
     <p:spTree>
       <p:nvGrpSpPr>
@@ -2591,10 +776,117 @@
       </p:grpSpPr>
       <p:sp>
         <p:nvSpPr>
+          <p:cNvPr id="2" name="Title 1">
+            <a:extLst>
+              <a:ext uri="{FF2B5EF4-FFF2-40B4-BE49-F238E27FC236}">
+                <a16:creationId xmlns:a16="http://schemas.microsoft.com/office/drawing/2014/main" id="{401A3287-DCEA-49A6-7194-6EE9D6A3743A}"/>
+              </a:ext>
+            </a:extLst>
+          </p:cNvPr>
+          <p:cNvSpPr>
+            <a:spLocks noGrp="1"/>
+          </p:cNvSpPr>
+          <p:nvPr>
+            <p:ph type="ctrTitle"/>
+          </p:nvPr>
+        </p:nvSpPr>
+        <p:spPr>
+          <a:xfrm>
+            <a:off x="1524000" y="1122363"/>
+            <a:ext cx="9144000" cy="2387600"/>
+          </a:xfrm>
+        </p:spPr>
+        <p:txBody>
+          <a:bodyPr anchor="b"/>
+          <a:lstStyle>
+            <a:lvl1pPr algn="ctr">
+              <a:defRPr sz="6000"/>
+            </a:lvl1pPr>
+          </a:lstStyle>
+          <a:p>
+            <a:r>
+              <a:rPr lang="en-US"/>
+              <a:t>Click to edit Master title style</a:t>
+            </a:r>
+          </a:p>
+        </p:txBody>
+      </p:sp>
+      <p:sp>
+        <p:nvSpPr>
+          <p:cNvPr id="3" name="Subtitle 2">
+            <a:extLst>
+              <a:ext uri="{FF2B5EF4-FFF2-40B4-BE49-F238E27FC236}">
+                <a16:creationId xmlns:a16="http://schemas.microsoft.com/office/drawing/2014/main" id="{EAA1A66C-5BFC-1026-1FF1-2D02E7FE3997}"/>
+              </a:ext>
+            </a:extLst>
+          </p:cNvPr>
+          <p:cNvSpPr>
+            <a:spLocks noGrp="1"/>
+          </p:cNvSpPr>
+          <p:nvPr>
+            <p:ph type="subTitle" idx="1"/>
+          </p:nvPr>
+        </p:nvSpPr>
+        <p:spPr>
+          <a:xfrm>
+            <a:off x="1524000" y="3602038"/>
+            <a:ext cx="9144000" cy="1655762"/>
+          </a:xfrm>
+        </p:spPr>
+        <p:txBody>
+          <a:bodyPr/>
+          <a:lstStyle>
+            <a:lvl1pPr marL="0" indent="0" algn="ctr">
+              <a:buNone/>
+              <a:defRPr sz="2400"/>
+            </a:lvl1pPr>
+            <a:lvl2pPr marL="457200" indent="0" algn="ctr">
+              <a:buNone/>
+              <a:defRPr sz="2000"/>
+            </a:lvl2pPr>
+            <a:lvl3pPr marL="914400" indent="0" algn="ctr">
+              <a:buNone/>
+              <a:defRPr sz="1800"/>
+            </a:lvl3pPr>
+            <a:lvl4pPr marL="1371600" indent="0" algn="ctr">
+              <a:buNone/>
+              <a:defRPr sz="1600"/>
+            </a:lvl4pPr>
+            <a:lvl5pPr marL="1828800" indent="0" algn="ctr">
+              <a:buNone/>
+              <a:defRPr sz="1600"/>
+            </a:lvl5pPr>
+            <a:lvl6pPr marL="2286000" indent="0" algn="ctr">
+              <a:buNone/>
+              <a:defRPr sz="1600"/>
+            </a:lvl6pPr>
+            <a:lvl7pPr marL="2743200" indent="0" algn="ctr">
+              <a:buNone/>
+              <a:defRPr sz="1600"/>
+            </a:lvl7pPr>
+            <a:lvl8pPr marL="3200400" indent="0" algn="ctr">
+              <a:buNone/>
+              <a:defRPr sz="1600"/>
+            </a:lvl8pPr>
+            <a:lvl9pPr marL="3657600" indent="0" algn="ctr">
+              <a:buNone/>
+              <a:defRPr sz="1600"/>
+            </a:lvl9pPr>
+          </a:lstStyle>
+          <a:p>
+            <a:r>
+              <a:rPr lang="en-US"/>
+              <a:t>Click to edit Master subtitle style</a:t>
+            </a:r>
+          </a:p>
+        </p:txBody>
+      </p:sp>
+      <p:sp>
+        <p:nvSpPr>
           <p:cNvPr id="4" name="Date Placeholder 3">
             <a:extLst>
               <a:ext uri="{FF2B5EF4-FFF2-40B4-BE49-F238E27FC236}">
-                <a16:creationId xmlns:a16="http://schemas.microsoft.com/office/drawing/2014/main" id="{CEC0BB7A-F5B3-7136-6236-BEF897B9EED0}"/>
+                <a16:creationId xmlns:a16="http://schemas.microsoft.com/office/drawing/2014/main" id="{11682578-B9E5-73AC-3655-1223DD190805}"/>
               </a:ext>
             </a:extLst>
           </p:cNvPr>
@@ -2610,9 +902,9 @@
           <a:bodyPr/>
           <a:lstStyle/>
           <a:p>
-            <a:fld id="{070B2E1F-715B-42E3-BD94-DCAA777AA146}" type="datetimeFigureOut">
+            <a:fld id="{2F4F8650-CDD6-4A2E-A7D2-9A5CCD8444EC}" type="datetime1">
               <a:rPr lang="en-US" smtClean="0"/>
-              <a:t>5/26/2026</a:t>
+              <a:t>4/22/2026</a:t>
             </a:fld>
             <a:endParaRPr lang="en-US"/>
           </a:p>
@@ -2623,7 +915,7 @@
           <p:cNvPr id="5" name="Footer Placeholder 4">
             <a:extLst>
               <a:ext uri="{FF2B5EF4-FFF2-40B4-BE49-F238E27FC236}">
-                <a16:creationId xmlns:a16="http://schemas.microsoft.com/office/drawing/2014/main" id="{F0B66E2F-9400-860B-6AB0-51A01B7F7B38}"/>
+                <a16:creationId xmlns:a16="http://schemas.microsoft.com/office/drawing/2014/main" id="{06BFDF96-37DA-FBA4-5C5E-043634E66259}"/>
               </a:ext>
             </a:extLst>
           </p:cNvPr>
@@ -2648,7 +940,7 @@
           <p:cNvPr id="6" name="Slide Number Placeholder 5">
             <a:extLst>
               <a:ext uri="{FF2B5EF4-FFF2-40B4-BE49-F238E27FC236}">
-                <a16:creationId xmlns:a16="http://schemas.microsoft.com/office/drawing/2014/main" id="{36A83E25-E9A6-8874-22AD-C987E1C18BB1}"/>
+                <a16:creationId xmlns:a16="http://schemas.microsoft.com/office/drawing/2014/main" id="{6713E8C1-93E7-6660-626F-A16534AB88BA}"/>
               </a:ext>
             </a:extLst>
           </p:cNvPr>
@@ -2664,7 +956,7 @@
           <a:bodyPr/>
           <a:lstStyle/>
           <a:p>
-            <a:fld id="{3F765E82-E662-4828-895E-A52D6DF7EF71}" type="slidenum">
+            <a:fld id="{AEFCB7D9-F698-42F3-AB6E-1BDE4CEE259A}" type="slidenum">
               <a:rPr lang="en-US" smtClean="0"/>
               <a:t>‹#›</a:t>
             </a:fld>
@@ -2675,7 +967,7 @@
     </p:spTree>
     <p:extLst>
       <p:ext uri="{BB962C8B-B14F-4D97-AF65-F5344CB8AC3E}">
-        <p14:creationId xmlns:p14="http://schemas.microsoft.com/office/powerpoint/2010/main" val="3520980957"/>
+        <p14:creationId xmlns:p14="http://schemas.microsoft.com/office/powerpoint/2010/main" val="2842527267"/>
       </p:ext>
     </p:extLst>
   </p:cSld>
@@ -2686,7 +978,7 @@
 </file>
 
 <file path=ppt/slideLayouts/slideLayout10.xml><?xml version="1.0" encoding="utf-8"?>
-<p:sldLayout xmlns:a="http://schemas.openxmlformats.org/drawingml/2006/main" xmlns:r="http://schemas.openxmlformats.org/officeDocument/2006/relationships" xmlns:p="http://schemas.openxmlformats.org/presentationml/2006/main" type="vertTx">
+<p:sldLayout xmlns:a="http://schemas.openxmlformats.org/drawingml/2006/main" xmlns:r="http://schemas.openxmlformats.org/officeDocument/2006/relationships" xmlns:p="http://schemas.openxmlformats.org/presentationml/2006/main" type="vertTx" preserve="1">
   <p:cSld name="Title and Vertical Text">
     <p:spTree>
       <p:nvGrpSpPr>
@@ -2704,18 +996,18 @@
       </p:grpSpPr>
       <p:sp>
         <p:nvSpPr>
-          <p:cNvPr id="4" name="Date Placeholder 3">
-            <a:extLst>
-              <a:ext uri="{FF2B5EF4-FFF2-40B4-BE49-F238E27FC236}">
-                <a16:creationId xmlns:a16="http://schemas.microsoft.com/office/drawing/2014/main" id="{AA422A2C-DCD3-AA59-7E27-55636D6EE14C}"/>
-              </a:ext>
-            </a:extLst>
-          </p:cNvPr>
-          <p:cNvSpPr>
-            <a:spLocks noGrp="1"/>
-          </p:cNvSpPr>
-          <p:nvPr>
-            <p:ph type="dt" sz="half" idx="10"/>
+          <p:cNvPr id="2" name="Title 1">
+            <a:extLst>
+              <a:ext uri="{FF2B5EF4-FFF2-40B4-BE49-F238E27FC236}">
+                <a16:creationId xmlns:a16="http://schemas.microsoft.com/office/drawing/2014/main" id="{538A84FA-9198-11F3-34B8-3648FBAD695D}"/>
+              </a:ext>
+            </a:extLst>
+          </p:cNvPr>
+          <p:cNvSpPr>
+            <a:spLocks noGrp="1"/>
+          </p:cNvSpPr>
+          <p:nvPr>
+            <p:ph type="title"/>
           </p:nvPr>
         </p:nvSpPr>
         <p:spPr/>
@@ -2723,9 +1015,94 @@
           <a:bodyPr/>
           <a:lstStyle/>
           <a:p>
-            <a:fld id="{070B2E1F-715B-42E3-BD94-DCAA777AA146}" type="datetimeFigureOut">
+            <a:r>
+              <a:rPr lang="en-US"/>
+              <a:t>Click to edit Master title style</a:t>
+            </a:r>
+          </a:p>
+        </p:txBody>
+      </p:sp>
+      <p:sp>
+        <p:nvSpPr>
+          <p:cNvPr id="3" name="Vertical Text Placeholder 2">
+            <a:extLst>
+              <a:ext uri="{FF2B5EF4-FFF2-40B4-BE49-F238E27FC236}">
+                <a16:creationId xmlns:a16="http://schemas.microsoft.com/office/drawing/2014/main" id="{53AAE874-A015-2B2B-232E-E5222055C22A}"/>
+              </a:ext>
+            </a:extLst>
+          </p:cNvPr>
+          <p:cNvSpPr>
+            <a:spLocks noGrp="1"/>
+          </p:cNvSpPr>
+          <p:nvPr>
+            <p:ph type="body" orient="vert" idx="1"/>
+          </p:nvPr>
+        </p:nvSpPr>
+        <p:spPr/>
+        <p:txBody>
+          <a:bodyPr vert="eaVert"/>
+          <a:lstStyle/>
+          <a:p>
+            <a:pPr lvl="0"/>
+            <a:r>
+              <a:rPr lang="en-US"/>
+              <a:t>Click to edit Master text styles</a:t>
+            </a:r>
+          </a:p>
+          <a:p>
+            <a:pPr lvl="1"/>
+            <a:r>
+              <a:rPr lang="en-US"/>
+              <a:t>Second level</a:t>
+            </a:r>
+          </a:p>
+          <a:p>
+            <a:pPr lvl="2"/>
+            <a:r>
+              <a:rPr lang="en-US"/>
+              <a:t>Third level</a:t>
+            </a:r>
+          </a:p>
+          <a:p>
+            <a:pPr lvl="3"/>
+            <a:r>
+              <a:rPr lang="en-US"/>
+              <a:t>Fourth level</a:t>
+            </a:r>
+          </a:p>
+          <a:p>
+            <a:pPr lvl="4"/>
+            <a:r>
+              <a:rPr lang="en-US"/>
+              <a:t>Fifth level</a:t>
+            </a:r>
+          </a:p>
+        </p:txBody>
+      </p:sp>
+      <p:sp>
+        <p:nvSpPr>
+          <p:cNvPr id="4" name="Date Placeholder 3">
+            <a:extLst>
+              <a:ext uri="{FF2B5EF4-FFF2-40B4-BE49-F238E27FC236}">
+                <a16:creationId xmlns:a16="http://schemas.microsoft.com/office/drawing/2014/main" id="{1F003F8A-F888-144A-2F37-71E95D759DE0}"/>
+              </a:ext>
+            </a:extLst>
+          </p:cNvPr>
+          <p:cNvSpPr>
+            <a:spLocks noGrp="1"/>
+          </p:cNvSpPr>
+          <p:nvPr>
+            <p:ph type="dt" sz="half" idx="10"/>
+          </p:nvPr>
+        </p:nvSpPr>
+        <p:spPr/>
+        <p:txBody>
+          <a:bodyPr/>
+          <a:lstStyle/>
+          <a:p>
+            <a:fld id="{92255B8E-C9C2-4CAB-A0EC-D4B00BC45EFC}" type="datetime1">
               <a:rPr lang="en-US" smtClean="0"/>
-              <a:t>5/26/2026</a:t>
+              <a:t>4/22/2026</a:t>
             </a:fld>
             <a:endParaRPr lang="en-US"/>
           </a:p>
@@ -2736,7 +1113,7 @@
           <p:cNvPr id="5" name="Footer Placeholder 4">
             <a:extLst>
               <a:ext uri="{FF2B5EF4-FFF2-40B4-BE49-F238E27FC236}">
-                <a16:creationId xmlns:a16="http://schemas.microsoft.com/office/drawing/2014/main" id="{5D3310B6-420B-3D35-E283-793F6A7866BA}"/>
+                <a16:creationId xmlns:a16="http://schemas.microsoft.com/office/drawing/2014/main" id="{F9C6D45D-D3C1-F46D-8E20-84E750565592}"/>
               </a:ext>
             </a:extLst>
           </p:cNvPr>
@@ -2761,7 +1138,7 @@
           <p:cNvPr id="6" name="Slide Number Placeholder 5">
             <a:extLst>
               <a:ext uri="{FF2B5EF4-FFF2-40B4-BE49-F238E27FC236}">
-                <a16:creationId xmlns:a16="http://schemas.microsoft.com/office/drawing/2014/main" id="{76020F26-D4EB-2421-C513-B0E59DC78509}"/>
+                <a16:creationId xmlns:a16="http://schemas.microsoft.com/office/drawing/2014/main" id="{9EC493AC-0A60-6CCC-FC1E-4EA9D3D1F155}"/>
               </a:ext>
             </a:extLst>
           </p:cNvPr>
@@ -2777,7 +1154,7 @@
           <a:bodyPr/>
           <a:lstStyle/>
           <a:p>
-            <a:fld id="{3F765E82-E662-4828-895E-A52D6DF7EF71}" type="slidenum">
+            <a:fld id="{AEFCB7D9-F698-42F3-AB6E-1BDE4CEE259A}" type="slidenum">
               <a:rPr lang="en-US" smtClean="0"/>
               <a:t>‹#›</a:t>
             </a:fld>
@@ -2788,7 +1165,7 @@
     </p:spTree>
     <p:extLst>
       <p:ext uri="{BB962C8B-B14F-4D97-AF65-F5344CB8AC3E}">
-        <p14:creationId xmlns:p14="http://schemas.microsoft.com/office/powerpoint/2010/main" val="1902026157"/>
+        <p14:creationId xmlns:p14="http://schemas.microsoft.com/office/powerpoint/2010/main" val="1321389240"/>
       </p:ext>
     </p:extLst>
   </p:cSld>
@@ -2799,7 +1176,7 @@
 </file>
 
 <file path=ppt/slideLayouts/slideLayout11.xml><?xml version="1.0" encoding="utf-8"?>
-<p:sldLayout xmlns:a="http://schemas.openxmlformats.org/drawingml/2006/main" xmlns:r="http://schemas.openxmlformats.org/officeDocument/2006/relationships" xmlns:p="http://schemas.openxmlformats.org/presentationml/2006/main" type="vertTitleAndTx">
+<p:sldLayout xmlns:a="http://schemas.openxmlformats.org/drawingml/2006/main" xmlns:r="http://schemas.openxmlformats.org/officeDocument/2006/relationships" xmlns:p="http://schemas.openxmlformats.org/presentationml/2006/main" type="vertTitleAndTx" preserve="1">
   <p:cSld name="Vertical Title and Text">
     <p:spTree>
       <p:nvGrpSpPr>
@@ -2817,10 +1194,105 @@
       </p:grpSpPr>
       <p:sp>
         <p:nvSpPr>
+          <p:cNvPr id="2" name="Vertical Title 1">
+            <a:extLst>
+              <a:ext uri="{FF2B5EF4-FFF2-40B4-BE49-F238E27FC236}">
+                <a16:creationId xmlns:a16="http://schemas.microsoft.com/office/drawing/2014/main" id="{31095194-9622-2994-92FA-7C9D6518C6B8}"/>
+              </a:ext>
+            </a:extLst>
+          </p:cNvPr>
+          <p:cNvSpPr>
+            <a:spLocks noGrp="1"/>
+          </p:cNvSpPr>
+          <p:nvPr>
+            <p:ph type="title" orient="vert"/>
+          </p:nvPr>
+        </p:nvSpPr>
+        <p:spPr>
+          <a:xfrm>
+            <a:off x="8724900" y="365125"/>
+            <a:ext cx="2628900" cy="5811838"/>
+          </a:xfrm>
+        </p:spPr>
+        <p:txBody>
+          <a:bodyPr vert="eaVert"/>
+          <a:lstStyle/>
+          <a:p>
+            <a:r>
+              <a:rPr lang="en-US"/>
+              <a:t>Click to edit Master title style</a:t>
+            </a:r>
+          </a:p>
+        </p:txBody>
+      </p:sp>
+      <p:sp>
+        <p:nvSpPr>
+          <p:cNvPr id="3" name="Vertical Text Placeholder 2">
+            <a:extLst>
+              <a:ext uri="{FF2B5EF4-FFF2-40B4-BE49-F238E27FC236}">
+                <a16:creationId xmlns:a16="http://schemas.microsoft.com/office/drawing/2014/main" id="{48CACB29-DA29-AF75-7FFF-7DA27D64841A}"/>
+              </a:ext>
+            </a:extLst>
+          </p:cNvPr>
+          <p:cNvSpPr>
+            <a:spLocks noGrp="1"/>
+          </p:cNvSpPr>
+          <p:nvPr>
+            <p:ph type="body" orient="vert" idx="1"/>
+          </p:nvPr>
+        </p:nvSpPr>
+        <p:spPr>
+          <a:xfrm>
+            <a:off x="838200" y="365125"/>
+            <a:ext cx="7734300" cy="5811838"/>
+          </a:xfrm>
+        </p:spPr>
+        <p:txBody>
+          <a:bodyPr vert="eaVert"/>
+          <a:lstStyle/>
+          <a:p>
+            <a:pPr lvl="0"/>
+            <a:r>
+              <a:rPr lang="en-US"/>
+              <a:t>Click to edit Master text styles</a:t>
+            </a:r>
+          </a:p>
+          <a:p>
+            <a:pPr lvl="1"/>
+            <a:r>
+              <a:rPr lang="en-US"/>
+              <a:t>Second level</a:t>
+            </a:r>
+          </a:p>
+          <a:p>
+            <a:pPr lvl="2"/>
+            <a:r>
+              <a:rPr lang="en-US"/>
+              <a:t>Third level</a:t>
+            </a:r>
+          </a:p>
+          <a:p>
+            <a:pPr lvl="3"/>
+            <a:r>
+              <a:rPr lang="en-US"/>
+              <a:t>Fourth level</a:t>
+            </a:r>
+          </a:p>
+          <a:p>
+            <a:pPr lvl="4"/>
+            <a:r>
+              <a:rPr lang="en-US"/>
+              <a:t>Fifth level</a:t>
+            </a:r>
+          </a:p>
+        </p:txBody>
+      </p:sp>
+      <p:sp>
+        <p:nvSpPr>
           <p:cNvPr id="4" name="Date Placeholder 3">
             <a:extLst>
               <a:ext uri="{FF2B5EF4-FFF2-40B4-BE49-F238E27FC236}">
-                <a16:creationId xmlns:a16="http://schemas.microsoft.com/office/drawing/2014/main" id="{E33B6EE2-D35C-9DE6-1DD2-DA874F93F575}"/>
+                <a16:creationId xmlns:a16="http://schemas.microsoft.com/office/drawing/2014/main" id="{0037817A-242C-8B13-03F2-D8B86C714914}"/>
               </a:ext>
             </a:extLst>
           </p:cNvPr>
@@ -2836,9 +1308,9 @@
           <a:bodyPr/>
           <a:lstStyle/>
           <a:p>
-            <a:fld id="{070B2E1F-715B-42E3-BD94-DCAA777AA146}" type="datetimeFigureOut">
+            <a:fld id="{C06DC652-B654-40CA-ACF0-D4B86C34273F}" type="datetime1">
               <a:rPr lang="en-US" smtClean="0"/>
-              <a:t>5/26/2026</a:t>
+              <a:t>4/22/2026</a:t>
             </a:fld>
             <a:endParaRPr lang="en-US"/>
           </a:p>
@@ -2849,7 +1321,7 @@
           <p:cNvPr id="5" name="Footer Placeholder 4">
             <a:extLst>
               <a:ext uri="{FF2B5EF4-FFF2-40B4-BE49-F238E27FC236}">
-                <a16:creationId xmlns:a16="http://schemas.microsoft.com/office/drawing/2014/main" id="{B59A1643-0D16-E4AF-FE01-9ADC6419E542}"/>
+                <a16:creationId xmlns:a16="http://schemas.microsoft.com/office/drawing/2014/main" id="{E3BC30DC-EEA3-E8FA-E672-D2C18DF2B032}"/>
               </a:ext>
             </a:extLst>
           </p:cNvPr>
@@ -2874,7 +1346,7 @@
           <p:cNvPr id="6" name="Slide Number Placeholder 5">
             <a:extLst>
               <a:ext uri="{FF2B5EF4-FFF2-40B4-BE49-F238E27FC236}">
-                <a16:creationId xmlns:a16="http://schemas.microsoft.com/office/drawing/2014/main" id="{D8A89AD0-2905-9381-277E-B19288EF0009}"/>
+                <a16:creationId xmlns:a16="http://schemas.microsoft.com/office/drawing/2014/main" id="{CDE24D66-3267-F1E3-9546-ADB14EA2DD5C}"/>
               </a:ext>
             </a:extLst>
           </p:cNvPr>
@@ -2890,7 +1362,7 @@
           <a:bodyPr/>
           <a:lstStyle/>
           <a:p>
-            <a:fld id="{3F765E82-E662-4828-895E-A52D6DF7EF71}" type="slidenum">
+            <a:fld id="{AEFCB7D9-F698-42F3-AB6E-1BDE4CEE259A}" type="slidenum">
               <a:rPr lang="en-US" smtClean="0"/>
               <a:t>‹#›</a:t>
             </a:fld>
@@ -2901,7 +1373,7 @@
     </p:spTree>
     <p:extLst>
       <p:ext uri="{BB962C8B-B14F-4D97-AF65-F5344CB8AC3E}">
-        <p14:creationId xmlns:p14="http://schemas.microsoft.com/office/powerpoint/2010/main" val="3000743874"/>
+        <p14:creationId xmlns:p14="http://schemas.microsoft.com/office/powerpoint/2010/main" val="1045633853"/>
       </p:ext>
     </p:extLst>
   </p:cSld>
@@ -2912,7 +1384,7 @@
 </file>
 
 <file path=ppt/slideLayouts/slideLayout2.xml><?xml version="1.0" encoding="utf-8"?>
-<p:sldLayout xmlns:a="http://schemas.openxmlformats.org/drawingml/2006/main" xmlns:r="http://schemas.openxmlformats.org/officeDocument/2006/relationships" xmlns:p="http://schemas.openxmlformats.org/presentationml/2006/main" type="obj">
+<p:sldLayout xmlns:a="http://schemas.openxmlformats.org/drawingml/2006/main" xmlns:r="http://schemas.openxmlformats.org/officeDocument/2006/relationships" xmlns:p="http://schemas.openxmlformats.org/presentationml/2006/main" type="obj" preserve="1">
   <p:cSld name="Title and Content">
     <p:spTree>
       <p:nvGrpSpPr>
@@ -2930,18 +1402,18 @@
       </p:grpSpPr>
       <p:sp>
         <p:nvSpPr>
-          <p:cNvPr id="4" name="Date Placeholder 3">
-            <a:extLst>
-              <a:ext uri="{FF2B5EF4-FFF2-40B4-BE49-F238E27FC236}">
-                <a16:creationId xmlns:a16="http://schemas.microsoft.com/office/drawing/2014/main" id="{75ADA192-6C65-FA28-31C5-3815BFFDFEED}"/>
-              </a:ext>
-            </a:extLst>
-          </p:cNvPr>
-          <p:cNvSpPr>
-            <a:spLocks noGrp="1"/>
-          </p:cNvSpPr>
-          <p:nvPr>
-            <p:ph type="dt" sz="half" idx="10"/>
+          <p:cNvPr id="2" name="Title 1">
+            <a:extLst>
+              <a:ext uri="{FF2B5EF4-FFF2-40B4-BE49-F238E27FC236}">
+                <a16:creationId xmlns:a16="http://schemas.microsoft.com/office/drawing/2014/main" id="{1738010B-B688-B5F6-7BB7-A546919C7D99}"/>
+              </a:ext>
+            </a:extLst>
+          </p:cNvPr>
+          <p:cNvSpPr>
+            <a:spLocks noGrp="1"/>
+          </p:cNvSpPr>
+          <p:nvPr>
+            <p:ph type="title"/>
           </p:nvPr>
         </p:nvSpPr>
         <p:spPr/>
@@ -2949,9 +1421,94 @@
           <a:bodyPr/>
           <a:lstStyle/>
           <a:p>
-            <a:fld id="{070B2E1F-715B-42E3-BD94-DCAA777AA146}" type="datetimeFigureOut">
+            <a:r>
+              <a:rPr lang="en-US"/>
+              <a:t>Click to edit Master title style</a:t>
+            </a:r>
+          </a:p>
+        </p:txBody>
+      </p:sp>
+      <p:sp>
+        <p:nvSpPr>
+          <p:cNvPr id="3" name="Content Placeholder 2">
+            <a:extLst>
+              <a:ext uri="{FF2B5EF4-FFF2-40B4-BE49-F238E27FC236}">
+                <a16:creationId xmlns:a16="http://schemas.microsoft.com/office/drawing/2014/main" id="{921FA0BA-4759-EB65-50C9-3AE2D50BC2B3}"/>
+              </a:ext>
+            </a:extLst>
+          </p:cNvPr>
+          <p:cNvSpPr>
+            <a:spLocks noGrp="1"/>
+          </p:cNvSpPr>
+          <p:nvPr>
+            <p:ph idx="1"/>
+          </p:nvPr>
+        </p:nvSpPr>
+        <p:spPr/>
+        <p:txBody>
+          <a:bodyPr/>
+          <a:lstStyle/>
+          <a:p>
+            <a:pPr lvl="0"/>
+            <a:r>
+              <a:rPr lang="en-US"/>
+              <a:t>Click to edit Master text styles</a:t>
+            </a:r>
+          </a:p>
+          <a:p>
+            <a:pPr lvl="1"/>
+            <a:r>
+              <a:rPr lang="en-US"/>
+              <a:t>Second level</a:t>
+            </a:r>
+          </a:p>
+          <a:p>
+            <a:pPr lvl="2"/>
+            <a:r>
+              <a:rPr lang="en-US"/>
+              <a:t>Third level</a:t>
+            </a:r>
+          </a:p>
+          <a:p>
+            <a:pPr lvl="3"/>
+            <a:r>
+              <a:rPr lang="en-US"/>
+              <a:t>Fourth level</a:t>
+            </a:r>
+          </a:p>
+          <a:p>
+            <a:pPr lvl="4"/>
+            <a:r>
+              <a:rPr lang="en-US"/>
+              <a:t>Fifth level</a:t>
+            </a:r>
+          </a:p>
+        </p:txBody>
+      </p:sp>
+      <p:sp>
+        <p:nvSpPr>
+          <p:cNvPr id="4" name="Date Placeholder 3">
+            <a:extLst>
+              <a:ext uri="{FF2B5EF4-FFF2-40B4-BE49-F238E27FC236}">
+                <a16:creationId xmlns:a16="http://schemas.microsoft.com/office/drawing/2014/main" id="{9F7F2B3D-BC09-D716-78C5-B8444CDCBD9C}"/>
+              </a:ext>
+            </a:extLst>
+          </p:cNvPr>
+          <p:cNvSpPr>
+            <a:spLocks noGrp="1"/>
+          </p:cNvSpPr>
+          <p:nvPr>
+            <p:ph type="dt" sz="half" idx="10"/>
+          </p:nvPr>
+        </p:nvSpPr>
+        <p:spPr/>
+        <p:txBody>
+          <a:bodyPr/>
+          <a:lstStyle/>
+          <a:p>
+            <a:fld id="{322CFCAD-6523-4810-80D1-90C66A67767C}" type="datetime1">
               <a:rPr lang="en-US" smtClean="0"/>
-              <a:t>5/26/2026</a:t>
+              <a:t>4/22/2026</a:t>
             </a:fld>
             <a:endParaRPr lang="en-US"/>
           </a:p>
@@ -2962,7 +1519,7 @@
           <p:cNvPr id="5" name="Footer Placeholder 4">
             <a:extLst>
               <a:ext uri="{FF2B5EF4-FFF2-40B4-BE49-F238E27FC236}">
-                <a16:creationId xmlns:a16="http://schemas.microsoft.com/office/drawing/2014/main" id="{4EBC7A5B-A4C2-763A-7CDB-FA1418983C1A}"/>
+                <a16:creationId xmlns:a16="http://schemas.microsoft.com/office/drawing/2014/main" id="{4384B794-AA13-6D7E-6A3E-AB2F8A4C1EEE}"/>
               </a:ext>
             </a:extLst>
           </p:cNvPr>
@@ -2987,7 +1544,7 @@
           <p:cNvPr id="6" name="Slide Number Placeholder 5">
             <a:extLst>
               <a:ext uri="{FF2B5EF4-FFF2-40B4-BE49-F238E27FC236}">
-                <a16:creationId xmlns:a16="http://schemas.microsoft.com/office/drawing/2014/main" id="{A356C48B-4656-2976-6DD3-320DA8D6E160}"/>
+                <a16:creationId xmlns:a16="http://schemas.microsoft.com/office/drawing/2014/main" id="{943D4125-DC9B-C80F-7D0F-291A48BC64BB}"/>
               </a:ext>
             </a:extLst>
           </p:cNvPr>
@@ -3003,7 +1560,7 @@
           <a:bodyPr/>
           <a:lstStyle/>
           <a:p>
-            <a:fld id="{3F765E82-E662-4828-895E-A52D6DF7EF71}" type="slidenum">
+            <a:fld id="{AEFCB7D9-F698-42F3-AB6E-1BDE4CEE259A}" type="slidenum">
               <a:rPr lang="en-US" smtClean="0"/>
               <a:t>‹#›</a:t>
             </a:fld>
@@ -3014,7 +1571,7 @@
     </p:spTree>
     <p:extLst>
       <p:ext uri="{BB962C8B-B14F-4D97-AF65-F5344CB8AC3E}">
-        <p14:creationId xmlns:p14="http://schemas.microsoft.com/office/powerpoint/2010/main" val="1031899460"/>
+        <p14:creationId xmlns:p14="http://schemas.microsoft.com/office/powerpoint/2010/main" val="4083973579"/>
       </p:ext>
     </p:extLst>
   </p:cSld>
@@ -3025,7 +1582,7 @@
 </file>
 
 <file path=ppt/slideLayouts/slideLayout3.xml><?xml version="1.0" encoding="utf-8"?>
-<p:sldLayout xmlns:a="http://schemas.openxmlformats.org/drawingml/2006/main" xmlns:r="http://schemas.openxmlformats.org/officeDocument/2006/relationships" xmlns:p="http://schemas.openxmlformats.org/presentationml/2006/main" type="secHead">
+<p:sldLayout xmlns:a="http://schemas.openxmlformats.org/drawingml/2006/main" xmlns:r="http://schemas.openxmlformats.org/officeDocument/2006/relationships" xmlns:p="http://schemas.openxmlformats.org/presentationml/2006/main" type="secHead" preserve="1">
   <p:cSld name="Section Header">
     <p:spTree>
       <p:nvGrpSpPr>
@@ -3043,10 +1600,172 @@
       </p:grpSpPr>
       <p:sp>
         <p:nvSpPr>
+          <p:cNvPr id="2" name="Title 1">
+            <a:extLst>
+              <a:ext uri="{FF2B5EF4-FFF2-40B4-BE49-F238E27FC236}">
+                <a16:creationId xmlns:a16="http://schemas.microsoft.com/office/drawing/2014/main" id="{85881BAC-F1D4-A38B-6A89-A4C0EA92EB72}"/>
+              </a:ext>
+            </a:extLst>
+          </p:cNvPr>
+          <p:cNvSpPr>
+            <a:spLocks noGrp="1"/>
+          </p:cNvSpPr>
+          <p:nvPr>
+            <p:ph type="title"/>
+          </p:nvPr>
+        </p:nvSpPr>
+        <p:spPr>
+          <a:xfrm>
+            <a:off x="831850" y="1709738"/>
+            <a:ext cx="10515600" cy="2852737"/>
+          </a:xfrm>
+        </p:spPr>
+        <p:txBody>
+          <a:bodyPr anchor="b"/>
+          <a:lstStyle>
+            <a:lvl1pPr>
+              <a:defRPr sz="6000"/>
+            </a:lvl1pPr>
+          </a:lstStyle>
+          <a:p>
+            <a:r>
+              <a:rPr lang="en-US"/>
+              <a:t>Click to edit Master title style</a:t>
+            </a:r>
+          </a:p>
+        </p:txBody>
+      </p:sp>
+      <p:sp>
+        <p:nvSpPr>
+          <p:cNvPr id="3" name="Text Placeholder 2">
+            <a:extLst>
+              <a:ext uri="{FF2B5EF4-FFF2-40B4-BE49-F238E27FC236}">
+                <a16:creationId xmlns:a16="http://schemas.microsoft.com/office/drawing/2014/main" id="{82B34FF6-715A-A5A2-6405-86F5C2D5B15B}"/>
+              </a:ext>
+            </a:extLst>
+          </p:cNvPr>
+          <p:cNvSpPr>
+            <a:spLocks noGrp="1"/>
+          </p:cNvSpPr>
+          <p:nvPr>
+            <p:ph type="body" idx="1"/>
+          </p:nvPr>
+        </p:nvSpPr>
+        <p:spPr>
+          <a:xfrm>
+            <a:off x="831850" y="4589463"/>
+            <a:ext cx="10515600" cy="1500187"/>
+          </a:xfrm>
+        </p:spPr>
+        <p:txBody>
+          <a:bodyPr/>
+          <a:lstStyle>
+            <a:lvl1pPr marL="0" indent="0">
+              <a:buNone/>
+              <a:defRPr sz="2400">
+                <a:solidFill>
+                  <a:schemeClr val="tx1">
+                    <a:tint val="82000"/>
+                  </a:schemeClr>
+                </a:solidFill>
+              </a:defRPr>
+            </a:lvl1pPr>
+            <a:lvl2pPr marL="457200" indent="0">
+              <a:buNone/>
+              <a:defRPr sz="2000">
+                <a:solidFill>
+                  <a:schemeClr val="tx1">
+                    <a:tint val="82000"/>
+                  </a:schemeClr>
+                </a:solidFill>
+              </a:defRPr>
+            </a:lvl2pPr>
+            <a:lvl3pPr marL="914400" indent="0">
+              <a:buNone/>
+              <a:defRPr sz="1800">
+                <a:solidFill>
+                  <a:schemeClr val="tx1">
+                    <a:tint val="82000"/>
+                  </a:schemeClr>
+                </a:solidFill>
+              </a:defRPr>
+            </a:lvl3pPr>
+            <a:lvl4pPr marL="1371600" indent="0">
+              <a:buNone/>
+              <a:defRPr sz="1600">
+                <a:solidFill>
+                  <a:schemeClr val="tx1">
+                    <a:tint val="82000"/>
+                  </a:schemeClr>
+                </a:solidFill>
+              </a:defRPr>
+            </a:lvl4pPr>
+            <a:lvl5pPr marL="1828800" indent="0">
+              <a:buNone/>
+              <a:defRPr sz="1600">
+                <a:solidFill>
+                  <a:schemeClr val="tx1">
+                    <a:tint val="82000"/>
+                  </a:schemeClr>
+                </a:solidFill>
+              </a:defRPr>
+            </a:lvl5pPr>
+            <a:lvl6pPr marL="2286000" indent="0">
+              <a:buNone/>
+              <a:defRPr sz="1600">
+                <a:solidFill>
+                  <a:schemeClr val="tx1">
+                    <a:tint val="82000"/>
+                  </a:schemeClr>
+                </a:solidFill>
+              </a:defRPr>
+            </a:lvl6pPr>
+            <a:lvl7pPr marL="2743200" indent="0">
+              <a:buNone/>
+              <a:defRPr sz="1600">
+                <a:solidFill>
+                  <a:schemeClr val="tx1">
+                    <a:tint val="82000"/>
+                  </a:schemeClr>
+                </a:solidFill>
+              </a:defRPr>
+            </a:lvl7pPr>
+            <a:lvl8pPr marL="3200400" indent="0">
+              <a:buNone/>
+              <a:defRPr sz="1600">
+                <a:solidFill>
+                  <a:schemeClr val="tx1">
+                    <a:tint val="82000"/>
+                  </a:schemeClr>
+                </a:solidFill>
+              </a:defRPr>
+            </a:lvl8pPr>
+            <a:lvl9pPr marL="3657600" indent="0">
+              <a:buNone/>
+              <a:defRPr sz="1600">
+                <a:solidFill>
+                  <a:schemeClr val="tx1">
+                    <a:tint val="82000"/>
+                  </a:schemeClr>
+                </a:solidFill>
+              </a:defRPr>
+            </a:lvl9pPr>
+          </a:lstStyle>
+          <a:p>
+            <a:pPr lvl="0"/>
+            <a:r>
+              <a:rPr lang="en-US"/>
+              <a:t>Click to edit Master text styles</a:t>
+            </a:r>
+          </a:p>
+        </p:txBody>
+      </p:sp>
+      <p:sp>
+        <p:nvSpPr>
           <p:cNvPr id="4" name="Date Placeholder 3">
             <a:extLst>
               <a:ext uri="{FF2B5EF4-FFF2-40B4-BE49-F238E27FC236}">
-                <a16:creationId xmlns:a16="http://schemas.microsoft.com/office/drawing/2014/main" id="{459F8A63-DE05-1288-2BC4-54B9CC06811C}"/>
+                <a16:creationId xmlns:a16="http://schemas.microsoft.com/office/drawing/2014/main" id="{750F4F17-CD1F-03C5-628A-7D0A373E8E09}"/>
               </a:ext>
             </a:extLst>
           </p:cNvPr>
@@ -3062,9 +1781,9 @@
           <a:bodyPr/>
           <a:lstStyle/>
           <a:p>
-            <a:fld id="{070B2E1F-715B-42E3-BD94-DCAA777AA146}" type="datetimeFigureOut">
+            <a:fld id="{D7C4D80B-352A-4363-817C-9E8FCFA6D0AA}" type="datetime1">
               <a:rPr lang="en-US" smtClean="0"/>
-              <a:t>5/26/2026</a:t>
+              <a:t>4/22/2026</a:t>
             </a:fld>
             <a:endParaRPr lang="en-US"/>
           </a:p>
@@ -3075,7 +1794,7 @@
           <p:cNvPr id="5" name="Footer Placeholder 4">
             <a:extLst>
               <a:ext uri="{FF2B5EF4-FFF2-40B4-BE49-F238E27FC236}">
-                <a16:creationId xmlns:a16="http://schemas.microsoft.com/office/drawing/2014/main" id="{9BA8A2D7-991F-7E8F-0FF2-98AFCA14419F}"/>
+                <a16:creationId xmlns:a16="http://schemas.microsoft.com/office/drawing/2014/main" id="{390746B4-73A7-9FA1-66E1-ECF20F1D124B}"/>
               </a:ext>
             </a:extLst>
           </p:cNvPr>
@@ -3100,7 +1819,7 @@
           <p:cNvPr id="6" name="Slide Number Placeholder 5">
             <a:extLst>
               <a:ext uri="{FF2B5EF4-FFF2-40B4-BE49-F238E27FC236}">
-                <a16:creationId xmlns:a16="http://schemas.microsoft.com/office/drawing/2014/main" id="{9E61B847-59D2-F775-3D4D-E0763FB3C987}"/>
+                <a16:creationId xmlns:a16="http://schemas.microsoft.com/office/drawing/2014/main" id="{16B29734-44F3-D64C-84CA-FA3842374645}"/>
               </a:ext>
             </a:extLst>
           </p:cNvPr>
@@ -3116,7 +1835,7 @@
           <a:bodyPr/>
           <a:lstStyle/>
           <a:p>
-            <a:fld id="{3F765E82-E662-4828-895E-A52D6DF7EF71}" type="slidenum">
+            <a:fld id="{AEFCB7D9-F698-42F3-AB6E-1BDE4CEE259A}" type="slidenum">
               <a:rPr lang="en-US" smtClean="0"/>
               <a:t>‹#›</a:t>
             </a:fld>
@@ -3127,7 +1846,7 @@
     </p:spTree>
     <p:extLst>
       <p:ext uri="{BB962C8B-B14F-4D97-AF65-F5344CB8AC3E}">
-        <p14:creationId xmlns:p14="http://schemas.microsoft.com/office/powerpoint/2010/main" val="1233990304"/>
+        <p14:creationId xmlns:p14="http://schemas.microsoft.com/office/powerpoint/2010/main" val="1207479301"/>
       </p:ext>
     </p:extLst>
   </p:cSld>
@@ -3138,7 +1857,7 @@
 </file>
 
 <file path=ppt/slideLayouts/slideLayout4.xml><?xml version="1.0" encoding="utf-8"?>
-<p:sldLayout xmlns:a="http://schemas.openxmlformats.org/drawingml/2006/main" xmlns:r="http://schemas.openxmlformats.org/officeDocument/2006/relationships" xmlns:p="http://schemas.openxmlformats.org/presentationml/2006/main" type="twoObj">
+<p:sldLayout xmlns:a="http://schemas.openxmlformats.org/drawingml/2006/main" xmlns:r="http://schemas.openxmlformats.org/officeDocument/2006/relationships" xmlns:p="http://schemas.openxmlformats.org/presentationml/2006/main" type="twoObj" preserve="1">
   <p:cSld name="Two Content">
     <p:spTree>
       <p:nvGrpSpPr>
@@ -3156,18 +1875,18 @@
       </p:grpSpPr>
       <p:sp>
         <p:nvSpPr>
-          <p:cNvPr id="5" name="Date Placeholder 4">
-            <a:extLst>
-              <a:ext uri="{FF2B5EF4-FFF2-40B4-BE49-F238E27FC236}">
-                <a16:creationId xmlns:a16="http://schemas.microsoft.com/office/drawing/2014/main" id="{289C7EB4-0675-05C3-9896-283B8F7B4B34}"/>
-              </a:ext>
-            </a:extLst>
-          </p:cNvPr>
-          <p:cNvSpPr>
-            <a:spLocks noGrp="1"/>
-          </p:cNvSpPr>
-          <p:nvPr>
-            <p:ph type="dt" sz="half" idx="10"/>
+          <p:cNvPr id="2" name="Title 1">
+            <a:extLst>
+              <a:ext uri="{FF2B5EF4-FFF2-40B4-BE49-F238E27FC236}">
+                <a16:creationId xmlns:a16="http://schemas.microsoft.com/office/drawing/2014/main" id="{CC064667-57E8-D85E-F415-EB7CBB3FD8DC}"/>
+              </a:ext>
+            </a:extLst>
+          </p:cNvPr>
+          <p:cNvSpPr>
+            <a:spLocks noGrp="1"/>
+          </p:cNvSpPr>
+          <p:nvPr>
+            <p:ph type="title"/>
           </p:nvPr>
         </p:nvSpPr>
         <p:spPr/>
@@ -3175,9 +1894,161 @@
           <a:bodyPr/>
           <a:lstStyle/>
           <a:p>
-            <a:fld id="{070B2E1F-715B-42E3-BD94-DCAA777AA146}" type="datetimeFigureOut">
+            <a:r>
+              <a:rPr lang="en-US"/>
+              <a:t>Click to edit Master title style</a:t>
+            </a:r>
+          </a:p>
+        </p:txBody>
+      </p:sp>
+      <p:sp>
+        <p:nvSpPr>
+          <p:cNvPr id="3" name="Content Placeholder 2">
+            <a:extLst>
+              <a:ext uri="{FF2B5EF4-FFF2-40B4-BE49-F238E27FC236}">
+                <a16:creationId xmlns:a16="http://schemas.microsoft.com/office/drawing/2014/main" id="{98794E94-2E61-D079-A7D7-687D5251F07A}"/>
+              </a:ext>
+            </a:extLst>
+          </p:cNvPr>
+          <p:cNvSpPr>
+            <a:spLocks noGrp="1"/>
+          </p:cNvSpPr>
+          <p:nvPr>
+            <p:ph sz="half" idx="1"/>
+          </p:nvPr>
+        </p:nvSpPr>
+        <p:spPr>
+          <a:xfrm>
+            <a:off x="838200" y="1825625"/>
+            <a:ext cx="5181600" cy="4351338"/>
+          </a:xfrm>
+        </p:spPr>
+        <p:txBody>
+          <a:bodyPr/>
+          <a:lstStyle/>
+          <a:p>
+            <a:pPr lvl="0"/>
+            <a:r>
+              <a:rPr lang="en-US"/>
+              <a:t>Click to edit Master text styles</a:t>
+            </a:r>
+          </a:p>
+          <a:p>
+            <a:pPr lvl="1"/>
+            <a:r>
+              <a:rPr lang="en-US"/>
+              <a:t>Second level</a:t>
+            </a:r>
+          </a:p>
+          <a:p>
+            <a:pPr lvl="2"/>
+            <a:r>
+              <a:rPr lang="en-US"/>
+              <a:t>Third level</a:t>
+            </a:r>
+          </a:p>
+          <a:p>
+            <a:pPr lvl="3"/>
+            <a:r>
+              <a:rPr lang="en-US"/>
+              <a:t>Fourth level</a:t>
+            </a:r>
+          </a:p>
+          <a:p>
+            <a:pPr lvl="4"/>
+            <a:r>
+              <a:rPr lang="en-US"/>
+              <a:t>Fifth level</a:t>
+            </a:r>
+          </a:p>
+        </p:txBody>
+      </p:sp>
+      <p:sp>
+        <p:nvSpPr>
+          <p:cNvPr id="4" name="Content Placeholder 3">
+            <a:extLst>
+              <a:ext uri="{FF2B5EF4-FFF2-40B4-BE49-F238E27FC236}">
+                <a16:creationId xmlns:a16="http://schemas.microsoft.com/office/drawing/2014/main" id="{C0BD4B6C-FF74-5EE5-C875-319BBAC2EC23}"/>
+              </a:ext>
+            </a:extLst>
+          </p:cNvPr>
+          <p:cNvSpPr>
+            <a:spLocks noGrp="1"/>
+          </p:cNvSpPr>
+          <p:nvPr>
+            <p:ph sz="half" idx="2"/>
+          </p:nvPr>
+        </p:nvSpPr>
+        <p:spPr>
+          <a:xfrm>
+            <a:off x="6172200" y="1825625"/>
+            <a:ext cx="5181600" cy="4351338"/>
+          </a:xfrm>
+        </p:spPr>
+        <p:txBody>
+          <a:bodyPr/>
+          <a:lstStyle/>
+          <a:p>
+            <a:pPr lvl="0"/>
+            <a:r>
+              <a:rPr lang="en-US"/>
+              <a:t>Click to edit Master text styles</a:t>
+            </a:r>
+          </a:p>
+          <a:p>
+            <a:pPr lvl="1"/>
+            <a:r>
+              <a:rPr lang="en-US"/>
+              <a:t>Second level</a:t>
+            </a:r>
+          </a:p>
+          <a:p>
+            <a:pPr lvl="2"/>
+            <a:r>
+              <a:rPr lang="en-US"/>
+              <a:t>Third level</a:t>
+            </a:r>
+          </a:p>
+          <a:p>
+            <a:pPr lvl="3"/>
+            <a:r>
+              <a:rPr lang="en-US"/>
+              <a:t>Fourth level</a:t>
+            </a:r>
+          </a:p>
+          <a:p>
+            <a:pPr lvl="4"/>
+            <a:r>
+              <a:rPr lang="en-US"/>
+              <a:t>Fifth level</a:t>
+            </a:r>
+          </a:p>
+        </p:txBody>
+      </p:sp>
+      <p:sp>
+        <p:nvSpPr>
+          <p:cNvPr id="5" name="Date Placeholder 4">
+            <a:extLst>
+              <a:ext uri="{FF2B5EF4-FFF2-40B4-BE49-F238E27FC236}">
+                <a16:creationId xmlns:a16="http://schemas.microsoft.com/office/drawing/2014/main" id="{ED456DB0-FCC0-CA3F-4E09-79D4B2E75740}"/>
+              </a:ext>
+            </a:extLst>
+          </p:cNvPr>
+          <p:cNvSpPr>
+            <a:spLocks noGrp="1"/>
+          </p:cNvSpPr>
+          <p:nvPr>
+            <p:ph type="dt" sz="half" idx="10"/>
+          </p:nvPr>
+        </p:nvSpPr>
+        <p:spPr/>
+        <p:txBody>
+          <a:bodyPr/>
+          <a:lstStyle/>
+          <a:p>
+            <a:fld id="{9D852319-D774-4A65-B7E4-1EA9AC4D5A2E}" type="datetime1">
               <a:rPr lang="en-US" smtClean="0"/>
-              <a:t>5/26/2026</a:t>
+              <a:t>4/22/2026</a:t>
             </a:fld>
             <a:endParaRPr lang="en-US"/>
           </a:p>
@@ -3188,7 +2059,7 @@
           <p:cNvPr id="6" name="Footer Placeholder 5">
             <a:extLst>
               <a:ext uri="{FF2B5EF4-FFF2-40B4-BE49-F238E27FC236}">
-                <a16:creationId xmlns:a16="http://schemas.microsoft.com/office/drawing/2014/main" id="{EF1FF23C-488C-86C4-E667-EB1D65B4B425}"/>
+                <a16:creationId xmlns:a16="http://schemas.microsoft.com/office/drawing/2014/main" id="{957AC9E5-27B5-1AE0-79C9-5D2725AB12BC}"/>
               </a:ext>
             </a:extLst>
           </p:cNvPr>
@@ -3213,7 +2084,7 @@
           <p:cNvPr id="7" name="Slide Number Placeholder 6">
             <a:extLst>
               <a:ext uri="{FF2B5EF4-FFF2-40B4-BE49-F238E27FC236}">
-                <a16:creationId xmlns:a16="http://schemas.microsoft.com/office/drawing/2014/main" id="{731AB0AC-A604-0210-B4CB-3B4E3CF7F58A}"/>
+                <a16:creationId xmlns:a16="http://schemas.microsoft.com/office/drawing/2014/main" id="{745607EF-F317-2D57-4680-137CC117F8DA}"/>
               </a:ext>
             </a:extLst>
           </p:cNvPr>
@@ -3229,7 +2100,7 @@
           <a:bodyPr/>
           <a:lstStyle/>
           <a:p>
-            <a:fld id="{3F765E82-E662-4828-895E-A52D6DF7EF71}" type="slidenum">
+            <a:fld id="{AEFCB7D9-F698-42F3-AB6E-1BDE4CEE259A}" type="slidenum">
               <a:rPr lang="en-US" smtClean="0"/>
               <a:t>‹#›</a:t>
             </a:fld>
@@ -3240,7 +2111,7 @@
     </p:spTree>
     <p:extLst>
       <p:ext uri="{BB962C8B-B14F-4D97-AF65-F5344CB8AC3E}">
-        <p14:creationId xmlns:p14="http://schemas.microsoft.com/office/powerpoint/2010/main" val="4287059987"/>
+        <p14:creationId xmlns:p14="http://schemas.microsoft.com/office/powerpoint/2010/main" val="3173675832"/>
       </p:ext>
     </p:extLst>
   </p:cSld>
@@ -3251,7 +2122,7 @@
 </file>
 
 <file path=ppt/slideLayouts/slideLayout5.xml><?xml version="1.0" encoding="utf-8"?>
-<p:sldLayout xmlns:a="http://schemas.openxmlformats.org/drawingml/2006/main" xmlns:r="http://schemas.openxmlformats.org/officeDocument/2006/relationships" xmlns:p="http://schemas.openxmlformats.org/presentationml/2006/main" type="twoTxTwoObj">
+<p:sldLayout xmlns:a="http://schemas.openxmlformats.org/drawingml/2006/main" xmlns:r="http://schemas.openxmlformats.org/officeDocument/2006/relationships" xmlns:p="http://schemas.openxmlformats.org/presentationml/2006/main" type="twoTxTwoObj" preserve="1">
   <p:cSld name="Comparison">
     <p:spTree>
       <p:nvGrpSpPr>
@@ -3269,28 +2140,327 @@
       </p:grpSpPr>
       <p:sp>
         <p:nvSpPr>
-          <p:cNvPr id="7" name="Date Placeholder 6">
-            <a:extLst>
-              <a:ext uri="{FF2B5EF4-FFF2-40B4-BE49-F238E27FC236}">
-                <a16:creationId xmlns:a16="http://schemas.microsoft.com/office/drawing/2014/main" id="{5668E7F7-C9D9-6305-FB70-86E9C7DC7D74}"/>
-              </a:ext>
-            </a:extLst>
-          </p:cNvPr>
-          <p:cNvSpPr>
-            <a:spLocks noGrp="1"/>
-          </p:cNvSpPr>
-          <p:nvPr>
-            <p:ph type="dt" sz="half" idx="10"/>
-          </p:nvPr>
-        </p:nvSpPr>
-        <p:spPr/>
+          <p:cNvPr id="2" name="Title 1">
+            <a:extLst>
+              <a:ext uri="{FF2B5EF4-FFF2-40B4-BE49-F238E27FC236}">
+                <a16:creationId xmlns:a16="http://schemas.microsoft.com/office/drawing/2014/main" id="{CAB8547D-DE60-1DBE-6DA8-E48A169ADE41}"/>
+              </a:ext>
+            </a:extLst>
+          </p:cNvPr>
+          <p:cNvSpPr>
+            <a:spLocks noGrp="1"/>
+          </p:cNvSpPr>
+          <p:nvPr>
+            <p:ph type="title"/>
+          </p:nvPr>
+        </p:nvSpPr>
+        <p:spPr>
+          <a:xfrm>
+            <a:off x="839788" y="365125"/>
+            <a:ext cx="10515600" cy="1325563"/>
+          </a:xfrm>
+        </p:spPr>
         <p:txBody>
           <a:bodyPr/>
           <a:lstStyle/>
           <a:p>
-            <a:fld id="{070B2E1F-715B-42E3-BD94-DCAA777AA146}" type="datetimeFigureOut">
+            <a:r>
+              <a:rPr lang="en-US"/>
+              <a:t>Click to edit Master title style</a:t>
+            </a:r>
+          </a:p>
+        </p:txBody>
+      </p:sp>
+      <p:sp>
+        <p:nvSpPr>
+          <p:cNvPr id="3" name="Text Placeholder 2">
+            <a:extLst>
+              <a:ext uri="{FF2B5EF4-FFF2-40B4-BE49-F238E27FC236}">
+                <a16:creationId xmlns:a16="http://schemas.microsoft.com/office/drawing/2014/main" id="{C6E4264E-5007-5407-D959-EF429B325718}"/>
+              </a:ext>
+            </a:extLst>
+          </p:cNvPr>
+          <p:cNvSpPr>
+            <a:spLocks noGrp="1"/>
+          </p:cNvSpPr>
+          <p:nvPr>
+            <p:ph type="body" idx="1"/>
+          </p:nvPr>
+        </p:nvSpPr>
+        <p:spPr>
+          <a:xfrm>
+            <a:off x="839788" y="1681163"/>
+            <a:ext cx="5157787" cy="823912"/>
+          </a:xfrm>
+        </p:spPr>
+        <p:txBody>
+          <a:bodyPr anchor="b"/>
+          <a:lstStyle>
+            <a:lvl1pPr marL="0" indent="0">
+              <a:buNone/>
+              <a:defRPr sz="2400" b="1"/>
+            </a:lvl1pPr>
+            <a:lvl2pPr marL="457200" indent="0">
+              <a:buNone/>
+              <a:defRPr sz="2000" b="1"/>
+            </a:lvl2pPr>
+            <a:lvl3pPr marL="914400" indent="0">
+              <a:buNone/>
+              <a:defRPr sz="1800" b="1"/>
+            </a:lvl3pPr>
+            <a:lvl4pPr marL="1371600" indent="0">
+              <a:buNone/>
+              <a:defRPr sz="1600" b="1"/>
+            </a:lvl4pPr>
+            <a:lvl5pPr marL="1828800" indent="0">
+              <a:buNone/>
+              <a:defRPr sz="1600" b="1"/>
+            </a:lvl5pPr>
+            <a:lvl6pPr marL="2286000" indent="0">
+              <a:buNone/>
+              <a:defRPr sz="1600" b="1"/>
+            </a:lvl6pPr>
+            <a:lvl7pPr marL="2743200" indent="0">
+              <a:buNone/>
+              <a:defRPr sz="1600" b="1"/>
+            </a:lvl7pPr>
+            <a:lvl8pPr marL="3200400" indent="0">
+              <a:buNone/>
+              <a:defRPr sz="1600" b="1"/>
+            </a:lvl8pPr>
+            <a:lvl9pPr marL="3657600" indent="0">
+              <a:buNone/>
+              <a:defRPr sz="1600" b="1"/>
+            </a:lvl9pPr>
+          </a:lstStyle>
+          <a:p>
+            <a:pPr lvl="0"/>
+            <a:r>
+              <a:rPr lang="en-US"/>
+              <a:t>Click to edit Master text styles</a:t>
+            </a:r>
+          </a:p>
+        </p:txBody>
+      </p:sp>
+      <p:sp>
+        <p:nvSpPr>
+          <p:cNvPr id="4" name="Content Placeholder 3">
+            <a:extLst>
+              <a:ext uri="{FF2B5EF4-FFF2-40B4-BE49-F238E27FC236}">
+                <a16:creationId xmlns:a16="http://schemas.microsoft.com/office/drawing/2014/main" id="{56765918-0FA1-1C62-55FC-9E1D2002AAE5}"/>
+              </a:ext>
+            </a:extLst>
+          </p:cNvPr>
+          <p:cNvSpPr>
+            <a:spLocks noGrp="1"/>
+          </p:cNvSpPr>
+          <p:nvPr>
+            <p:ph sz="half" idx="2"/>
+          </p:nvPr>
+        </p:nvSpPr>
+        <p:spPr>
+          <a:xfrm>
+            <a:off x="839788" y="2505075"/>
+            <a:ext cx="5157787" cy="3684588"/>
+          </a:xfrm>
+        </p:spPr>
+        <p:txBody>
+          <a:bodyPr/>
+          <a:lstStyle/>
+          <a:p>
+            <a:pPr lvl="0"/>
+            <a:r>
+              <a:rPr lang="en-US"/>
+              <a:t>Click to edit Master text styles</a:t>
+            </a:r>
+          </a:p>
+          <a:p>
+            <a:pPr lvl="1"/>
+            <a:r>
+              <a:rPr lang="en-US"/>
+              <a:t>Second level</a:t>
+            </a:r>
+          </a:p>
+          <a:p>
+            <a:pPr lvl="2"/>
+            <a:r>
+              <a:rPr lang="en-US"/>
+              <a:t>Third level</a:t>
+            </a:r>
+          </a:p>
+          <a:p>
+            <a:pPr lvl="3"/>
+            <a:r>
+              <a:rPr lang="en-US"/>
+              <a:t>Fourth level</a:t>
+            </a:r>
+          </a:p>
+          <a:p>
+            <a:pPr lvl="4"/>
+            <a:r>
+              <a:rPr lang="en-US"/>
+              <a:t>Fifth level</a:t>
+            </a:r>
+          </a:p>
+        </p:txBody>
+      </p:sp>
+      <p:sp>
+        <p:nvSpPr>
+          <p:cNvPr id="5" name="Text Placeholder 4">
+            <a:extLst>
+              <a:ext uri="{FF2B5EF4-FFF2-40B4-BE49-F238E27FC236}">
+                <a16:creationId xmlns:a16="http://schemas.microsoft.com/office/drawing/2014/main" id="{B8CE3FFD-89D8-90FF-B76B-BF2BB4FD819D}"/>
+              </a:ext>
+            </a:extLst>
+          </p:cNvPr>
+          <p:cNvSpPr>
+            <a:spLocks noGrp="1"/>
+          </p:cNvSpPr>
+          <p:nvPr>
+            <p:ph type="body" sz="quarter" idx="3"/>
+          </p:nvPr>
+        </p:nvSpPr>
+        <p:spPr>
+          <a:xfrm>
+            <a:off x="6172200" y="1681163"/>
+            <a:ext cx="5183188" cy="823912"/>
+          </a:xfrm>
+        </p:spPr>
+        <p:txBody>
+          <a:bodyPr anchor="b"/>
+          <a:lstStyle>
+            <a:lvl1pPr marL="0" indent="0">
+              <a:buNone/>
+              <a:defRPr sz="2400" b="1"/>
+            </a:lvl1pPr>
+            <a:lvl2pPr marL="457200" indent="0">
+              <a:buNone/>
+              <a:defRPr sz="2000" b="1"/>
+            </a:lvl2pPr>
+            <a:lvl3pPr marL="914400" indent="0">
+              <a:buNone/>
+              <a:defRPr sz="1800" b="1"/>
+            </a:lvl3pPr>
+            <a:lvl4pPr marL="1371600" indent="0">
+              <a:buNone/>
+              <a:defRPr sz="1600" b="1"/>
+            </a:lvl4pPr>
+            <a:lvl5pPr marL="1828800" indent="0">
+              <a:buNone/>
+              <a:defRPr sz="1600" b="1"/>
+            </a:lvl5pPr>
+            <a:lvl6pPr marL="2286000" indent="0">
+              <a:buNone/>
+              <a:defRPr sz="1600" b="1"/>
+            </a:lvl6pPr>
+            <a:lvl7pPr marL="2743200" indent="0">
+              <a:buNone/>
+              <a:defRPr sz="1600" b="1"/>
+            </a:lvl7pPr>
+            <a:lvl8pPr marL="3200400" indent="0">
+              <a:buNone/>
+              <a:defRPr sz="1600" b="1"/>
+            </a:lvl8pPr>
+            <a:lvl9pPr marL="3657600" indent="0">
+              <a:buNone/>
+              <a:defRPr sz="1600" b="1"/>
+            </a:lvl9pPr>
+          </a:lstStyle>
+          <a:p>
+            <a:pPr lvl="0"/>
+            <a:r>
+              <a:rPr lang="en-US"/>
+              <a:t>Click to edit Master text styles</a:t>
+            </a:r>
+          </a:p>
+        </p:txBody>
+      </p:sp>
+      <p:sp>
+        <p:nvSpPr>
+          <p:cNvPr id="6" name="Content Placeholder 5">
+            <a:extLst>
+              <a:ext uri="{FF2B5EF4-FFF2-40B4-BE49-F238E27FC236}">
+                <a16:creationId xmlns:a16="http://schemas.microsoft.com/office/drawing/2014/main" id="{26FEC52F-91D5-4768-B7DC-5D21680A5669}"/>
+              </a:ext>
+            </a:extLst>
+          </p:cNvPr>
+          <p:cNvSpPr>
+            <a:spLocks noGrp="1"/>
+          </p:cNvSpPr>
+          <p:nvPr>
+            <p:ph sz="quarter" idx="4"/>
+          </p:nvPr>
+        </p:nvSpPr>
+        <p:spPr>
+          <a:xfrm>
+            <a:off x="6172200" y="2505075"/>
+            <a:ext cx="5183188" cy="3684588"/>
+          </a:xfrm>
+        </p:spPr>
+        <p:txBody>
+          <a:bodyPr/>
+          <a:lstStyle/>
+          <a:p>
+            <a:pPr lvl="0"/>
+            <a:r>
+              <a:rPr lang="en-US"/>
+              <a:t>Click to edit Master text styles</a:t>
+            </a:r>
+          </a:p>
+          <a:p>
+            <a:pPr lvl="1"/>
+            <a:r>
+              <a:rPr lang="en-US"/>
+              <a:t>Second level</a:t>
+            </a:r>
+          </a:p>
+          <a:p>
+            <a:pPr lvl="2"/>
+            <a:r>
+              <a:rPr lang="en-US"/>
+              <a:t>Third level</a:t>
+            </a:r>
+          </a:p>
+          <a:p>
+            <a:pPr lvl="3"/>
+            <a:r>
+              <a:rPr lang="en-US"/>
+              <a:t>Fourth level</a:t>
+            </a:r>
+          </a:p>
+          <a:p>
+            <a:pPr lvl="4"/>
+            <a:r>
+              <a:rPr lang="en-US"/>
+              <a:t>Fifth level</a:t>
+            </a:r>
+          </a:p>
+        </p:txBody>
+      </p:sp>
+      <p:sp>
+        <p:nvSpPr>
+          <p:cNvPr id="7" name="Date Placeholder 6">
+            <a:extLst>
+              <a:ext uri="{FF2B5EF4-FFF2-40B4-BE49-F238E27FC236}">
+                <a16:creationId xmlns:a16="http://schemas.microsoft.com/office/drawing/2014/main" id="{72480BBE-D7C5-7C14-03B8-6EA9242E9E90}"/>
+              </a:ext>
+            </a:extLst>
+          </p:cNvPr>
+          <p:cNvSpPr>
+            <a:spLocks noGrp="1"/>
+          </p:cNvSpPr>
+          <p:nvPr>
+            <p:ph type="dt" sz="half" idx="10"/>
+          </p:nvPr>
+        </p:nvSpPr>
+        <p:spPr/>
+        <p:txBody>
+          <a:bodyPr/>
+          <a:lstStyle/>
+          <a:p>
+            <a:fld id="{CB7EC5D2-AFF8-4B05-A8BE-5C9D1BD1B27B}" type="datetime1">
               <a:rPr lang="en-US" smtClean="0"/>
-              <a:t>5/26/2026</a:t>
+              <a:t>4/22/2026</a:t>
             </a:fld>
             <a:endParaRPr lang="en-US"/>
           </a:p>
@@ -3301,7 +2471,7 @@
           <p:cNvPr id="8" name="Footer Placeholder 7">
             <a:extLst>
               <a:ext uri="{FF2B5EF4-FFF2-40B4-BE49-F238E27FC236}">
-                <a16:creationId xmlns:a16="http://schemas.microsoft.com/office/drawing/2014/main" id="{9D8F9C73-E4ED-D6E7-2352-B9E72B569DF8}"/>
+                <a16:creationId xmlns:a16="http://schemas.microsoft.com/office/drawing/2014/main" id="{63C11920-C8C5-A32D-688F-C6BCE0904ABF}"/>
               </a:ext>
             </a:extLst>
           </p:cNvPr>
@@ -3326,7 +2496,7 @@
           <p:cNvPr id="9" name="Slide Number Placeholder 8">
             <a:extLst>
               <a:ext uri="{FF2B5EF4-FFF2-40B4-BE49-F238E27FC236}">
-                <a16:creationId xmlns:a16="http://schemas.microsoft.com/office/drawing/2014/main" id="{4868C6E9-F29F-4553-9A5C-540FBA1938F8}"/>
+                <a16:creationId xmlns:a16="http://schemas.microsoft.com/office/drawing/2014/main" id="{162E7ECC-B85E-4548-95BB-4E51F0ED8C20}"/>
               </a:ext>
             </a:extLst>
           </p:cNvPr>
@@ -3342,7 +2512,7 @@
           <a:bodyPr/>
           <a:lstStyle/>
           <a:p>
-            <a:fld id="{3F765E82-E662-4828-895E-A52D6DF7EF71}" type="slidenum">
+            <a:fld id="{AEFCB7D9-F698-42F3-AB6E-1BDE4CEE259A}" type="slidenum">
               <a:rPr lang="en-US" smtClean="0"/>
               <a:t>‹#›</a:t>
             </a:fld>
@@ -3353,7 +2523,7 @@
     </p:spTree>
     <p:extLst>
       <p:ext uri="{BB962C8B-B14F-4D97-AF65-F5344CB8AC3E}">
-        <p14:creationId xmlns:p14="http://schemas.microsoft.com/office/powerpoint/2010/main" val="465691425"/>
+        <p14:creationId xmlns:p14="http://schemas.microsoft.com/office/powerpoint/2010/main" val="1633504791"/>
       </p:ext>
     </p:extLst>
   </p:cSld>
@@ -3364,7 +2534,7 @@
 </file>
 
 <file path=ppt/slideLayouts/slideLayout6.xml><?xml version="1.0" encoding="utf-8"?>
-<p:sldLayout xmlns:a="http://schemas.openxmlformats.org/drawingml/2006/main" xmlns:r="http://schemas.openxmlformats.org/officeDocument/2006/relationships" xmlns:p="http://schemas.openxmlformats.org/presentationml/2006/main" type="titleOnly">
+<p:sldLayout xmlns:a="http://schemas.openxmlformats.org/drawingml/2006/main" xmlns:r="http://schemas.openxmlformats.org/officeDocument/2006/relationships" xmlns:p="http://schemas.openxmlformats.org/presentationml/2006/main" type="titleOnly" preserve="1">
   <p:cSld name="Title Only">
     <p:spTree>
       <p:nvGrpSpPr>
@@ -3382,18 +2552,18 @@
       </p:grpSpPr>
       <p:sp>
         <p:nvSpPr>
-          <p:cNvPr id="3" name="Date Placeholder 2">
-            <a:extLst>
-              <a:ext uri="{FF2B5EF4-FFF2-40B4-BE49-F238E27FC236}">
-                <a16:creationId xmlns:a16="http://schemas.microsoft.com/office/drawing/2014/main" id="{65DD3252-1BA6-33B4-74A0-B9A235DFB7A6}"/>
-              </a:ext>
-            </a:extLst>
-          </p:cNvPr>
-          <p:cNvSpPr>
-            <a:spLocks noGrp="1"/>
-          </p:cNvSpPr>
-          <p:nvPr>
-            <p:ph type="dt" sz="half" idx="10"/>
+          <p:cNvPr id="2" name="Title 1">
+            <a:extLst>
+              <a:ext uri="{FF2B5EF4-FFF2-40B4-BE49-F238E27FC236}">
+                <a16:creationId xmlns:a16="http://schemas.microsoft.com/office/drawing/2014/main" id="{DE59F33F-97AB-A4B1-2471-3C0358135790}"/>
+              </a:ext>
+            </a:extLst>
+          </p:cNvPr>
+          <p:cNvSpPr>
+            <a:spLocks noGrp="1"/>
+          </p:cNvSpPr>
+          <p:nvPr>
+            <p:ph type="title"/>
           </p:nvPr>
         </p:nvSpPr>
         <p:spPr/>
@@ -3401,9 +2571,37 @@
           <a:bodyPr/>
           <a:lstStyle/>
           <a:p>
-            <a:fld id="{070B2E1F-715B-42E3-BD94-DCAA777AA146}" type="datetimeFigureOut">
+            <a:r>
+              <a:rPr lang="en-US"/>
+              <a:t>Click to edit Master title style</a:t>
+            </a:r>
+          </a:p>
+        </p:txBody>
+      </p:sp>
+      <p:sp>
+        <p:nvSpPr>
+          <p:cNvPr id="3" name="Date Placeholder 2">
+            <a:extLst>
+              <a:ext uri="{FF2B5EF4-FFF2-40B4-BE49-F238E27FC236}">
+                <a16:creationId xmlns:a16="http://schemas.microsoft.com/office/drawing/2014/main" id="{A734D555-9CB6-D101-C2E1-C99E587B65E2}"/>
+              </a:ext>
+            </a:extLst>
+          </p:cNvPr>
+          <p:cNvSpPr>
+            <a:spLocks noGrp="1"/>
+          </p:cNvSpPr>
+          <p:nvPr>
+            <p:ph type="dt" sz="half" idx="10"/>
+          </p:nvPr>
+        </p:nvSpPr>
+        <p:spPr/>
+        <p:txBody>
+          <a:bodyPr/>
+          <a:lstStyle/>
+          <a:p>
+            <a:fld id="{7AB22B7B-1CB4-4BCF-B3B8-386ACCCC7438}" type="datetime1">
               <a:rPr lang="en-US" smtClean="0"/>
-              <a:t>5/26/2026</a:t>
+              <a:t>4/22/2026</a:t>
             </a:fld>
             <a:endParaRPr lang="en-US"/>
           </a:p>
@@ -3414,7 +2612,7 @@
           <p:cNvPr id="4" name="Footer Placeholder 3">
             <a:extLst>
               <a:ext uri="{FF2B5EF4-FFF2-40B4-BE49-F238E27FC236}">
-                <a16:creationId xmlns:a16="http://schemas.microsoft.com/office/drawing/2014/main" id="{B11C7106-0118-E466-3E8B-3FBC2E6280E1}"/>
+                <a16:creationId xmlns:a16="http://schemas.microsoft.com/office/drawing/2014/main" id="{01AD9240-586E-813D-D3D3-60A37F24E2DF}"/>
               </a:ext>
             </a:extLst>
           </p:cNvPr>
@@ -3439,7 +2637,7 @@
           <p:cNvPr id="5" name="Slide Number Placeholder 4">
             <a:extLst>
               <a:ext uri="{FF2B5EF4-FFF2-40B4-BE49-F238E27FC236}">
-                <a16:creationId xmlns:a16="http://schemas.microsoft.com/office/drawing/2014/main" id="{5950D71B-E57A-896F-8711-9B24CE6018C3}"/>
+                <a16:creationId xmlns:a16="http://schemas.microsoft.com/office/drawing/2014/main" id="{E932858F-AB37-9A4D-B3DE-C9BD875689F6}"/>
               </a:ext>
             </a:extLst>
           </p:cNvPr>
@@ -3455,7 +2653,7 @@
           <a:bodyPr/>
           <a:lstStyle/>
           <a:p>
-            <a:fld id="{3F765E82-E662-4828-895E-A52D6DF7EF71}" type="slidenum">
+            <a:fld id="{AEFCB7D9-F698-42F3-AB6E-1BDE4CEE259A}" type="slidenum">
               <a:rPr lang="en-US" smtClean="0"/>
               <a:t>‹#›</a:t>
             </a:fld>
@@ -3466,7 +2664,7 @@
     </p:spTree>
     <p:extLst>
       <p:ext uri="{BB962C8B-B14F-4D97-AF65-F5344CB8AC3E}">
-        <p14:creationId xmlns:p14="http://schemas.microsoft.com/office/powerpoint/2010/main" val="1526702349"/>
+        <p14:creationId xmlns:p14="http://schemas.microsoft.com/office/powerpoint/2010/main" val="2531142750"/>
       </p:ext>
     </p:extLst>
   </p:cSld>
@@ -3477,7 +2675,7 @@
 </file>
 
 <file path=ppt/slideLayouts/slideLayout7.xml><?xml version="1.0" encoding="utf-8"?>
-<p:sldLayout xmlns:a="http://schemas.openxmlformats.org/drawingml/2006/main" xmlns:r="http://schemas.openxmlformats.org/officeDocument/2006/relationships" xmlns:p="http://schemas.openxmlformats.org/presentationml/2006/main" type="blank">
+<p:sldLayout xmlns:a="http://schemas.openxmlformats.org/drawingml/2006/main" xmlns:r="http://schemas.openxmlformats.org/officeDocument/2006/relationships" xmlns:p="http://schemas.openxmlformats.org/presentationml/2006/main" type="blank" preserve="1">
   <p:cSld name="Blank">
     <p:spTree>
       <p:nvGrpSpPr>
@@ -3498,7 +2696,7 @@
           <p:cNvPr id="2" name="Date Placeholder 1">
             <a:extLst>
               <a:ext uri="{FF2B5EF4-FFF2-40B4-BE49-F238E27FC236}">
-                <a16:creationId xmlns:a16="http://schemas.microsoft.com/office/drawing/2014/main" id="{31ECE7EE-2C0B-B058-A260-E1481D74943F}"/>
+                <a16:creationId xmlns:a16="http://schemas.microsoft.com/office/drawing/2014/main" id="{4CC0B9AC-7D57-0693-480A-CC9CBE11914C}"/>
               </a:ext>
             </a:extLst>
           </p:cNvPr>
@@ -3514,9 +2712,9 @@
           <a:bodyPr/>
           <a:lstStyle/>
           <a:p>
-            <a:fld id="{070B2E1F-715B-42E3-BD94-DCAA777AA146}" type="datetimeFigureOut">
+            <a:fld id="{1CA0D178-CB7D-4AB2-A71A-72E612B4A18A}" type="datetime1">
               <a:rPr lang="en-US" smtClean="0"/>
-              <a:t>5/26/2026</a:t>
+              <a:t>4/22/2026</a:t>
             </a:fld>
             <a:endParaRPr lang="en-US"/>
           </a:p>
@@ -3527,7 +2725,7 @@
           <p:cNvPr id="3" name="Footer Placeholder 2">
             <a:extLst>
               <a:ext uri="{FF2B5EF4-FFF2-40B4-BE49-F238E27FC236}">
-                <a16:creationId xmlns:a16="http://schemas.microsoft.com/office/drawing/2014/main" id="{7AA839B1-DE87-7FBB-E57E-0A22770715A0}"/>
+                <a16:creationId xmlns:a16="http://schemas.microsoft.com/office/drawing/2014/main" id="{7B106D2B-F56A-E7E6-0260-4213603574C5}"/>
               </a:ext>
             </a:extLst>
           </p:cNvPr>
@@ -3552,7 +2750,7 @@
           <p:cNvPr id="4" name="Slide Number Placeholder 3">
             <a:extLst>
               <a:ext uri="{FF2B5EF4-FFF2-40B4-BE49-F238E27FC236}">
-                <a16:creationId xmlns:a16="http://schemas.microsoft.com/office/drawing/2014/main" id="{E2A17751-87C7-57EE-7D6D-7497C9430664}"/>
+                <a16:creationId xmlns:a16="http://schemas.microsoft.com/office/drawing/2014/main" id="{9A48728A-51BC-DC7E-092E-1B3E57B450D1}"/>
               </a:ext>
             </a:extLst>
           </p:cNvPr>
@@ -3568,7 +2766,7 @@
           <a:bodyPr/>
           <a:lstStyle/>
           <a:p>
-            <a:fld id="{3F765E82-E662-4828-895E-A52D6DF7EF71}" type="slidenum">
+            <a:fld id="{AEFCB7D9-F698-42F3-AB6E-1BDE4CEE259A}" type="slidenum">
               <a:rPr lang="en-US" smtClean="0"/>
               <a:t>‹#›</a:t>
             </a:fld>
@@ -3579,7 +2777,7 @@
     </p:spTree>
     <p:extLst>
       <p:ext uri="{BB962C8B-B14F-4D97-AF65-F5344CB8AC3E}">
-        <p14:creationId xmlns:p14="http://schemas.microsoft.com/office/powerpoint/2010/main" val="3222805641"/>
+        <p14:creationId xmlns:p14="http://schemas.microsoft.com/office/powerpoint/2010/main" val="3764071916"/>
       </p:ext>
     </p:extLst>
   </p:cSld>
@@ -3590,7 +2788,7 @@
 </file>
 
 <file path=ppt/slideLayouts/slideLayout8.xml><?xml version="1.0" encoding="utf-8"?>
-<p:sldLayout xmlns:a="http://schemas.openxmlformats.org/drawingml/2006/main" xmlns:r="http://schemas.openxmlformats.org/officeDocument/2006/relationships" xmlns:p="http://schemas.openxmlformats.org/presentationml/2006/main" type="objTx">
+<p:sldLayout xmlns:a="http://schemas.openxmlformats.org/drawingml/2006/main" xmlns:r="http://schemas.openxmlformats.org/officeDocument/2006/relationships" xmlns:p="http://schemas.openxmlformats.org/presentationml/2006/main" type="objTx" preserve="1">
   <p:cSld name="Content with Caption">
     <p:spTree>
       <p:nvGrpSpPr>
@@ -3608,10 +2806,208 @@
       </p:grpSpPr>
       <p:sp>
         <p:nvSpPr>
+          <p:cNvPr id="2" name="Title 1">
+            <a:extLst>
+              <a:ext uri="{FF2B5EF4-FFF2-40B4-BE49-F238E27FC236}">
+                <a16:creationId xmlns:a16="http://schemas.microsoft.com/office/drawing/2014/main" id="{B580EE57-A3EA-C512-01F3-CE680FFC58C0}"/>
+              </a:ext>
+            </a:extLst>
+          </p:cNvPr>
+          <p:cNvSpPr>
+            <a:spLocks noGrp="1"/>
+          </p:cNvSpPr>
+          <p:nvPr>
+            <p:ph type="title"/>
+          </p:nvPr>
+        </p:nvSpPr>
+        <p:spPr>
+          <a:xfrm>
+            <a:off x="839788" y="457200"/>
+            <a:ext cx="3932237" cy="1600200"/>
+          </a:xfrm>
+        </p:spPr>
+        <p:txBody>
+          <a:bodyPr anchor="b"/>
+          <a:lstStyle>
+            <a:lvl1pPr>
+              <a:defRPr sz="3200"/>
+            </a:lvl1pPr>
+          </a:lstStyle>
+          <a:p>
+            <a:r>
+              <a:rPr lang="en-US"/>
+              <a:t>Click to edit Master title style</a:t>
+            </a:r>
+          </a:p>
+        </p:txBody>
+      </p:sp>
+      <p:sp>
+        <p:nvSpPr>
+          <p:cNvPr id="3" name="Content Placeholder 2">
+            <a:extLst>
+              <a:ext uri="{FF2B5EF4-FFF2-40B4-BE49-F238E27FC236}">
+                <a16:creationId xmlns:a16="http://schemas.microsoft.com/office/drawing/2014/main" id="{E4CCAFC9-6152-C2EB-BCE8-231C0F56C596}"/>
+              </a:ext>
+            </a:extLst>
+          </p:cNvPr>
+          <p:cNvSpPr>
+            <a:spLocks noGrp="1"/>
+          </p:cNvSpPr>
+          <p:nvPr>
+            <p:ph idx="1"/>
+          </p:nvPr>
+        </p:nvSpPr>
+        <p:spPr>
+          <a:xfrm>
+            <a:off x="5183188" y="987425"/>
+            <a:ext cx="6172200" cy="4873625"/>
+          </a:xfrm>
+        </p:spPr>
+        <p:txBody>
+          <a:bodyPr/>
+          <a:lstStyle>
+            <a:lvl1pPr>
+              <a:defRPr sz="3200"/>
+            </a:lvl1pPr>
+            <a:lvl2pPr>
+              <a:defRPr sz="2800"/>
+            </a:lvl2pPr>
+            <a:lvl3pPr>
+              <a:defRPr sz="2400"/>
+            </a:lvl3pPr>
+            <a:lvl4pPr>
+              <a:defRPr sz="2000"/>
+            </a:lvl4pPr>
+            <a:lvl5pPr>
+              <a:defRPr sz="2000"/>
+            </a:lvl5pPr>
+            <a:lvl6pPr>
+              <a:defRPr sz="2000"/>
+            </a:lvl6pPr>
+            <a:lvl7pPr>
+              <a:defRPr sz="2000"/>
+            </a:lvl7pPr>
+            <a:lvl8pPr>
+              <a:defRPr sz="2000"/>
+            </a:lvl8pPr>
+            <a:lvl9pPr>
+              <a:defRPr sz="2000"/>
+            </a:lvl9pPr>
+          </a:lstStyle>
+          <a:p>
+            <a:pPr lvl="0"/>
+            <a:r>
+              <a:rPr lang="en-US"/>
+              <a:t>Click to edit Master text styles</a:t>
+            </a:r>
+          </a:p>
+          <a:p>
+            <a:pPr lvl="1"/>
+            <a:r>
+              <a:rPr lang="en-US"/>
+              <a:t>Second level</a:t>
+            </a:r>
+          </a:p>
+          <a:p>
+            <a:pPr lvl="2"/>
+            <a:r>
+              <a:rPr lang="en-US"/>
+              <a:t>Third level</a:t>
+            </a:r>
+          </a:p>
+          <a:p>
+            <a:pPr lvl="3"/>
+            <a:r>
+              <a:rPr lang="en-US"/>
+              <a:t>Fourth level</a:t>
+            </a:r>
+          </a:p>
+          <a:p>
+            <a:pPr lvl="4"/>
+            <a:r>
+              <a:rPr lang="en-US"/>
+              <a:t>Fifth level</a:t>
+            </a:r>
+          </a:p>
+        </p:txBody>
+      </p:sp>
+      <p:sp>
+        <p:nvSpPr>
+          <p:cNvPr id="4" name="Text Placeholder 3">
+            <a:extLst>
+              <a:ext uri="{FF2B5EF4-FFF2-40B4-BE49-F238E27FC236}">
+                <a16:creationId xmlns:a16="http://schemas.microsoft.com/office/drawing/2014/main" id="{EE10FBEC-DCD8-0173-9E27-8A18D4943C33}"/>
+              </a:ext>
+            </a:extLst>
+          </p:cNvPr>
+          <p:cNvSpPr>
+            <a:spLocks noGrp="1"/>
+          </p:cNvSpPr>
+          <p:nvPr>
+            <p:ph type="body" sz="half" idx="2"/>
+          </p:nvPr>
+        </p:nvSpPr>
+        <p:spPr>
+          <a:xfrm>
+            <a:off x="839788" y="2057400"/>
+            <a:ext cx="3932237" cy="3811588"/>
+          </a:xfrm>
+        </p:spPr>
+        <p:txBody>
+          <a:bodyPr/>
+          <a:lstStyle>
+            <a:lvl1pPr marL="0" indent="0">
+              <a:buNone/>
+              <a:defRPr sz="1600"/>
+            </a:lvl1pPr>
+            <a:lvl2pPr marL="457200" indent="0">
+              <a:buNone/>
+              <a:defRPr sz="1400"/>
+            </a:lvl2pPr>
+            <a:lvl3pPr marL="914400" indent="0">
+              <a:buNone/>
+              <a:defRPr sz="1200"/>
+            </a:lvl3pPr>
+            <a:lvl4pPr marL="1371600" indent="0">
+              <a:buNone/>
+              <a:defRPr sz="1000"/>
+            </a:lvl4pPr>
+            <a:lvl5pPr marL="1828800" indent="0">
+              <a:buNone/>
+              <a:defRPr sz="1000"/>
+            </a:lvl5pPr>
+            <a:lvl6pPr marL="2286000" indent="0">
+              <a:buNone/>
+              <a:defRPr sz="1000"/>
+            </a:lvl6pPr>
+            <a:lvl7pPr marL="2743200" indent="0">
+              <a:buNone/>
+              <a:defRPr sz="1000"/>
+            </a:lvl7pPr>
+            <a:lvl8pPr marL="3200400" indent="0">
+              <a:buNone/>
+              <a:defRPr sz="1000"/>
+            </a:lvl8pPr>
+            <a:lvl9pPr marL="3657600" indent="0">
+              <a:buNone/>
+              <a:defRPr sz="1000"/>
+            </a:lvl9pPr>
+          </a:lstStyle>
+          <a:p>
+            <a:pPr lvl="0"/>
+            <a:r>
+              <a:rPr lang="en-US"/>
+              <a:t>Click to edit Master text styles</a:t>
+            </a:r>
+          </a:p>
+        </p:txBody>
+      </p:sp>
+      <p:sp>
+        <p:nvSpPr>
           <p:cNvPr id="5" name="Date Placeholder 4">
             <a:extLst>
               <a:ext uri="{FF2B5EF4-FFF2-40B4-BE49-F238E27FC236}">
-                <a16:creationId xmlns:a16="http://schemas.microsoft.com/office/drawing/2014/main" id="{F93D1153-C9B0-0F48-6603-3A6CF33ECDD6}"/>
+                <a16:creationId xmlns:a16="http://schemas.microsoft.com/office/drawing/2014/main" id="{79AD65DA-0CDA-2D24-A7EB-470F1F11BA9B}"/>
               </a:ext>
             </a:extLst>
           </p:cNvPr>
@@ -3627,9 +3023,9 @@
           <a:bodyPr/>
           <a:lstStyle/>
           <a:p>
-            <a:fld id="{070B2E1F-715B-42E3-BD94-DCAA777AA146}" type="datetimeFigureOut">
+            <a:fld id="{05AE9CBF-ED1B-480D-9057-EA6A43181D12}" type="datetime1">
               <a:rPr lang="en-US" smtClean="0"/>
-              <a:t>5/26/2026</a:t>
+              <a:t>4/22/2026</a:t>
             </a:fld>
             <a:endParaRPr lang="en-US"/>
           </a:p>
@@ -3640,7 +3036,7 @@
           <p:cNvPr id="6" name="Footer Placeholder 5">
             <a:extLst>
               <a:ext uri="{FF2B5EF4-FFF2-40B4-BE49-F238E27FC236}">
-                <a16:creationId xmlns:a16="http://schemas.microsoft.com/office/drawing/2014/main" id="{ACC80689-92C8-6AFA-8559-D0A7B6A4D8EA}"/>
+                <a16:creationId xmlns:a16="http://schemas.microsoft.com/office/drawing/2014/main" id="{B6C12886-3D1A-3D80-BC07-DBA7135B0DDF}"/>
               </a:ext>
             </a:extLst>
           </p:cNvPr>
@@ -3665,7 +3061,7 @@
           <p:cNvPr id="7" name="Slide Number Placeholder 6">
             <a:extLst>
               <a:ext uri="{FF2B5EF4-FFF2-40B4-BE49-F238E27FC236}">
-                <a16:creationId xmlns:a16="http://schemas.microsoft.com/office/drawing/2014/main" id="{DCD6148F-0CCD-FAE4-0F9A-6D98FB55C476}"/>
+                <a16:creationId xmlns:a16="http://schemas.microsoft.com/office/drawing/2014/main" id="{C2A2042B-4E7D-5F3A-FD90-99B64D94DCA7}"/>
               </a:ext>
             </a:extLst>
           </p:cNvPr>
@@ -3681,7 +3077,7 @@
           <a:bodyPr/>
           <a:lstStyle/>
           <a:p>
-            <a:fld id="{3F765E82-E662-4828-895E-A52D6DF7EF71}" type="slidenum">
+            <a:fld id="{AEFCB7D9-F698-42F3-AB6E-1BDE4CEE259A}" type="slidenum">
               <a:rPr lang="en-US" smtClean="0"/>
               <a:t>‹#›</a:t>
             </a:fld>
@@ -3692,7 +3088,7 @@
     </p:spTree>
     <p:extLst>
       <p:ext uri="{BB962C8B-B14F-4D97-AF65-F5344CB8AC3E}">
-        <p14:creationId xmlns:p14="http://schemas.microsoft.com/office/powerpoint/2010/main" val="943464332"/>
+        <p14:creationId xmlns:p14="http://schemas.microsoft.com/office/powerpoint/2010/main" val="3523169776"/>
       </p:ext>
     </p:extLst>
   </p:cSld>
@@ -3703,7 +3099,7 @@
 </file>
 
 <file path=ppt/slideLayouts/slideLayout9.xml><?xml version="1.0" encoding="utf-8"?>
-<p:sldLayout xmlns:a="http://schemas.openxmlformats.org/drawingml/2006/main" xmlns:r="http://schemas.openxmlformats.org/officeDocument/2006/relationships" xmlns:p="http://schemas.openxmlformats.org/presentationml/2006/main" type="picTx">
+<p:sldLayout xmlns:a="http://schemas.openxmlformats.org/drawingml/2006/main" xmlns:r="http://schemas.openxmlformats.org/officeDocument/2006/relationships" xmlns:p="http://schemas.openxmlformats.org/presentationml/2006/main" type="picTx" preserve="1">
   <p:cSld name="Picture with Caption">
     <p:spTree>
       <p:nvGrpSpPr>
@@ -3721,10 +3117,185 @@
       </p:grpSpPr>
       <p:sp>
         <p:nvSpPr>
+          <p:cNvPr id="2" name="Title 1">
+            <a:extLst>
+              <a:ext uri="{FF2B5EF4-FFF2-40B4-BE49-F238E27FC236}">
+                <a16:creationId xmlns:a16="http://schemas.microsoft.com/office/drawing/2014/main" id="{7DAA1EBA-D39F-9D24-CF1A-0F16D9CDAB3C}"/>
+              </a:ext>
+            </a:extLst>
+          </p:cNvPr>
+          <p:cNvSpPr>
+            <a:spLocks noGrp="1"/>
+          </p:cNvSpPr>
+          <p:nvPr>
+            <p:ph type="title"/>
+          </p:nvPr>
+        </p:nvSpPr>
+        <p:spPr>
+          <a:xfrm>
+            <a:off x="839788" y="457200"/>
+            <a:ext cx="3932237" cy="1600200"/>
+          </a:xfrm>
+        </p:spPr>
+        <p:txBody>
+          <a:bodyPr anchor="b"/>
+          <a:lstStyle>
+            <a:lvl1pPr>
+              <a:defRPr sz="3200"/>
+            </a:lvl1pPr>
+          </a:lstStyle>
+          <a:p>
+            <a:r>
+              <a:rPr lang="en-US"/>
+              <a:t>Click to edit Master title style</a:t>
+            </a:r>
+          </a:p>
+        </p:txBody>
+      </p:sp>
+      <p:sp>
+        <p:nvSpPr>
+          <p:cNvPr id="3" name="Picture Placeholder 2">
+            <a:extLst>
+              <a:ext uri="{FF2B5EF4-FFF2-40B4-BE49-F238E27FC236}">
+                <a16:creationId xmlns:a16="http://schemas.microsoft.com/office/drawing/2014/main" id="{357D77D0-A5B7-5136-CB5F-136A16EA3BC4}"/>
+              </a:ext>
+            </a:extLst>
+          </p:cNvPr>
+          <p:cNvSpPr>
+            <a:spLocks noGrp="1"/>
+          </p:cNvSpPr>
+          <p:nvPr>
+            <p:ph type="pic" idx="1"/>
+          </p:nvPr>
+        </p:nvSpPr>
+        <p:spPr>
+          <a:xfrm>
+            <a:off x="5183188" y="987425"/>
+            <a:ext cx="6172200" cy="4873625"/>
+          </a:xfrm>
+        </p:spPr>
+        <p:txBody>
+          <a:bodyPr/>
+          <a:lstStyle>
+            <a:lvl1pPr marL="0" indent="0">
+              <a:buNone/>
+              <a:defRPr sz="3200"/>
+            </a:lvl1pPr>
+            <a:lvl2pPr marL="457200" indent="0">
+              <a:buNone/>
+              <a:defRPr sz="2800"/>
+            </a:lvl2pPr>
+            <a:lvl3pPr marL="914400" indent="0">
+              <a:buNone/>
+              <a:defRPr sz="2400"/>
+            </a:lvl3pPr>
+            <a:lvl4pPr marL="1371600" indent="0">
+              <a:buNone/>
+              <a:defRPr sz="2000"/>
+            </a:lvl4pPr>
+            <a:lvl5pPr marL="1828800" indent="0">
+              <a:buNone/>
+              <a:defRPr sz="2000"/>
+            </a:lvl5pPr>
+            <a:lvl6pPr marL="2286000" indent="0">
+              <a:buNone/>
+              <a:defRPr sz="2000"/>
+            </a:lvl6pPr>
+            <a:lvl7pPr marL="2743200" indent="0">
+              <a:buNone/>
+              <a:defRPr sz="2000"/>
+            </a:lvl7pPr>
+            <a:lvl8pPr marL="3200400" indent="0">
+              <a:buNone/>
+              <a:defRPr sz="2000"/>
+            </a:lvl8pPr>
+            <a:lvl9pPr marL="3657600" indent="0">
+              <a:buNone/>
+              <a:defRPr sz="2000"/>
+            </a:lvl9pPr>
+          </a:lstStyle>
+          <a:p>
+            <a:endParaRPr lang="en-US"/>
+          </a:p>
+        </p:txBody>
+      </p:sp>
+      <p:sp>
+        <p:nvSpPr>
+          <p:cNvPr id="4" name="Text Placeholder 3">
+            <a:extLst>
+              <a:ext uri="{FF2B5EF4-FFF2-40B4-BE49-F238E27FC236}">
+                <a16:creationId xmlns:a16="http://schemas.microsoft.com/office/drawing/2014/main" id="{F829B237-F7AD-B7E6-7045-A756A81D7791}"/>
+              </a:ext>
+            </a:extLst>
+          </p:cNvPr>
+          <p:cNvSpPr>
+            <a:spLocks noGrp="1"/>
+          </p:cNvSpPr>
+          <p:nvPr>
+            <p:ph type="body" sz="half" idx="2"/>
+          </p:nvPr>
+        </p:nvSpPr>
+        <p:spPr>
+          <a:xfrm>
+            <a:off x="839788" y="2057400"/>
+            <a:ext cx="3932237" cy="3811588"/>
+          </a:xfrm>
+        </p:spPr>
+        <p:txBody>
+          <a:bodyPr/>
+          <a:lstStyle>
+            <a:lvl1pPr marL="0" indent="0">
+              <a:buNone/>
+              <a:defRPr sz="1600"/>
+            </a:lvl1pPr>
+            <a:lvl2pPr marL="457200" indent="0">
+              <a:buNone/>
+              <a:defRPr sz="1400"/>
+            </a:lvl2pPr>
+            <a:lvl3pPr marL="914400" indent="0">
+              <a:buNone/>
+              <a:defRPr sz="1200"/>
+            </a:lvl3pPr>
+            <a:lvl4pPr marL="1371600" indent="0">
+              <a:buNone/>
+              <a:defRPr sz="1000"/>
+            </a:lvl4pPr>
+            <a:lvl5pPr marL="1828800" indent="0">
+              <a:buNone/>
+              <a:defRPr sz="1000"/>
+            </a:lvl5pPr>
+            <a:lvl6pPr marL="2286000" indent="0">
+              <a:buNone/>
+              <a:defRPr sz="1000"/>
+            </a:lvl6pPr>
+            <a:lvl7pPr marL="2743200" indent="0">
+              <a:buNone/>
+              <a:defRPr sz="1000"/>
+            </a:lvl7pPr>
+            <a:lvl8pPr marL="3200400" indent="0">
+              <a:buNone/>
+              <a:defRPr sz="1000"/>
+            </a:lvl8pPr>
+            <a:lvl9pPr marL="3657600" indent="0">
+              <a:buNone/>
+              <a:defRPr sz="1000"/>
+            </a:lvl9pPr>
+          </a:lstStyle>
+          <a:p>
+            <a:pPr lvl="0"/>
+            <a:r>
+              <a:rPr lang="en-US"/>
+              <a:t>Click to edit Master text styles</a:t>
+            </a:r>
+          </a:p>
+        </p:txBody>
+      </p:sp>
+      <p:sp>
+        <p:nvSpPr>
           <p:cNvPr id="5" name="Date Placeholder 4">
             <a:extLst>
               <a:ext uri="{FF2B5EF4-FFF2-40B4-BE49-F238E27FC236}">
-                <a16:creationId xmlns:a16="http://schemas.microsoft.com/office/drawing/2014/main" id="{E24B0A96-A333-7B5A-0BE7-7C6D42288B5E}"/>
+                <a16:creationId xmlns:a16="http://schemas.microsoft.com/office/drawing/2014/main" id="{79376613-14CC-5BCF-8588-FC72B72B13AC}"/>
               </a:ext>
             </a:extLst>
           </p:cNvPr>
@@ -3740,9 +3311,9 @@
           <a:bodyPr/>
           <a:lstStyle/>
           <a:p>
-            <a:fld id="{070B2E1F-715B-42E3-BD94-DCAA777AA146}" type="datetimeFigureOut">
+            <a:fld id="{CF917267-26F3-4C0B-A203-A3F27F0467DE}" type="datetime1">
               <a:rPr lang="en-US" smtClean="0"/>
-              <a:t>5/26/2026</a:t>
+              <a:t>4/22/2026</a:t>
             </a:fld>
             <a:endParaRPr lang="en-US"/>
           </a:p>
@@ -3753,7 +3324,7 @@
           <p:cNvPr id="6" name="Footer Placeholder 5">
             <a:extLst>
               <a:ext uri="{FF2B5EF4-FFF2-40B4-BE49-F238E27FC236}">
-                <a16:creationId xmlns:a16="http://schemas.microsoft.com/office/drawing/2014/main" id="{AF156811-973F-75B7-837A-EB7DB9094CEA}"/>
+                <a16:creationId xmlns:a16="http://schemas.microsoft.com/office/drawing/2014/main" id="{501732C0-1D0A-92DA-B3F0-26AC65DFF3AF}"/>
               </a:ext>
             </a:extLst>
           </p:cNvPr>
@@ -3778,7 +3349,7 @@
           <p:cNvPr id="7" name="Slide Number Placeholder 6">
             <a:extLst>
               <a:ext uri="{FF2B5EF4-FFF2-40B4-BE49-F238E27FC236}">
-                <a16:creationId xmlns:a16="http://schemas.microsoft.com/office/drawing/2014/main" id="{D520627F-FDCB-8137-ED6F-28B92D12D071}"/>
+                <a16:creationId xmlns:a16="http://schemas.microsoft.com/office/drawing/2014/main" id="{AE853345-8FD2-5677-C461-ADD6734A76DC}"/>
               </a:ext>
             </a:extLst>
           </p:cNvPr>
@@ -3794,7 +3365,7 @@
           <a:bodyPr/>
           <a:lstStyle/>
           <a:p>
-            <a:fld id="{3F765E82-E662-4828-895E-A52D6DF7EF71}" type="slidenum">
+            <a:fld id="{AEFCB7D9-F698-42F3-AB6E-1BDE4CEE259A}" type="slidenum">
               <a:rPr lang="en-US" smtClean="0"/>
               <a:t>‹#›</a:t>
             </a:fld>
@@ -3805,7 +3376,7 @@
     </p:spTree>
     <p:extLst>
       <p:ext uri="{BB962C8B-B14F-4D97-AF65-F5344CB8AC3E}">
-        <p14:creationId xmlns:p14="http://schemas.microsoft.com/office/powerpoint/2010/main" val="467237882"/>
+        <p14:creationId xmlns:p14="http://schemas.microsoft.com/office/powerpoint/2010/main" val="1458185477"/>
       </p:ext>
     </p:extLst>
   </p:cSld>
@@ -3842,7 +3413,7 @@
           <p:cNvPr id="2" name="Title Placeholder 1">
             <a:extLst>
               <a:ext uri="{FF2B5EF4-FFF2-40B4-BE49-F238E27FC236}">
-                <a16:creationId xmlns:a16="http://schemas.microsoft.com/office/drawing/2014/main" id="{2BCD135A-16EF-CD8D-CE60-0DD069F30FA5}"/>
+                <a16:creationId xmlns:a16="http://schemas.microsoft.com/office/drawing/2014/main" id="{830C20DB-A5EE-C90D-EA24-5BA9AFFB9044}"/>
               </a:ext>
             </a:extLst>
           </p:cNvPr>
@@ -3880,7 +3451,7 @@
           <p:cNvPr id="3" name="Text Placeholder 2">
             <a:extLst>
               <a:ext uri="{FF2B5EF4-FFF2-40B4-BE49-F238E27FC236}">
-                <a16:creationId xmlns:a16="http://schemas.microsoft.com/office/drawing/2014/main" id="{A28135D2-6437-AD55-7F4A-2999F4676239}"/>
+                <a16:creationId xmlns:a16="http://schemas.microsoft.com/office/drawing/2014/main" id="{6EFC5580-09D2-4B05-3D6E-35F061F7A846}"/>
               </a:ext>
             </a:extLst>
           </p:cNvPr>
@@ -3947,7 +3518,7 @@
           <p:cNvPr id="4" name="Date Placeholder 3">
             <a:extLst>
               <a:ext uri="{FF2B5EF4-FFF2-40B4-BE49-F238E27FC236}">
-                <a16:creationId xmlns:a16="http://schemas.microsoft.com/office/drawing/2014/main" id="{5E425B88-31C3-E607-8CD8-45FF8451598F}"/>
+                <a16:creationId xmlns:a16="http://schemas.microsoft.com/office/drawing/2014/main" id="{C8DED026-D51D-5144-3205-DAE5B4521F91}"/>
               </a:ext>
             </a:extLst>
           </p:cNvPr>
@@ -3981,9 +3552,9 @@
             </a:lvl1pPr>
           </a:lstStyle>
           <a:p>
-            <a:fld id="{070B2E1F-715B-42E3-BD94-DCAA777AA146}" type="datetimeFigureOut">
+            <a:fld id="{320CA882-826D-4D73-83CA-177D29626536}" type="datetime1">
               <a:rPr lang="en-US" smtClean="0"/>
-              <a:t>5/26/2026</a:t>
+              <a:t>4/22/2026</a:t>
             </a:fld>
             <a:endParaRPr lang="en-US"/>
           </a:p>
@@ -3994,7 +3565,7 @@
           <p:cNvPr id="5" name="Footer Placeholder 4">
             <a:extLst>
               <a:ext uri="{FF2B5EF4-FFF2-40B4-BE49-F238E27FC236}">
-                <a16:creationId xmlns:a16="http://schemas.microsoft.com/office/drawing/2014/main" id="{7EDF3AEE-E09C-245E-5660-5B3719015DE5}"/>
+                <a16:creationId xmlns:a16="http://schemas.microsoft.com/office/drawing/2014/main" id="{1C1BD554-81C8-99DB-21DA-824328E922EE}"/>
               </a:ext>
             </a:extLst>
           </p:cNvPr>
@@ -4037,7 +3608,7 @@
           <p:cNvPr id="6" name="Slide Number Placeholder 5">
             <a:extLst>
               <a:ext uri="{FF2B5EF4-FFF2-40B4-BE49-F238E27FC236}">
-                <a16:creationId xmlns:a16="http://schemas.microsoft.com/office/drawing/2014/main" id="{CD804E17-00AE-8DDB-43CF-E4F7DAE7B996}"/>
+                <a16:creationId xmlns:a16="http://schemas.microsoft.com/office/drawing/2014/main" id="{ACC9C165-153D-6A0F-53CF-6484E3A517BF}"/>
               </a:ext>
             </a:extLst>
           </p:cNvPr>
@@ -4071,7 +3642,7 @@
             </a:lvl1pPr>
           </a:lstStyle>
           <a:p>
-            <a:fld id="{3F765E82-E662-4828-895E-A52D6DF7EF71}" type="slidenum">
+            <a:fld id="{AEFCB7D9-F698-42F3-AB6E-1BDE4CEE259A}" type="slidenum">
               <a:rPr lang="en-US" smtClean="0"/>
               <a:t>‹#›</a:t>
             </a:fld>
@@ -4079,136 +3650,28 @@
           </a:p>
         </p:txBody>
       </p:sp>
-      <p:sp>
-        <p:nvSpPr>
-          <p:cNvPr id="7" name="VanadiumFooterBar"/>
-          <p:cNvSpPr/>
-          <p:nvPr userDrawn="1"/>
-        </p:nvSpPr>
-        <p:spPr>
-          <a:xfrm>
-            <a:off x="0" y="6578600"/>
-            <a:ext cx="12192000" cy="279400"/>
-          </a:xfrm>
-          <a:prstGeom prst="rect">
-            <a:avLst/>
-          </a:prstGeom>
-          <a:solidFill>
-            <a:srgbClr val="1A2238"/>
-          </a:solidFill>
-          <a:ln>
-            <a:noFill/>
-          </a:ln>
-        </p:spPr>
-        <p:txBody>
-          <a:bodyPr wrap="none" lIns="0" tIns="0" rIns="0" bIns="0" anchor="ctr"/>
-          <a:lstStyle/>
-          <a:p>
-            <a:endParaRPr lang="en-US"/>
-          </a:p>
-        </p:txBody>
-      </p:sp>
-      <p:sp>
-        <p:nvSpPr>
-          <p:cNvPr id="8" name="VanadiumFooterLeft"/>
-          <p:cNvSpPr txBox="1"/>
-          <p:nvPr userDrawn="1"/>
-        </p:nvSpPr>
-        <p:spPr>
-          <a:xfrm>
-            <a:off x="762000" y="6591300"/>
-            <a:ext cx="6350000" cy="254000"/>
-          </a:xfrm>
-          <a:prstGeom prst="rect">
-            <a:avLst/>
-          </a:prstGeom>
-          <a:noFill/>
-        </p:spPr>
-        <p:txBody>
-          <a:bodyPr wrap="none" lIns="0" tIns="0" rIns="0" bIns="0" anchor="ctr"/>
-          <a:lstStyle/>
-          <a:p>
-            <a:pPr algn="l">
-              <a:buNone/>
-            </a:pPr>
-            <a:r>
-              <a:rPr lang="en-US" sz="800" dirty="0">
-                <a:solidFill>
-                  <a:srgbClr val="FFFFFF"/>
-                </a:solidFill>
-                <a:latin typeface="Arial"/>
-              </a:rPr>
-              <a:t>Vanadium Realty  |  North Park Ventures Florida IOS Strategy</a:t>
-            </a:r>
-          </a:p>
-        </p:txBody>
-      </p:sp>
-      <p:sp>
-        <p:nvSpPr>
-          <p:cNvPr id="9" name="VanadiumFooterPage"/>
-          <p:cNvSpPr>
-            <a:spLocks noGrp="1"/>
-          </p:cNvSpPr>
-          <p:nvPr>
-            <p:ph type="sldNum" sz="quarter" idx="100"/>
-          </p:nvPr>
-        </p:nvSpPr>
-        <p:spPr>
-          <a:xfrm>
-            <a:off x="10922000" y="6591300"/>
-            <a:ext cx="508000" cy="254000"/>
-          </a:xfrm>
-          <a:prstGeom prst="rect">
-            <a:avLst/>
-          </a:prstGeom>
-          <a:noFill/>
-        </p:spPr>
-        <p:txBody>
-          <a:bodyPr wrap="none" lIns="0" tIns="0" rIns="0" bIns="0" anchor="ctr"/>
-          <a:lstStyle/>
-          <a:p>
-            <a:pPr algn="r">
-              <a:buNone/>
-            </a:pPr>
-            <a:fld id="{2F2F2F2F-1111-2222-3333-444444444444}" type="slidenum">
-              <a:rPr lang="en-US" sz="800" dirty="0">
-                <a:solidFill>
-                  <a:srgbClr val="FFFFFF"/>
-                </a:solidFill>
-                <a:latin typeface="Arial"/>
-              </a:rPr>
-              <a:t>‹#›</a:t>
-            </a:fld>
-            <a:endParaRPr lang="en-US" sz="800" dirty="0">
-              <a:solidFill>
-                <a:srgbClr val="FFFFFF"/>
-              </a:solidFill>
-              <a:latin typeface="Arial"/>
-            </a:endParaRPr>
-          </a:p>
-        </p:txBody>
-      </p:sp>
     </p:spTree>
     <p:extLst>
       <p:ext uri="{BB962C8B-B14F-4D97-AF65-F5344CB8AC3E}">
-        <p14:creationId xmlns:p14="http://schemas.microsoft.com/office/powerpoint/2010/main" val="1475608647"/>
+        <p14:creationId xmlns:p14="http://schemas.microsoft.com/office/powerpoint/2010/main" val="1174546542"/>
       </p:ext>
     </p:extLst>
   </p:cSld>
   <p:clrMap bg1="lt1" tx1="dk1" bg2="lt2" tx2="dk2" accent1="accent1" accent2="accent2" accent3="accent3" accent4="accent4" accent5="accent5" accent6="accent6" hlink="hlink" folHlink="folHlink"/>
   <p:sldLayoutIdLst>
-    <p:sldLayoutId id="2147483697" r:id="rId1"/>
-    <p:sldLayoutId id="2147483698" r:id="rId2"/>
-    <p:sldLayoutId id="2147483699" r:id="rId3"/>
-    <p:sldLayoutId id="2147483700" r:id="rId4"/>
-    <p:sldLayoutId id="2147483701" r:id="rId5"/>
-    <p:sldLayoutId id="2147483702" r:id="rId6"/>
-    <p:sldLayoutId id="2147483703" r:id="rId7"/>
-    <p:sldLayoutId id="2147483704" r:id="rId8"/>
-    <p:sldLayoutId id="2147483705" r:id="rId9"/>
-    <p:sldLayoutId id="2147483706" r:id="rId10"/>
-    <p:sldLayoutId id="2147483707" r:id="rId11"/>
+    <p:sldLayoutId id="2147483649" r:id="rId1"/>
+    <p:sldLayoutId id="2147483650" r:id="rId2"/>
+    <p:sldLayoutId id="2147483651" r:id="rId3"/>
+    <p:sldLayoutId id="2147483652" r:id="rId4"/>
+    <p:sldLayoutId id="2147483653" r:id="rId5"/>
+    <p:sldLayoutId id="2147483654" r:id="rId6"/>
+    <p:sldLayoutId id="2147483655" r:id="rId7"/>
+    <p:sldLayoutId id="2147483656" r:id="rId8"/>
+    <p:sldLayoutId id="2147483657" r:id="rId9"/>
+    <p:sldLayoutId id="2147483658" r:id="rId10"/>
+    <p:sldLayoutId id="2147483659" r:id="rId11"/>
   </p:sldLayoutIdLst>
+  <p:hf sldNum="0" hdr="0" ftr="0" dt="0"/>
   <p:txStyles>
     <p:titleStyle>
       <a:lvl1pPr algn="l" defTabSz="914400" rtl="0" eaLnBrk="1" latinLnBrk="0" hangingPunct="1">
@@ -4493,38 +3956,38 @@
 </file>
 
 <file path=ppt/theme/theme1.xml><?xml version="1.0" encoding="utf-8"?>
-<a:theme xmlns:a="http://schemas.openxmlformats.org/drawingml/2006/main" name="Office Theme [1779318211036]">
+<a:theme xmlns:a="http://schemas.openxmlformats.org/drawingml/2006/main" name="Office Theme">
   <a:themeElements>
     <a:clrScheme name="Office">
       <a:dk1>
-        <a:srgbClr val="2D3854"/>
+        <a:sysClr val="windowText" lastClr="000000"/>
       </a:dk1>
       <a:lt1>
-        <a:srgbClr val="FFFFFF"/>
+        <a:sysClr val="window" lastClr="FFFFFF"/>
       </a:lt1>
       <a:dk2>
-        <a:srgbClr val="1A2238"/>
+        <a:srgbClr val="0E2841"/>
       </a:dk2>
       <a:lt2>
-        <a:srgbClr val="DDE4E9"/>
+        <a:srgbClr val="E8E8E8"/>
       </a:lt2>
       <a:accent1>
-        <a:srgbClr val="2D3854"/>
+        <a:srgbClr val="156082"/>
       </a:accent1>
       <a:accent2>
-        <a:srgbClr val="748EC7"/>
+        <a:srgbClr val="E97132"/>
       </a:accent2>
       <a:accent3>
-        <a:srgbClr val="B7CEF4"/>
+        <a:srgbClr val="196B24"/>
       </a:accent3>
       <a:accent4>
-        <a:srgbClr val="D3E4FA"/>
+        <a:srgbClr val="0F9ED5"/>
       </a:accent4>
       <a:accent5>
-        <a:srgbClr val="959FB0"/>
+        <a:srgbClr val="A02B93"/>
       </a:accent5>
       <a:accent6>
-        <a:srgbClr val="747D8E"/>
+        <a:srgbClr val="4EA72E"/>
       </a:accent6>
       <a:hlink>
         <a:srgbClr val="467886"/>
@@ -4535,7 +3998,7 @@
     </a:clrScheme>
     <a:fontScheme name="Office">
       <a:majorFont>
-        <a:latin typeface="Garamond" panose="02110004020202020204"/>
+        <a:latin typeface="Aptos Display" panose="02110004020202020204"/>
         <a:ea typeface=""/>
         <a:cs typeface=""/>
         <a:font script="Jpan" typeface="游ゴシック Light"/>
@@ -4587,7 +4050,7 @@
         <a:font script="Tfng" typeface="Ebrima"/>
       </a:majorFont>
       <a:minorFont>
-        <a:latin typeface="Garamond" panose="02110004020202020204"/>
+        <a:latin typeface="Aptos" panose="02110004020202020204"/>
         <a:ea typeface=""/>
         <a:cs typeface=""/>
         <a:font script="Jpan" typeface="游ゴシック"/>
@@ -5122,26 +4585,319 @@
 </a:theme>
 </file>
 
-<file path=ppt/webextensions/taskpanes.xml><?xml version="1.0" encoding="utf-8"?>
-<wetp:taskpanes xmlns:wetp="http://schemas.microsoft.com/office/webextensions/taskpanes/2010/11">
-  <wetp:taskpane dockstate="right" visibility="0" width="497" row="5">
-    <wetp:webextensionref xmlns:r="http://schemas.openxmlformats.org/officeDocument/2006/relationships" r:id="rId1"/>
-  </wetp:taskpane>
-</wetp:taskpanes>
-</file>
-
-<file path=ppt/webextensions/webextension1.xml><?xml version="1.0" encoding="utf-8"?>
-<we:webextension xmlns:we="http://schemas.microsoft.com/office/webextensions/webextension/2010/11" id="{27823CC5-3532-4028-BC57-0161AF6811D6}">
-  <we:reference id="f5f369e5-aa35-49d7-ad7b-638152ddb008" version="1.0.0.1" store="EXCatalog" storeType="EXCatalog"/>
-  <we:alternateReferences>
-    <we:reference id="WA200010001" version="1.0.0.1" store="en-US" storeType="OMEX"/>
-  </we:alternateReferences>
-  <we:properties>
-    <we:property name="claude.fileId" value="&quot;9088e57f-9c80-41b0-b084-38e47341f646&quot;"/>
-  </we:properties>
-  <we:bindings/>
-  <we:snapshot xmlns:r="http://schemas.openxmlformats.org/officeDocument/2006/relationships"/>
-</we:webextension>
+<file path=ppt/theme/theme3.xml><?xml version="1.0" encoding="utf-8"?>
+<a:theme xmlns:a="http://schemas.openxmlformats.org/drawingml/2006/main" name="Office Theme">
+  <a:themeElements>
+    <a:clrScheme name="Office">
+      <a:dk1>
+        <a:sysClr val="windowText" lastClr="000000"/>
+      </a:dk1>
+      <a:lt1>
+        <a:sysClr val="window" lastClr="FFFFFF"/>
+      </a:lt1>
+      <a:dk2>
+        <a:srgbClr val="0E2841"/>
+      </a:dk2>
+      <a:lt2>
+        <a:srgbClr val="E8E8E8"/>
+      </a:lt2>
+      <a:accent1>
+        <a:srgbClr val="156082"/>
+      </a:accent1>
+      <a:accent2>
+        <a:srgbClr val="E97132"/>
+      </a:accent2>
+      <a:accent3>
+        <a:srgbClr val="196B24"/>
+      </a:accent3>
+      <a:accent4>
+        <a:srgbClr val="0F9ED5"/>
+      </a:accent4>
+      <a:accent5>
+        <a:srgbClr val="A02B93"/>
+      </a:accent5>
+      <a:accent6>
+        <a:srgbClr val="4EA72E"/>
+      </a:accent6>
+      <a:hlink>
+        <a:srgbClr val="467886"/>
+      </a:hlink>
+      <a:folHlink>
+        <a:srgbClr val="96607D"/>
+      </a:folHlink>
+    </a:clrScheme>
+    <a:fontScheme name="Office">
+      <a:majorFont>
+        <a:latin typeface="Aptos Display" panose="02110004020202020204"/>
+        <a:ea typeface=""/>
+        <a:cs typeface=""/>
+        <a:font script="Jpan" typeface="游ゴシック Light"/>
+        <a:font script="Hang" typeface="맑은 고딕"/>
+        <a:font script="Hans" typeface="等线 Light"/>
+        <a:font script="Hant" typeface="新細明體"/>
+        <a:font script="Arab" typeface="Times New Roman"/>
+        <a:font script="Hebr" typeface="Times New Roman"/>
+        <a:font script="Thai" typeface="Angsana New"/>
+        <a:font script="Ethi" typeface="Nyala"/>
+        <a:font script="Beng" typeface="Vrinda"/>
+        <a:font script="Gujr" typeface="Shruti"/>
+        <a:font script="Khmr" typeface="MoolBoran"/>
+        <a:font script="Knda" typeface="Tunga"/>
+        <a:font script="Guru" typeface="Raavi"/>
+        <a:font script="Cans" typeface="Euphemia"/>
+        <a:font script="Cher" typeface="Plantagenet Cherokee"/>
+        <a:font script="Yiii" typeface="Microsoft Yi Baiti"/>
+        <a:font script="Tibt" typeface="Microsoft Himalaya"/>
+        <a:font script="Thaa" typeface="MV Boli"/>
+        <a:font script="Deva" typeface="Mangal"/>
+        <a:font script="Telu" typeface="Gautami"/>
+        <a:font script="Taml" typeface="Latha"/>
+        <a:font script="Syrc" typeface="Estrangelo Edessa"/>
+        <a:font script="Orya" typeface="Kalinga"/>
+        <a:font script="Mlym" typeface="Kartika"/>
+        <a:font script="Laoo" typeface="DokChampa"/>
+        <a:font script="Sinh" typeface="Iskoola Pota"/>
+        <a:font script="Mong" typeface="Mongolian Baiti"/>
+        <a:font script="Viet" typeface="Times New Roman"/>
+        <a:font script="Uigh" typeface="Microsoft Uighur"/>
+        <a:font script="Geor" typeface="Sylfaen"/>
+        <a:font script="Armn" typeface="Arial"/>
+        <a:font script="Bugi" typeface="Leelawadee UI"/>
+        <a:font script="Bopo" typeface="Microsoft JhengHei"/>
+        <a:font script="Java" typeface="Javanese Text"/>
+        <a:font script="Lisu" typeface="Segoe UI"/>
+        <a:font script="Mymr" typeface="Myanmar Text"/>
+        <a:font script="Nkoo" typeface="Ebrima"/>
+        <a:font script="Olck" typeface="Nirmala UI"/>
+        <a:font script="Osma" typeface="Ebrima"/>
+        <a:font script="Phag" typeface="Phagspa"/>
+        <a:font script="Syrn" typeface="Estrangelo Edessa"/>
+        <a:font script="Syrj" typeface="Estrangelo Edessa"/>
+        <a:font script="Syre" typeface="Estrangelo Edessa"/>
+        <a:font script="Sora" typeface="Nirmala UI"/>
+        <a:font script="Tale" typeface="Microsoft Tai Le"/>
+        <a:font script="Talu" typeface="Microsoft New Tai Lue"/>
+        <a:font script="Tfng" typeface="Ebrima"/>
+      </a:majorFont>
+      <a:minorFont>
+        <a:latin typeface="Aptos" panose="02110004020202020204"/>
+        <a:ea typeface=""/>
+        <a:cs typeface=""/>
+        <a:font script="Jpan" typeface="游ゴシック"/>
+        <a:font script="Hang" typeface="맑은 고딕"/>
+        <a:font script="Hans" typeface="等线"/>
+        <a:font script="Hant" typeface="新細明體"/>
+        <a:font script="Arab" typeface="Arial"/>
+        <a:font script="Hebr" typeface="Arial"/>
+        <a:font script="Thai" typeface="Cordia New"/>
+        <a:font script="Ethi" typeface="Nyala"/>
+        <a:font script="Beng" typeface="Vrinda"/>
+        <a:font script="Gujr" typeface="Shruti"/>
+        <a:font script="Khmr" typeface="DaunPenh"/>
+        <a:font script="Knda" typeface="Tunga"/>
+        <a:font script="Guru" typeface="Raavi"/>
+        <a:font script="Cans" typeface="Euphemia"/>
+        <a:font script="Cher" typeface="Plantagenet Cherokee"/>
+        <a:font script="Yiii" typeface="Microsoft Yi Baiti"/>
+        <a:font script="Tibt" typeface="Microsoft Himalaya"/>
+        <a:font script="Thaa" typeface="MV Boli"/>
+        <a:font script="Deva" typeface="Mangal"/>
+        <a:font script="Telu" typeface="Gautami"/>
+        <a:font script="Taml" typeface="Latha"/>
+        <a:font script="Syrc" typeface="Estrangelo Edessa"/>
+        <a:font script="Orya" typeface="Kalinga"/>
+        <a:font script="Mlym" typeface="Kartika"/>
+        <a:font script="Laoo" typeface="DokChampa"/>
+        <a:font script="Sinh" typeface="Iskoola Pota"/>
+        <a:font script="Mong" typeface="Mongolian Baiti"/>
+        <a:font script="Viet" typeface="Arial"/>
+        <a:font script="Uigh" typeface="Microsoft Uighur"/>
+        <a:font script="Geor" typeface="Sylfaen"/>
+        <a:font script="Armn" typeface="Arial"/>
+        <a:font script="Bugi" typeface="Leelawadee UI"/>
+        <a:font script="Bopo" typeface="Microsoft JhengHei"/>
+        <a:font script="Java" typeface="Javanese Text"/>
+        <a:font script="Lisu" typeface="Segoe UI"/>
+        <a:font script="Mymr" typeface="Myanmar Text"/>
+        <a:font script="Nkoo" typeface="Ebrima"/>
+        <a:font script="Olck" typeface="Nirmala UI"/>
+        <a:font script="Osma" typeface="Ebrima"/>
+        <a:font script="Phag" typeface="Phagspa"/>
+        <a:font script="Syrn" typeface="Estrangelo Edessa"/>
+        <a:font script="Syrj" typeface="Estrangelo Edessa"/>
+        <a:font script="Syre" typeface="Estrangelo Edessa"/>
+        <a:font script="Sora" typeface="Nirmala UI"/>
+        <a:font script="Tale" typeface="Microsoft Tai Le"/>
+        <a:font script="Talu" typeface="Microsoft New Tai Lue"/>
+        <a:font script="Tfng" typeface="Ebrima"/>
+      </a:minorFont>
+    </a:fontScheme>
+    <a:fmtScheme name="Office">
+      <a:fillStyleLst>
+        <a:solidFill>
+          <a:schemeClr val="phClr"/>
+        </a:solidFill>
+        <a:gradFill rotWithShape="1">
+          <a:gsLst>
+            <a:gs pos="0">
+              <a:schemeClr val="phClr">
+                <a:lumMod val="110000"/>
+                <a:satMod val="105000"/>
+                <a:tint val="67000"/>
+              </a:schemeClr>
+            </a:gs>
+            <a:gs pos="50000">
+              <a:schemeClr val="phClr">
+                <a:lumMod val="105000"/>
+                <a:satMod val="103000"/>
+                <a:tint val="73000"/>
+              </a:schemeClr>
+            </a:gs>
+            <a:gs pos="100000">
+              <a:schemeClr val="phClr">
+                <a:lumMod val="105000"/>
+                <a:satMod val="109000"/>
+                <a:tint val="81000"/>
+              </a:schemeClr>
+            </a:gs>
+          </a:gsLst>
+          <a:lin ang="5400000" scaled="0"/>
+        </a:gradFill>
+        <a:gradFill rotWithShape="1">
+          <a:gsLst>
+            <a:gs pos="0">
+              <a:schemeClr val="phClr">
+                <a:satMod val="103000"/>
+                <a:lumMod val="102000"/>
+                <a:tint val="94000"/>
+              </a:schemeClr>
+            </a:gs>
+            <a:gs pos="50000">
+              <a:schemeClr val="phClr">
+                <a:satMod val="110000"/>
+                <a:lumMod val="100000"/>
+                <a:shade val="100000"/>
+              </a:schemeClr>
+            </a:gs>
+            <a:gs pos="100000">
+              <a:schemeClr val="phClr">
+                <a:lumMod val="99000"/>
+                <a:satMod val="120000"/>
+                <a:shade val="78000"/>
+              </a:schemeClr>
+            </a:gs>
+          </a:gsLst>
+          <a:lin ang="5400000" scaled="0"/>
+        </a:gradFill>
+      </a:fillStyleLst>
+      <a:lnStyleLst>
+        <a:ln w="12700" cap="flat" cmpd="sng" algn="ctr">
+          <a:solidFill>
+            <a:schemeClr val="phClr"/>
+          </a:solidFill>
+          <a:prstDash val="solid"/>
+          <a:miter lim="800000"/>
+        </a:ln>
+        <a:ln w="19050" cap="flat" cmpd="sng" algn="ctr">
+          <a:solidFill>
+            <a:schemeClr val="phClr"/>
+          </a:solidFill>
+          <a:prstDash val="solid"/>
+          <a:miter lim="800000"/>
+        </a:ln>
+        <a:ln w="25400" cap="flat" cmpd="sng" algn="ctr">
+          <a:solidFill>
+            <a:schemeClr val="phClr"/>
+          </a:solidFill>
+          <a:prstDash val="solid"/>
+          <a:miter lim="800000"/>
+        </a:ln>
+      </a:lnStyleLst>
+      <a:effectStyleLst>
+        <a:effectStyle>
+          <a:effectLst/>
+        </a:effectStyle>
+        <a:effectStyle>
+          <a:effectLst/>
+        </a:effectStyle>
+        <a:effectStyle>
+          <a:effectLst>
+            <a:outerShdw blurRad="57150" dist="19050" dir="5400000" algn="ctr" rotWithShape="0">
+              <a:srgbClr val="000000">
+                <a:alpha val="63000"/>
+              </a:srgbClr>
+            </a:outerShdw>
+          </a:effectLst>
+        </a:effectStyle>
+      </a:effectStyleLst>
+      <a:bgFillStyleLst>
+        <a:solidFill>
+          <a:schemeClr val="phClr"/>
+        </a:solidFill>
+        <a:solidFill>
+          <a:schemeClr val="phClr">
+            <a:tint val="95000"/>
+            <a:satMod val="170000"/>
+          </a:schemeClr>
+        </a:solidFill>
+        <a:gradFill rotWithShape="1">
+          <a:gsLst>
+            <a:gs pos="0">
+              <a:schemeClr val="phClr">
+                <a:tint val="93000"/>
+                <a:satMod val="150000"/>
+                <a:shade val="98000"/>
+                <a:lumMod val="102000"/>
+              </a:schemeClr>
+            </a:gs>
+            <a:gs pos="50000">
+              <a:schemeClr val="phClr">
+                <a:tint val="98000"/>
+                <a:satMod val="130000"/>
+                <a:shade val="90000"/>
+                <a:lumMod val="103000"/>
+              </a:schemeClr>
+            </a:gs>
+            <a:gs pos="100000">
+              <a:schemeClr val="phClr">
+                <a:shade val="63000"/>
+                <a:satMod val="120000"/>
+              </a:schemeClr>
+            </a:gs>
+          </a:gsLst>
+          <a:lin ang="5400000" scaled="0"/>
+        </a:gradFill>
+      </a:bgFillStyleLst>
+    </a:fmtScheme>
+  </a:themeElements>
+  <a:objectDefaults>
+    <a:lnDef>
+      <a:spPr/>
+      <a:bodyPr/>
+      <a:lstStyle/>
+      <a:style>
+        <a:lnRef idx="2">
+          <a:schemeClr val="accent1"/>
+        </a:lnRef>
+        <a:fillRef idx="0">
+          <a:schemeClr val="accent1"/>
+        </a:fillRef>
+        <a:effectRef idx="1">
+          <a:schemeClr val="accent1"/>
+        </a:effectRef>
+        <a:fontRef idx="minor">
+          <a:schemeClr val="tx1"/>
+        </a:fontRef>
+      </a:style>
+    </a:lnDef>
+  </a:objectDefaults>
+  <a:extraClrSchemeLst/>
+  <a:extLst>
+    <a:ext uri="{05A4C25C-085E-4340-85A3-A5531E510DB2}">
+      <thm15:themeFamily xmlns:thm15="http://schemas.microsoft.com/office/thememl/2012/main" name="Office Theme" id="{2E142A2C-CD16-42D6-873A-C26D2A0506FA}" vid="{1BDDFF52-6CD6-40A5-AB3C-68EB2F1E4D0A}"/>
+    </a:ext>
+  </a:extLst>
+</a:theme>
 </file>
 
 <file path=customXml/item1.xml><?xml version="1.0" encoding="utf-8"?>
@@ -5156,6 +4912,15 @@
 </file>
 
 <file path=customXml/item2.xml><?xml version="1.0" encoding="utf-8"?>
+<?mso-contentType ?>
+<FormTemplates xmlns="http://schemas.microsoft.com/sharepoint/v3/contenttype/forms">
+  <Display>DocumentLibraryForm</Display>
+  <Edit>DocumentLibraryForm</Edit>
+  <New>DocumentLibraryForm</New>
+</FormTemplates>
+</file>
+
+<file path=customXml/item3.xml><?xml version="1.0" encoding="utf-8"?>
 <ct:contentTypeSchema xmlns:ct="http://schemas.microsoft.com/office/2006/metadata/contentType" xmlns:ma="http://schemas.microsoft.com/office/2006/metadata/properties/metaAttributes" ct:_="" ma:_="" ma:contentTypeName="Document" ma:contentTypeID="0x0101001AE18CDDA91EA54E81CDC1F80B3C723A" ma:contentTypeVersion="16" ma:contentTypeDescription="Create a new document." ma:contentTypeScope="" ma:versionID="33073373971db1b872ee5eb131e93d34">
   <xsd:schema xmlns:xsd="http://www.w3.org/2001/XMLSchema" xmlns:xs="http://www.w3.org/2001/XMLSchema" xmlns:p="http://schemas.microsoft.com/office/2006/metadata/properties" xmlns:ns2="9c847581-c6dc-49d0-bcc9-bf2d078b5e9f" xmlns:ns3="81c21d18-37f9-40bb-8431-3553deeeb9c0" targetNamespace="http://schemas.microsoft.com/office/2006/metadata/properties" ma:root="true" ma:fieldsID="4880e41748d87791d67efd712764d58d" ns2:_="" ns3:_="">
     <xsd:import namespace="9c847581-c6dc-49d0-bcc9-bf2d078b5e9f"/>
@@ -5396,49 +5161,46 @@
 </ct:contentTypeSchema>
 </file>
 
-<file path=customXml/item3.xml><?xml version="1.0" encoding="utf-8"?>
-<?mso-contentType ?>
-<FormTemplates xmlns="http://schemas.microsoft.com/sharepoint/v3/contenttype/forms">
-  <Display>DocumentLibraryForm</Display>
-  <Edit>DocumentLibraryForm</Edit>
-  <New>DocumentLibraryForm</New>
-</FormTemplates>
-</file>
-
 <file path=customXml/itemProps1.xml><?xml version="1.0" encoding="utf-8"?>
-<ds:datastoreItem xmlns:ds="http://schemas.openxmlformats.org/officeDocument/2006/customXml" ds:itemID="{43CF31C0-0F61-4749-A74E-603C710DC22C}">
+<ds:datastoreItem xmlns:ds="http://schemas.openxmlformats.org/officeDocument/2006/customXml" ds:itemID="{464C398C-C6F4-4446-8548-CD1C52F6F593}">
   <ds:schemaRefs>
+    <ds:schemaRef ds:uri="9c847581-c6dc-49d0-bcc9-bf2d078b5e9f"/>
     <ds:schemaRef ds:uri="http://schemas.microsoft.com/office/2006/metadata/properties"/>
+    <ds:schemaRef ds:uri="http://schemas.microsoft.com/office/2006/documentManagement/types"/>
+    <ds:schemaRef ds:uri="81c21d18-37f9-40bb-8431-3553deeeb9c0"/>
+    <ds:schemaRef ds:uri="http://www.w3.org/XML/1998/namespace"/>
+    <ds:schemaRef ds:uri="http://purl.org/dc/elements/1.1/"/>
+    <ds:schemaRef ds:uri="http://purl.org/dc/terms/"/>
     <ds:schemaRef ds:uri="http://schemas.microsoft.com/office/infopath/2007/PartnerControls"/>
-    <ds:schemaRef ds:uri="9c847581-c6dc-49d0-bcc9-bf2d078b5e9f"/>
-    <ds:schemaRef ds:uri="81c21d18-37f9-40bb-8431-3553deeeb9c0"/>
+    <ds:schemaRef ds:uri="http://schemas.openxmlformats.org/package/2006/metadata/core-properties"/>
+    <ds:schemaRef ds:uri="http://purl.org/dc/dcmitype/"/>
   </ds:schemaRefs>
 </ds:datastoreItem>
 </file>
 
 <file path=customXml/itemProps2.xml><?xml version="1.0" encoding="utf-8"?>
-<ds:datastoreItem xmlns:ds="http://schemas.openxmlformats.org/officeDocument/2006/customXml" ds:itemID="{589A32DA-BC7A-4E79-A8DF-74D492A66200}">
+<ds:datastoreItem xmlns:ds="http://schemas.openxmlformats.org/officeDocument/2006/customXml" ds:itemID="{6788ABAB-4555-408E-A9EB-59B7C6556F86}">
   <ds:schemaRefs>
-    <ds:schemaRef ds:uri="http://schemas.microsoft.com/office/2006/metadata/contentType"/>
-    <ds:schemaRef ds:uri="http://schemas.microsoft.com/office/2006/metadata/properties/metaAttributes"/>
-    <ds:schemaRef ds:uri="http://www.w3.org/2001/XMLSchema"/>
-    <ds:schemaRef ds:uri="http://schemas.microsoft.com/office/2006/metadata/properties"/>
-    <ds:schemaRef ds:uri="9c847581-c6dc-49d0-bcc9-bf2d078b5e9f"/>
-    <ds:schemaRef ds:uri="81c21d18-37f9-40bb-8431-3553deeeb9c0"/>
-    <ds:schemaRef ds:uri="http://schemas.microsoft.com/office/2006/documentManagement/types"/>
-    <ds:schemaRef ds:uri="http://schemas.microsoft.com/office/infopath/2007/PartnerControls"/>
-    <ds:schemaRef ds:uri="http://schemas.openxmlformats.org/package/2006/metadata/core-properties"/>
-    <ds:schemaRef ds:uri="http://purl.org/dc/elements/1.1/"/>
-    <ds:schemaRef ds:uri="http://purl.org/dc/terms/"/>
-    <ds:schemaRef ds:uri="http://schemas.microsoft.com/internal/obd"/>
+    <ds:schemaRef ds:uri="http://schemas.microsoft.com/sharepoint/v3/contenttype/forms"/>
   </ds:schemaRefs>
 </ds:datastoreItem>
 </file>
 
 <file path=customXml/itemProps3.xml><?xml version="1.0" encoding="utf-8"?>
-<ds:datastoreItem xmlns:ds="http://schemas.openxmlformats.org/officeDocument/2006/customXml" ds:itemID="{4CA94191-D1F5-4B45-A16A-85679FE5E356}">
+<ds:datastoreItem xmlns:ds="http://schemas.openxmlformats.org/officeDocument/2006/customXml" ds:itemID="{390D208D-4D85-4292-8115-7DBD50DC39B2}">
   <ds:schemaRefs>
-    <ds:schemaRef ds:uri="http://schemas.microsoft.com/sharepoint/v3/contenttype/forms"/>
+    <ds:schemaRef ds:uri="81c21d18-37f9-40bb-8431-3553deeeb9c0"/>
+    <ds:schemaRef ds:uri="9c847581-c6dc-49d0-bcc9-bf2d078b5e9f"/>
+    <ds:schemaRef ds:uri="http://purl.org/dc/elements/1.1/"/>
+    <ds:schemaRef ds:uri="http://purl.org/dc/terms/"/>
+    <ds:schemaRef ds:uri="http://schemas.microsoft.com/internal/obd"/>
+    <ds:schemaRef ds:uri="http://schemas.microsoft.com/office/2006/documentManagement/types"/>
+    <ds:schemaRef ds:uri="http://schemas.microsoft.com/office/2006/metadata/contentType"/>
+    <ds:schemaRef ds:uri="http://schemas.microsoft.com/office/2006/metadata/properties"/>
+    <ds:schemaRef ds:uri="http://schemas.microsoft.com/office/2006/metadata/properties/metaAttributes"/>
+    <ds:schemaRef ds:uri="http://schemas.microsoft.com/office/infopath/2007/PartnerControls"/>
+    <ds:schemaRef ds:uri="http://schemas.openxmlformats.org/package/2006/metadata/core-properties"/>
+    <ds:schemaRef ds:uri="http://www.w3.org/2001/XMLSchema"/>
   </ds:schemaRefs>
 </ds:datastoreItem>
 </file>